--- a/docs/training/teacher-daily-app/Teacher-Daily-App-Training.pptx
+++ b/docs/training/teacher-daily-app/Teacher-Daily-App-Training.pptx
@@ -5,7 +5,7 @@
     <p:sldMasterId id="2147483648" r:id="rId1"/>
   </p:sldMasterIdLst>
   <p:notesMasterIdLst>
-    <p:notesMasterId r:id="rId21"/>
+    <p:notesMasterId r:id="rId22"/>
   </p:notesMasterIdLst>
   <p:sldIdLst>
     <p:sldId id="256" r:id="rId2"/>
@@ -15,18 +15,19 @@
     <p:sldId id="271" r:id="rId6"/>
     <p:sldId id="273" r:id="rId7"/>
     <p:sldId id="274" r:id="rId8"/>
-    <p:sldId id="258" r:id="rId9"/>
-    <p:sldId id="259" r:id="rId10"/>
-    <p:sldId id="260" r:id="rId11"/>
-    <p:sldId id="261" r:id="rId12"/>
-    <p:sldId id="262" r:id="rId13"/>
-    <p:sldId id="263" r:id="rId14"/>
-    <p:sldId id="264" r:id="rId15"/>
-    <p:sldId id="265" r:id="rId16"/>
-    <p:sldId id="266" r:id="rId17"/>
-    <p:sldId id="267" r:id="rId18"/>
-    <p:sldId id="268" r:id="rId19"/>
-    <p:sldId id="269" r:id="rId20"/>
+    <p:sldId id="276" r:id="rId9"/>
+    <p:sldId id="258" r:id="rId10"/>
+    <p:sldId id="259" r:id="rId11"/>
+    <p:sldId id="260" r:id="rId12"/>
+    <p:sldId id="261" r:id="rId13"/>
+    <p:sldId id="262" r:id="rId14"/>
+    <p:sldId id="263" r:id="rId15"/>
+    <p:sldId id="264" r:id="rId16"/>
+    <p:sldId id="265" r:id="rId17"/>
+    <p:sldId id="266" r:id="rId18"/>
+    <p:sldId id="267" r:id="rId19"/>
+    <p:sldId id="268" r:id="rId20"/>
+    <p:sldId id="269" r:id="rId21"/>
   </p:sldIdLst>
   <p:sldSz cx="12192000" cy="6858000"/>
   <p:notesSz cx="6858000" cy="9144000"/>
@@ -169,6 +170,34 @@
     </inkml:brush>
   </inkml:definitions>
   <inkml:trace contextRef="#ctx0" brushRef="#br0">1 1082 24575,'25'-29'0,"-1"-2"0,-2 0 0,-1-1 0,32-67 0,1 0 0,7-14 0,26-40 0,-74 133 0,1 0 0,1 2 0,1 0 0,1 1 0,26-21 0,29-21 0,-31 24 0,1 3 0,1 0 0,2 3 0,86-42 0,-83 50 0,1 3 0,1 1 0,1 3 0,75-11 0,-21 16 0,123 7 0,-121 3 0,-102-1 0,0 1 0,0-1 0,-1 1 0,1 0 0,0 0 0,-1 1 0,1-1 0,-1 1 0,1 0 0,-1 0 0,0 1 0,0-1 0,0 1 0,5 3 0,-2 1 0,0 0 0,-1 0 0,1 1 0,-1-1 0,-1 1 0,8 15 0,-1 2 0,-1 1 0,-1 1 0,-1-1 0,4 30 0,1 7 0,-4 1 0,-2 1 0,-1 85 0,-8 462 0,-17-451 0,18 364 0,1-523 0,-1 0 0,0 0 0,0-1 0,0 1 0,-1 0 0,1 0 0,0 0 0,-1 0 0,1-1 0,-1 1 0,0 0 0,1-1 0,-1 1 0,0 0 0,0-1 0,0 1 0,0-1 0,0 1 0,0-1 0,-1 1 0,1-1 0,0 0 0,-1 0 0,1 0 0,-1 0 0,1 0 0,-3 1 0,2-2 0,1 1 0,-1-1 0,0 0 0,0-1 0,1 1 0,-1 0 0,0 0 0,1-1 0,-1 1 0,1-1 0,-1 1 0,1-1 0,-1 0 0,1 1 0,-1-1 0,1 0 0,-1 0 0,1 0 0,0 0 0,0 0 0,-1-1 0,1 1 0,0 0 0,0-1 0,0 1 0,0 0 0,0-1 0,1 1 0,-1-1 0,-1-2 0,-25-70 0,22 57 0,-1-1 0,-16-30 0,16 35 0,0 0 0,0 0 0,-4-20 0,8 27 0,0 1 0,1-1 0,0 0 0,0 1 0,1-1 0,-1 0 0,1 0 0,1 0 0,-1 1 0,1-1 0,1-6 0,-2 11 0,0 0 0,0 1 0,1-1 0,-1 0 0,0 1 0,0-1 0,1 0 0,-1 1 0,1-1 0,-1 1 0,0-1 0,1 0 0,-1 1 0,1-1 0,-1 1 0,1-1 0,-1 1 0,1-1 0,0 1 0,-1 0 0,1-1 0,0 1 0,-1 0 0,1-1 0,0 1 0,-1 0 0,1 0 0,0 0 0,-1 0 0,1-1 0,1 1 0,0 1 0,-1 0 0,1-1 0,-1 1 0,1 0 0,-1 0 0,1 0 0,-1 0 0,1 0 0,-1 0 0,0 0 0,0 0 0,3 3 0,27 45 0,-30-47 0,13 27 0,-2 0 0,15 54 0,11 29 0,-28-66 0,-9-40 0,-1 0 0,1-1 0,1 1 0,-1 0 0,1-1 0,0 1 0,5 8 0,-7-13 0,0-1 0,0 0 0,0 0 0,0 0 0,0 1 0,0-1 0,1 0 0,-1 0 0,0 0 0,0 0 0,0 1 0,1-1 0,-1 0 0,0 0 0,0 0 0,0 0 0,1 0 0,-1 0 0,0 0 0,0 0 0,1 1 0,-1-1 0,0 0 0,0 0 0,0 0 0,1 0 0,-1 0 0,0 0 0,0 0 0,1 0 0,-1-1 0,0 1 0,0 0 0,1 0 0,-1 0 0,0 0 0,0 0 0,0 0 0,1 0 0,-1-1 0,9-11 0,5-23 0,-11 27 0,29-75 0,-21 52 0,1-1 0,29-51 0,22-4-1365,-56 78-5461</inkml:trace>
+</inkml:ink>
+</file>
+
+<file path=ppt/ink/ink10.xml><?xml version="1.0" encoding="utf-8"?>
+<inkml:ink xmlns:inkml="http://www.w3.org/2003/InkML">
+  <inkml:definitions>
+    <inkml:context xml:id="ctx0">
+      <inkml:inkSource xml:id="inkSrc0">
+        <inkml:traceFormat>
+          <inkml:channel name="X" type="integer" min="-2.14748E9" max="2.14748E9" units="cm"/>
+          <inkml:channel name="Y" type="integer" min="-2.14748E9" max="2.14748E9" units="cm"/>
+          <inkml:channel name="F" type="integer" max="32767" units="dev"/>
+        </inkml:traceFormat>
+        <inkml:channelProperties>
+          <inkml:channelProperty channel="X" name="resolution" value="1000" units="1/cm"/>
+          <inkml:channelProperty channel="Y" name="resolution" value="1000" units="1/cm"/>
+          <inkml:channelProperty channel="F" name="resolution" value="0" units="1/dev"/>
+        </inkml:channelProperties>
+      </inkml:inkSource>
+      <inkml:timestamp xml:id="ts0" timeString="2026-10-13T22:02:38.683"/>
+    </inkml:context>
+    <inkml:brush xml:id="br0">
+      <inkml:brushProperty name="width" value="0.035" units="cm"/>
+      <inkml:brushProperty name="height" value="0.035" units="cm"/>
+      <inkml:brushProperty name="color" value="#E71224"/>
+    </inkml:brush>
+  </inkml:definitions>
+  <inkml:trace contextRef="#ctx0" brushRef="#br0">0 875 24575,'7'-2'0,"0"0"0,-1-1 0,1 1 0,-1-1 0,0 0 0,0-1 0,0 1 0,0-1 0,-1-1 0,0 1 0,1-1 0,-2 0 0,6-5 0,7-6 0,48-51 0,-46 46 0,1 0 0,33-27 0,60-26 0,2 4 0,178-78 0,-281 142 0,79-41 0,74-32 0,-43 30 0,-46 17 0,88-25 0,-131 49 0,-18 5 0,0 0 0,0-1 0,0-1 0,-1 0 0,1-1 0,-1-1 0,24-15 0,-37 22 0,-1 0 0,0 0 0,0 0 0,1-1 0,-1 1 0,0 0 0,0 0 0,0 0 0,1-1 0,-1 1 0,0 0 0,0 0 0,0 0 0,0-1 0,1 1 0,-1 0 0,0 0 0,0-1 0,0 1 0,0 0 0,0-1 0,0 1 0,0 0 0,0 0 0,0-1 0,0 1 0,0 0 0,0-1 0,0 1 0,0 0 0,0 0 0,0-1 0,0 1 0,0 0 0,0-1 0,0 1 0,0 0 0,0 0 0,-1-1 0,1 1 0,0 0 0,0 0 0,0 0 0,-1-1 0,1 1 0,0 0 0,-19-7 0,-22 4 0,-37 4 0,66 0 0,51-1 0,12-1 0,-25 0 0,0 0 0,30 5 0,-56-4 0,0 0 0,1 0 0,-1 0 0,0 0 0,1 1 0,-1-1 0,0 0 0,1 0 0,-1 0 0,0 1 0,0-1 0,1 0 0,-1 0 0,0 1 0,0-1 0,1 0 0,-1 0 0,0 1 0,0-1 0,0 0 0,0 1 0,1-1 0,-1 0 0,0 1 0,0-1 0,0 0 0,0 1 0,0-1 0,0 0 0,0 1 0,0-1 0,0 0 0,0 1 0,0-1 0,0 1 0,0-1 0,0 0 0,0 1 0,-1-1 0,1 0 0,0 1 0,0-1 0,0 0 0,0 0 0,-1 1 0,1-1 0,0 0 0,0 1 0,-1-1 0,1 0 0,0 0 0,0 1 0,-1-1 0,1 0 0,0 0 0,-1 0 0,1 0 0,0 1 0,-1-1 0,-27 25 0,16-13 0,2-1-341,0 1 0,1 0-1,-14 27 1,13-21-6485</inkml:trace>
 </inkml:ink>
 </file>
 
@@ -636,7 +665,7 @@
           <a:lstStyle/>
           <a:p>
             <a:r>
-              <a:t>Weekly + today's anchor for Monday planning; Daily on teaching days.</a:t>
+              <a:t>Date, Time, Class, Status are enough—they don't need every column.</a:t>
             </a:r>
           </a:p>
         </p:txBody>
@@ -706,7 +735,7 @@
           <a:lstStyle/>
           <a:p>
             <a:r>
-              <a:t>Scan status summary pills above the table when present.</a:t>
+              <a:t>Weekly + today's anchor for Monday planning; Daily on teaching days.</a:t>
             </a:r>
           </a:p>
         </p:txBody>
@@ -776,7 +805,7 @@
           <a:lstStyle/>
           <a:p>
             <a:r>
-              <a:t>One session at a time—same steps every class.</a:t>
+              <a:t>Scan status summary pills above the table when present.</a:t>
             </a:r>
           </a:p>
         </p:txBody>
@@ -846,7 +875,7 @@
           <a:lstStyle/>
           <a:p>
             <a:r>
-              <a:t>Next slide is the daily checklist.</a:t>
+              <a:t>One session at a time—same steps every class.</a:t>
             </a:r>
           </a:p>
         </p:txBody>
@@ -916,7 +945,7 @@
           <a:lstStyle/>
           <a:p>
             <a:r>
-              <a:t>If a section is missing, focus on what you see on screen.</a:t>
+              <a:t>Next slide is the daily checklist.</a:t>
             </a:r>
           </a:p>
         </p:txBody>
@@ -986,7 +1015,7 @@
           <a:lstStyle/>
           <a:p>
             <a:r>
-              <a:t>Save before switching sessions or closing the browser tab.</a:t>
+              <a:t>If a section is missing, focus on what you see on screen.</a:t>
             </a:r>
           </a:p>
         </p:txBody>
@@ -1056,7 +1085,7 @@
           <a:lstStyle/>
           <a:p>
             <a:r>
-              <a:t>Status is not the same as attendance—you need both where required.</a:t>
+              <a:t>Save before switching sessions or closing the browser tab.</a:t>
             </a:r>
           </a:p>
         </p:txBody>
@@ -1126,7 +1155,7 @@
           <a:lstStyle/>
           <a:p>
             <a:r>
-              <a:t>This is how you know you're caught up for the week.</a:t>
+              <a:t>Status is not the same as attendance—you need both where required.</a:t>
             </a:r>
           </a:p>
         </p:txBody>
@@ -1196,7 +1225,7 @@
           <a:lstStyle/>
           <a:p>
             <a:r>
-              <a:t>Normalize asking for help—reduces fear of breaking the app.</a:t>
+              <a:t>This is how you know you're caught up for the week.</a:t>
             </a:r>
           </a:p>
         </p:txBody>
@@ -1266,7 +1295,7 @@
           <a:lstStyle/>
           <a:p>
             <a:r>
-              <a:t>Offer 5 minutes hands-on if training is in person.</a:t>
+              <a:t>Normalize asking for help—reduces fear of breaking the app.</a:t>
             </a:r>
           </a:p>
         </p:txBody>
@@ -1337,6 +1366,76 @@
           <a:p>
             <a:r>
               <a:t>If you can use email, you can do this.</a:t>
+            </a:r>
+          </a:p>
+        </p:txBody>
+      </p:sp>
+      <p:sp>
+        <p:nvSpPr>
+          <p:cNvPr id="4" name="Slide Number Placeholder 3"/>
+          <p:cNvSpPr>
+            <a:spLocks noGrp="1"/>
+          </p:cNvSpPr>
+          <p:nvPr>
+            <p:ph type="sldNum" sz="quarter" idx="5"/>
+          </p:nvPr>
+        </p:nvSpPr>
+        <p:spPr/>
+      </p:sp>
+    </p:spTree>
+  </p:cSld>
+  <p:clrMapOvr>
+    <a:masterClrMapping/>
+  </p:clrMapOvr>
+</p:notes>
+</file>
+
+<file path=ppt/notesSlides/notesSlide20.xml><?xml version="1.0" encoding="utf-8"?>
+<p:notes xmlns:a="http://schemas.openxmlformats.org/drawingml/2006/main" xmlns:r="http://schemas.openxmlformats.org/officeDocument/2006/relationships" xmlns:p="http://schemas.openxmlformats.org/presentationml/2006/main">
+  <p:cSld>
+    <p:spTree>
+      <p:nvGrpSpPr>
+        <p:cNvPr id="1" name=""/>
+        <p:cNvGrpSpPr/>
+        <p:nvPr/>
+      </p:nvGrpSpPr>
+      <p:grpSpPr>
+        <a:xfrm>
+          <a:off x="0" y="0"/>
+          <a:ext cx="0" cy="0"/>
+          <a:chOff x="0" y="0"/>
+          <a:chExt cx="0" cy="0"/>
+        </a:xfrm>
+      </p:grpSpPr>
+      <p:sp>
+        <p:nvSpPr>
+          <p:cNvPr id="2" name="Slide Image Placeholder 1"/>
+          <p:cNvSpPr>
+            <a:spLocks noGrp="1" noRot="1" noChangeAspect="1"/>
+          </p:cNvSpPr>
+          <p:nvPr>
+            <p:ph type="sldImg" idx="2"/>
+          </p:nvPr>
+        </p:nvSpPr>
+        <p:spPr/>
+      </p:sp>
+      <p:sp>
+        <p:nvSpPr>
+          <p:cNvPr id="3" name="Notes Placeholder 2"/>
+          <p:cNvSpPr>
+            <a:spLocks noGrp="1"/>
+          </p:cNvSpPr>
+          <p:nvPr>
+            <p:ph type="body" sz="quarter" idx="3"/>
+          </p:nvPr>
+        </p:nvSpPr>
+        <p:spPr/>
+        <p:txBody>
+          <a:bodyPr/>
+          <a:lstStyle/>
+          <a:p>
+            <a:r>
+              <a:t>Offer 5 minutes hands-on if training is in person.</a:t>
             </a:r>
           </a:p>
         </p:txBody>
@@ -1861,7 +1960,13 @@
   <p:cSld>
     <p:spTree>
       <p:nvGrpSpPr>
-        <p:cNvPr id="1" name=""/>
+        <p:cNvPr id="1" name="">
+          <a:extLst>
+            <a:ext uri="{FF2B5EF4-FFF2-40B4-BE49-F238E27FC236}">
+              <a16:creationId xmlns:a16="http://schemas.microsoft.com/office/drawing/2014/main" id="{AF7D9520-15D2-64DA-8213-4F7796D25630}"/>
+            </a:ext>
+          </a:extLst>
+        </p:cNvPr>
         <p:cNvGrpSpPr/>
         <p:nvPr/>
       </p:nvGrpSpPr>
@@ -1875,7 +1980,13 @@
       </p:grpSpPr>
       <p:sp>
         <p:nvSpPr>
-          <p:cNvPr id="2" name="Slide Image Placeholder 1"/>
+          <p:cNvPr id="2" name="Slide Image Placeholder 1">
+            <a:extLst>
+              <a:ext uri="{FF2B5EF4-FFF2-40B4-BE49-F238E27FC236}">
+                <a16:creationId xmlns:a16="http://schemas.microsoft.com/office/drawing/2014/main" id="{D132AD5D-C6B6-AAA6-9F18-602EE86C7057}"/>
+              </a:ext>
+            </a:extLst>
+          </p:cNvPr>
           <p:cNvSpPr>
             <a:spLocks noGrp="1" noRot="1" noChangeAspect="1"/>
           </p:cNvSpPr>
@@ -1887,7 +1998,13 @@
       </p:sp>
       <p:sp>
         <p:nvSpPr>
-          <p:cNvPr id="3" name="Notes Placeholder 2"/>
+          <p:cNvPr id="3" name="Notes Placeholder 2">
+            <a:extLst>
+              <a:ext uri="{FF2B5EF4-FFF2-40B4-BE49-F238E27FC236}">
+                <a16:creationId xmlns:a16="http://schemas.microsoft.com/office/drawing/2014/main" id="{DDF709B6-FC2E-8D7F-ED17-E5EB3D421C8B}"/>
+              </a:ext>
+            </a:extLst>
+          </p:cNvPr>
           <p:cNvSpPr>
             <a:spLocks noGrp="1"/>
           </p:cNvSpPr>
@@ -1908,7 +2025,13 @@
       </p:sp>
       <p:sp>
         <p:nvSpPr>
-          <p:cNvPr id="4" name="Slide Number Placeholder 3"/>
+          <p:cNvPr id="4" name="Slide Number Placeholder 3">
+            <a:extLst>
+              <a:ext uri="{FF2B5EF4-FFF2-40B4-BE49-F238E27FC236}">
+                <a16:creationId xmlns:a16="http://schemas.microsoft.com/office/drawing/2014/main" id="{00745BDC-0EF7-DB8F-F5F7-8A10EB8CD548}"/>
+              </a:ext>
+            </a:extLst>
+          </p:cNvPr>
           <p:cNvSpPr>
             <a:spLocks noGrp="1"/>
           </p:cNvSpPr>
@@ -1919,6 +2042,11 @@
         <p:spPr/>
       </p:sp>
     </p:spTree>
+    <p:extLst>
+      <p:ext uri="{BB962C8B-B14F-4D97-AF65-F5344CB8AC3E}">
+        <p14:creationId xmlns:p14="http://schemas.microsoft.com/office/powerpoint/2010/main" val="317456073"/>
+      </p:ext>
+    </p:extLst>
   </p:cSld>
   <p:clrMapOvr>
     <a:masterClrMapping/>
@@ -1971,7 +2099,7 @@
           <a:lstStyle/>
           <a:p>
             <a:r>
-              <a:t>Date, Time, Class, Status are enough—they don't need every column.</a:t>
+              <a:t>This is the only front door they need for planning.</a:t>
             </a:r>
           </a:p>
         </p:txBody>
@@ -2175,7 +2303,7 @@
           <a:p>
             <a:fld id="{5BCAD085-E8A6-8845-BD4E-CB4CCA059FC4}" type="datetimeFigureOut">
               <a:rPr lang="en-US" smtClean="0"/>
-              <a:t>10/12/2026</a:t>
+              <a:t>10/13/2026</a:t>
             </a:fld>
             <a:endParaRPr lang="en-US"/>
           </a:p>
@@ -2343,7 +2471,7 @@
           <a:p>
             <a:fld id="{5BCAD085-E8A6-8845-BD4E-CB4CCA059FC4}" type="datetimeFigureOut">
               <a:rPr lang="en-US" smtClean="0"/>
-              <a:t>10/12/2026</a:t>
+              <a:t>10/13/2026</a:t>
             </a:fld>
             <a:endParaRPr lang="en-US"/>
           </a:p>
@@ -2521,7 +2649,7 @@
           <a:p>
             <a:fld id="{5BCAD085-E8A6-8845-BD4E-CB4CCA059FC4}" type="datetimeFigureOut">
               <a:rPr lang="en-US" smtClean="0"/>
-              <a:t>10/12/2026</a:t>
+              <a:t>10/13/2026</a:t>
             </a:fld>
             <a:endParaRPr lang="en-US"/>
           </a:p>
@@ -2689,7 +2817,7 @@
           <a:p>
             <a:fld id="{5BCAD085-E8A6-8845-BD4E-CB4CCA059FC4}" type="datetimeFigureOut">
               <a:rPr lang="en-US" smtClean="0"/>
-              <a:t>10/12/2026</a:t>
+              <a:t>10/13/2026</a:t>
             </a:fld>
             <a:endParaRPr lang="en-US"/>
           </a:p>
@@ -2934,7 +3062,7 @@
           <a:p>
             <a:fld id="{5BCAD085-E8A6-8845-BD4E-CB4CCA059FC4}" type="datetimeFigureOut">
               <a:rPr lang="en-US" smtClean="0"/>
-              <a:t>10/12/2026</a:t>
+              <a:t>10/13/2026</a:t>
             </a:fld>
             <a:endParaRPr lang="en-US"/>
           </a:p>
@@ -3219,7 +3347,7 @@
           <a:p>
             <a:fld id="{5BCAD085-E8A6-8845-BD4E-CB4CCA059FC4}" type="datetimeFigureOut">
               <a:rPr lang="en-US" smtClean="0"/>
-              <a:t>10/12/2026</a:t>
+              <a:t>10/13/2026</a:t>
             </a:fld>
             <a:endParaRPr lang="en-US"/>
           </a:p>
@@ -3638,7 +3766,7 @@
           <a:p>
             <a:fld id="{5BCAD085-E8A6-8845-BD4E-CB4CCA059FC4}" type="datetimeFigureOut">
               <a:rPr lang="en-US" smtClean="0"/>
-              <a:t>10/12/2026</a:t>
+              <a:t>10/13/2026</a:t>
             </a:fld>
             <a:endParaRPr lang="en-US"/>
           </a:p>
@@ -3755,7 +3883,7 @@
           <a:p>
             <a:fld id="{5BCAD085-E8A6-8845-BD4E-CB4CCA059FC4}" type="datetimeFigureOut">
               <a:rPr lang="en-US" smtClean="0"/>
-              <a:t>10/12/2026</a:t>
+              <a:t>10/13/2026</a:t>
             </a:fld>
             <a:endParaRPr lang="en-US"/>
           </a:p>
@@ -3850,7 +3978,7 @@
           <a:p>
             <a:fld id="{5BCAD085-E8A6-8845-BD4E-CB4CCA059FC4}" type="datetimeFigureOut">
               <a:rPr lang="en-US" smtClean="0"/>
-              <a:t>10/12/2026</a:t>
+              <a:t>10/13/2026</a:t>
             </a:fld>
             <a:endParaRPr lang="en-US"/>
           </a:p>
@@ -4125,7 +4253,7 @@
           <a:p>
             <a:fld id="{5BCAD085-E8A6-8845-BD4E-CB4CCA059FC4}" type="datetimeFigureOut">
               <a:rPr lang="en-US" smtClean="0"/>
-              <a:t>10/12/2026</a:t>
+              <a:t>10/13/2026</a:t>
             </a:fld>
             <a:endParaRPr lang="en-US"/>
           </a:p>
@@ -4377,7 +4505,7 @@
           <a:p>
             <a:fld id="{5BCAD085-E8A6-8845-BD4E-CB4CCA059FC4}" type="datetimeFigureOut">
               <a:rPr lang="en-US" smtClean="0"/>
-              <a:t>10/12/2026</a:t>
+              <a:t>10/13/2026</a:t>
             </a:fld>
             <a:endParaRPr lang="en-US"/>
           </a:p>
@@ -4588,7 +4716,7 @@
           <a:p>
             <a:fld id="{5BCAD085-E8A6-8845-BD4E-CB4CCA059FC4}" type="datetimeFigureOut">
               <a:rPr lang="en-US" smtClean="0"/>
-              <a:t>10/12/2026</a:t>
+              <a:t>10/13/2026</a:t>
             </a:fld>
             <a:endParaRPr lang="en-US"/>
           </a:p>
@@ -5248,7 +5376,23 @@
               </a:defRPr>
             </a:pPr>
             <a:r>
-              <a:t>Set your filters</a:t>
+              <a:t>Schedule Overview at a glance</a:t>
+            </a:r>
+          </a:p>
+          <a:p>
+            <a:pPr>
+              <a:spcBef>
+                <a:spcPts val="600"/>
+              </a:spcBef>
+              <a:defRPr sz="1800">
+                <a:solidFill>
+                  <a:srgbClr val="6C757D"/>
+                </a:solidFill>
+                <a:latin typeface="Segoe UI"/>
+              </a:defRPr>
+            </a:pPr>
+            <a:r>
+              <a:t>What am I teaching, when, and what's already done?</a:t>
             </a:r>
           </a:p>
         </p:txBody>
@@ -5262,7 +5406,7 @@
         <p:spPr>
           <a:xfrm>
             <a:off x="594360" y="1417320"/>
-            <a:ext cx="5303520" cy="4754880"/>
+            <a:ext cx="5029200" cy="4754880"/>
           </a:xfrm>
           <a:prstGeom prst="rect">
             <a:avLst/>
@@ -5279,7 +5423,7 @@
               <a:spcAft>
                 <a:spcPts val="1000"/>
               </a:spcAft>
-              <a:defRPr sz="1800">
+              <a:defRPr sz="2000">
                 <a:solidFill>
                   <a:srgbClr val="212529"/>
                 </a:solidFill>
@@ -5287,7 +5431,7 @@
               </a:defRPr>
             </a:pPr>
             <a:r>
-              <a:t>1. Anchor Date — often today</a:t>
+              <a:t>Page heading: Schedule Overview</a:t>
             </a:r>
           </a:p>
           <a:p>
@@ -5295,7 +5439,7 @@
               <a:spcAft>
                 <a:spcPts val="1000"/>
               </a:spcAft>
-              <a:defRPr sz="1800">
+              <a:defRPr sz="2000">
                 <a:solidFill>
                   <a:srgbClr val="212529"/>
                 </a:solidFill>
@@ -5303,7 +5447,7 @@
               </a:defRPr>
             </a:pPr>
             <a:r>
-              <a:t>2. Period — Daily, Weekly, Monthly, Seasonal, or Yearly</a:t>
+              <a:t>My Profile / Self View (always you)</a:t>
             </a:r>
           </a:p>
           <a:p>
@@ -5311,7 +5455,7 @@
               <a:spcAft>
                 <a:spcPts val="1000"/>
               </a:spcAft>
-              <a:defRPr sz="1800">
+              <a:defRPr sz="2000">
                 <a:solidFill>
                   <a:srgbClr val="212529"/>
                 </a:solidFill>
@@ -5319,7 +5463,7 @@
               </a:defRPr>
             </a:pPr>
             <a:r>
-              <a:t>3. Optional: With cases only (if your school uses cases)</a:t>
+              <a:t>Summary: Active Range, hours, Items</a:t>
             </a:r>
           </a:p>
           <a:p>
@@ -5327,7 +5471,7 @@
               <a:spcAft>
                 <a:spcPts val="1000"/>
               </a:spcAft>
-              <a:defRPr sz="1800">
+              <a:defRPr sz="2000">
                 <a:solidFill>
                   <a:srgbClr val="212529"/>
                 </a:solidFill>
@@ -5335,44 +5479,14 @@
               </a:defRPr>
             </a:pPr>
             <a:r>
-              <a:t>4. Click Load</a:t>
-            </a:r>
-          </a:p>
-          <a:p>
-            <a:pPr>
-              <a:spcAft>
-                <a:spcPts val="1000"/>
-              </a:spcAft>
-              <a:defRPr sz="1800">
-                <a:solidFill>
-                  <a:srgbClr val="212529"/>
-                </a:solidFill>
-                <a:latin typeface="Segoe UI"/>
-              </a:defRPr>
-            </a:pPr>
-            <a:endParaRPr/>
-          </a:p>
-          <a:p>
-            <a:pPr>
-              <a:spcAft>
-                <a:spcPts val="1000"/>
-              </a:spcAft>
-              <a:defRPr sz="1800">
-                <a:solidFill>
-                  <a:srgbClr val="212529"/>
-                </a:solidFill>
-                <a:latin typeface="Segoe UI"/>
-              </a:defRPr>
-            </a:pPr>
-            <a:r>
-              <a:t>Tip: No list? Check Anchor Date + period, then Load again.</a:t>
+              <a:t>Table: Session Details</a:t>
             </a:r>
           </a:p>
         </p:txBody>
       </p:sp>
       <p:pic>
         <p:nvPicPr>
-          <p:cNvPr id="4" name="Picture 3" descr="03-filters-anchor-period-load.png"/>
+          <p:cNvPr id="4" name="Picture 3" descr="02-schedule-overview-full.png"/>
           <p:cNvPicPr>
             <a:picLocks noChangeAspect="1"/>
           </p:cNvPicPr>
@@ -5394,59 +5508,114 @@
           </a:prstGeom>
         </p:spPr>
       </p:pic>
-      <p:sp>
-        <p:nvSpPr>
-          <p:cNvPr id="5" name="Rectangle 4"/>
-          <p:cNvSpPr/>
+      <p:grpSp>
+        <p:nvGrpSpPr>
+          <p:cNvPr id="6" name="Group 5">
+            <a:extLst>
+              <a:ext uri="{FF2B5EF4-FFF2-40B4-BE49-F238E27FC236}">
+                <a16:creationId xmlns:a16="http://schemas.microsoft.com/office/drawing/2014/main" id="{46F9DF20-975D-3940-5E60-AA270E5C2A69}"/>
+              </a:ext>
+            </a:extLst>
+          </p:cNvPr>
+          <p:cNvGrpSpPr/>
           <p:nvPr/>
-        </p:nvSpPr>
-        <p:spPr>
+        </p:nvGrpSpPr>
+        <p:grpSpPr>
           <a:xfrm>
             <a:off x="0" y="6537960"/>
             <a:ext cx="12191695" cy="320040"/>
+            <a:chOff x="0" y="6537960"/>
+            <a:chExt cx="12191695" cy="320040"/>
           </a:xfrm>
-          <a:prstGeom prst="rect">
-            <a:avLst/>
-          </a:prstGeom>
-          <a:solidFill>
-            <a:srgbClr val="0D6EFD"/>
-          </a:solidFill>
-          <a:ln>
-            <a:noFill/>
-          </a:ln>
-        </p:spPr>
-        <p:style>
-          <a:lnRef idx="1">
-            <a:schemeClr val="accent1"/>
-          </a:lnRef>
-          <a:fillRef idx="3">
-            <a:schemeClr val="accent1"/>
-          </a:fillRef>
-          <a:effectRef idx="2">
-            <a:schemeClr val="accent1"/>
-          </a:effectRef>
-          <a:fontRef idx="minor">
-            <a:schemeClr val="lt1"/>
-          </a:fontRef>
-        </p:style>
-        <p:txBody>
-          <a:bodyPr rtlCol="0" anchor="ctr"/>
-          <a:lstStyle/>
-          <a:p>
-            <a:pPr algn="ctr">
-              <a:defRPr sz="1100">
-                <a:solidFill>
-                  <a:srgbClr val="FFFFFF"/>
-                </a:solidFill>
-                <a:latin typeface="Segoe UI"/>
-              </a:defRPr>
-            </a:pPr>
-            <a:r>
-              <a:t>Teacher daily routine</a:t>
-            </a:r>
-          </a:p>
-        </p:txBody>
-      </p:sp>
+        </p:grpSpPr>
+        <p:sp>
+          <p:nvSpPr>
+            <p:cNvPr id="7" name="Rectangle 6">
+              <a:extLst>
+                <a:ext uri="{FF2B5EF4-FFF2-40B4-BE49-F238E27FC236}">
+                  <a16:creationId xmlns:a16="http://schemas.microsoft.com/office/drawing/2014/main" id="{E9A42F6D-ECB4-1AF4-D5CC-15C2FF054B37}"/>
+                </a:ext>
+              </a:extLst>
+            </p:cNvPr>
+            <p:cNvSpPr/>
+            <p:nvPr/>
+          </p:nvSpPr>
+          <p:spPr>
+            <a:xfrm>
+              <a:off x="0" y="6537960"/>
+              <a:ext cx="12191695" cy="320040"/>
+            </a:xfrm>
+            <a:prstGeom prst="rect">
+              <a:avLst/>
+            </a:prstGeom>
+            <a:solidFill>
+              <a:srgbClr val="0D6EFD"/>
+            </a:solidFill>
+            <a:ln>
+              <a:noFill/>
+            </a:ln>
+          </p:spPr>
+          <p:style>
+            <a:lnRef idx="1">
+              <a:schemeClr val="accent1"/>
+            </a:lnRef>
+            <a:fillRef idx="3">
+              <a:schemeClr val="accent1"/>
+            </a:fillRef>
+            <a:effectRef idx="2">
+              <a:schemeClr val="accent1"/>
+            </a:effectRef>
+            <a:fontRef idx="minor">
+              <a:schemeClr val="lt1"/>
+            </a:fontRef>
+          </p:style>
+          <p:txBody>
+            <a:bodyPr rtlCol="0" anchor="ctr"/>
+            <a:lstStyle/>
+            <a:p>
+              <a:pPr>
+                <a:defRPr sz="1100">
+                  <a:solidFill>
+                    <a:srgbClr val="FFFFFF"/>
+                  </a:solidFill>
+                  <a:latin typeface="Segoe UI"/>
+                </a:defRPr>
+              </a:pPr>
+              <a:endParaRPr dirty="0"/>
+            </a:p>
+          </p:txBody>
+        </p:sp>
+        <p:pic>
+          <p:nvPicPr>
+            <p:cNvPr id="8" name="Picture 7">
+              <a:extLst>
+                <a:ext uri="{FF2B5EF4-FFF2-40B4-BE49-F238E27FC236}">
+                  <a16:creationId xmlns:a16="http://schemas.microsoft.com/office/drawing/2014/main" id="{1B1F0B2B-9C64-B166-EA95-8EA533FE76D9}"/>
+                </a:ext>
+              </a:extLst>
+            </p:cNvPr>
+            <p:cNvPicPr>
+              <a:picLocks noChangeAspect="1"/>
+            </p:cNvPicPr>
+            <p:nvPr/>
+          </p:nvPicPr>
+          <p:blipFill>
+            <a:blip r:embed="rId4"/>
+            <a:stretch>
+              <a:fillRect/>
+            </a:stretch>
+          </p:blipFill>
+          <p:spPr>
+            <a:xfrm>
+              <a:off x="108584" y="6553264"/>
+              <a:ext cx="1158241" cy="274191"/>
+            </a:xfrm>
+            <a:prstGeom prst="rect">
+              <a:avLst/>
+            </a:prstGeom>
+          </p:spPr>
+        </p:pic>
+      </p:grpSp>
     </p:spTree>
   </p:cSld>
   <p:clrMapOvr>
@@ -5511,23 +5680,7 @@
               </a:defRPr>
             </a:pPr>
             <a:r>
-              <a:t>Read your schedule</a:t>
-            </a:r>
-          </a:p>
-          <a:p>
-            <a:pPr>
-              <a:spcBef>
-                <a:spcPts val="600"/>
-              </a:spcBef>
-              <a:defRPr sz="1800">
-                <a:solidFill>
-                  <a:srgbClr val="6C757D"/>
-                </a:solidFill>
-                <a:latin typeface="Segoe UI"/>
-              </a:defRPr>
-            </a:pPr>
-            <a:r>
-              <a:t>Session Details</a:t>
+              <a:t>Set your filters</a:t>
             </a:r>
           </a:p>
         </p:txBody>
@@ -5558,7 +5711,7 @@
               <a:spcAft>
                 <a:spcPts val="1000"/>
               </a:spcAft>
-              <a:defRPr sz="2000">
+              <a:defRPr sz="1800">
                 <a:solidFill>
                   <a:srgbClr val="212529"/>
                 </a:solidFill>
@@ -5566,7 +5719,7 @@
               </a:defRPr>
             </a:pPr>
             <a:r>
-              <a:t>Each row = one class session</a:t>
+              <a:t>1. Anchor Date — often today</a:t>
             </a:r>
           </a:p>
           <a:p>
@@ -5574,7 +5727,7 @@
               <a:spcAft>
                 <a:spcPts val="1000"/>
               </a:spcAft>
-              <a:defRPr sz="2000">
+              <a:defRPr sz="1800">
                 <a:solidFill>
                   <a:srgbClr val="212529"/>
                 </a:solidFill>
@@ -5582,7 +5735,7 @@
               </a:defRPr>
             </a:pPr>
             <a:r>
-              <a:t>Status shows open vs done (colors)</a:t>
+              <a:t>2. Period — Daily, Weekly, Monthly, Seasonal, or Yearly</a:t>
             </a:r>
           </a:p>
           <a:p>
@@ -5590,7 +5743,7 @@
               <a:spcAft>
                 <a:spcPts val="1000"/>
               </a:spcAft>
-              <a:defRPr sz="2000">
+              <a:defRPr sz="1800">
                 <a:solidFill>
                   <a:srgbClr val="212529"/>
                 </a:solidFill>
@@ -5598,14 +5751,60 @@
               </a:defRPr>
             </a:pPr>
             <a:r>
-              <a:t>Role should show Teacher for sessions you lead</a:t>
+              <a:t>3. Optional: With cases only (if your school uses cases)</a:t>
+            </a:r>
+          </a:p>
+          <a:p>
+            <a:pPr>
+              <a:spcAft>
+                <a:spcPts val="1000"/>
+              </a:spcAft>
+              <a:defRPr sz="1800">
+                <a:solidFill>
+                  <a:srgbClr val="212529"/>
+                </a:solidFill>
+                <a:latin typeface="Segoe UI"/>
+              </a:defRPr>
+            </a:pPr>
+            <a:r>
+              <a:t>4. Click Load</a:t>
+            </a:r>
+          </a:p>
+          <a:p>
+            <a:pPr>
+              <a:spcAft>
+                <a:spcPts val="1000"/>
+              </a:spcAft>
+              <a:defRPr sz="1800">
+                <a:solidFill>
+                  <a:srgbClr val="212529"/>
+                </a:solidFill>
+                <a:latin typeface="Segoe UI"/>
+              </a:defRPr>
+            </a:pPr>
+            <a:endParaRPr/>
+          </a:p>
+          <a:p>
+            <a:pPr>
+              <a:spcAft>
+                <a:spcPts val="1000"/>
+              </a:spcAft>
+              <a:defRPr sz="1800">
+                <a:solidFill>
+                  <a:srgbClr val="212529"/>
+                </a:solidFill>
+                <a:latin typeface="Segoe UI"/>
+              </a:defRPr>
+            </a:pPr>
+            <a:r>
+              <a:t>Tip: No list? Check Anchor Date + period, then Load again.</a:t>
             </a:r>
           </a:p>
         </p:txBody>
       </p:sp>
       <p:pic>
         <p:nvPicPr>
-          <p:cNvPr id="4" name="Picture 3" descr="04-session-details-table.png"/>
+          <p:cNvPr id="4" name="Picture 3" descr="03-filters-anchor-period-load.png"/>
           <p:cNvPicPr>
             <a:picLocks noChangeAspect="1"/>
           </p:cNvPicPr>
@@ -5627,59 +5826,114 @@
           </a:prstGeom>
         </p:spPr>
       </p:pic>
-      <p:sp>
-        <p:nvSpPr>
-          <p:cNvPr id="5" name="Rectangle 4"/>
-          <p:cNvSpPr/>
+      <p:grpSp>
+        <p:nvGrpSpPr>
+          <p:cNvPr id="6" name="Group 5">
+            <a:extLst>
+              <a:ext uri="{FF2B5EF4-FFF2-40B4-BE49-F238E27FC236}">
+                <a16:creationId xmlns:a16="http://schemas.microsoft.com/office/drawing/2014/main" id="{A416A8E1-B6FA-5DBB-9554-F76C64E2AD84}"/>
+              </a:ext>
+            </a:extLst>
+          </p:cNvPr>
+          <p:cNvGrpSpPr/>
           <p:nvPr/>
-        </p:nvSpPr>
-        <p:spPr>
+        </p:nvGrpSpPr>
+        <p:grpSpPr>
           <a:xfrm>
             <a:off x="0" y="6537960"/>
             <a:ext cx="12191695" cy="320040"/>
+            <a:chOff x="0" y="6537960"/>
+            <a:chExt cx="12191695" cy="320040"/>
           </a:xfrm>
-          <a:prstGeom prst="rect">
-            <a:avLst/>
-          </a:prstGeom>
-          <a:solidFill>
-            <a:srgbClr val="0D6EFD"/>
-          </a:solidFill>
-          <a:ln>
-            <a:noFill/>
-          </a:ln>
-        </p:spPr>
-        <p:style>
-          <a:lnRef idx="1">
-            <a:schemeClr val="accent1"/>
-          </a:lnRef>
-          <a:fillRef idx="3">
-            <a:schemeClr val="accent1"/>
-          </a:fillRef>
-          <a:effectRef idx="2">
-            <a:schemeClr val="accent1"/>
-          </a:effectRef>
-          <a:fontRef idx="minor">
-            <a:schemeClr val="lt1"/>
-          </a:fontRef>
-        </p:style>
-        <p:txBody>
-          <a:bodyPr rtlCol="0" anchor="ctr"/>
-          <a:lstStyle/>
-          <a:p>
-            <a:pPr algn="ctr">
-              <a:defRPr sz="1100">
-                <a:solidFill>
-                  <a:srgbClr val="FFFFFF"/>
-                </a:solidFill>
-                <a:latin typeface="Segoe UI"/>
-              </a:defRPr>
-            </a:pPr>
-            <a:r>
-              <a:t>Teacher daily routine</a:t>
-            </a:r>
-          </a:p>
-        </p:txBody>
-      </p:sp>
+        </p:grpSpPr>
+        <p:sp>
+          <p:nvSpPr>
+            <p:cNvPr id="7" name="Rectangle 6">
+              <a:extLst>
+                <a:ext uri="{FF2B5EF4-FFF2-40B4-BE49-F238E27FC236}">
+                  <a16:creationId xmlns:a16="http://schemas.microsoft.com/office/drawing/2014/main" id="{87320C48-375C-74D4-7DDE-ABEB518E2C03}"/>
+                </a:ext>
+              </a:extLst>
+            </p:cNvPr>
+            <p:cNvSpPr/>
+            <p:nvPr/>
+          </p:nvSpPr>
+          <p:spPr>
+            <a:xfrm>
+              <a:off x="0" y="6537960"/>
+              <a:ext cx="12191695" cy="320040"/>
+            </a:xfrm>
+            <a:prstGeom prst="rect">
+              <a:avLst/>
+            </a:prstGeom>
+            <a:solidFill>
+              <a:srgbClr val="0D6EFD"/>
+            </a:solidFill>
+            <a:ln>
+              <a:noFill/>
+            </a:ln>
+          </p:spPr>
+          <p:style>
+            <a:lnRef idx="1">
+              <a:schemeClr val="accent1"/>
+            </a:lnRef>
+            <a:fillRef idx="3">
+              <a:schemeClr val="accent1"/>
+            </a:fillRef>
+            <a:effectRef idx="2">
+              <a:schemeClr val="accent1"/>
+            </a:effectRef>
+            <a:fontRef idx="minor">
+              <a:schemeClr val="lt1"/>
+            </a:fontRef>
+          </p:style>
+          <p:txBody>
+            <a:bodyPr rtlCol="0" anchor="ctr"/>
+            <a:lstStyle/>
+            <a:p>
+              <a:pPr>
+                <a:defRPr sz="1100">
+                  <a:solidFill>
+                    <a:srgbClr val="FFFFFF"/>
+                  </a:solidFill>
+                  <a:latin typeface="Segoe UI"/>
+                </a:defRPr>
+              </a:pPr>
+              <a:endParaRPr dirty="0"/>
+            </a:p>
+          </p:txBody>
+        </p:sp>
+        <p:pic>
+          <p:nvPicPr>
+            <p:cNvPr id="8" name="Picture 7">
+              <a:extLst>
+                <a:ext uri="{FF2B5EF4-FFF2-40B4-BE49-F238E27FC236}">
+                  <a16:creationId xmlns:a16="http://schemas.microsoft.com/office/drawing/2014/main" id="{E1D7B48E-E91C-C38B-F621-C6A08746BF08}"/>
+                </a:ext>
+              </a:extLst>
+            </p:cNvPr>
+            <p:cNvPicPr>
+              <a:picLocks noChangeAspect="1"/>
+            </p:cNvPicPr>
+            <p:nvPr/>
+          </p:nvPicPr>
+          <p:blipFill>
+            <a:blip r:embed="rId4"/>
+            <a:stretch>
+              <a:fillRect/>
+            </a:stretch>
+          </p:blipFill>
+          <p:spPr>
+            <a:xfrm>
+              <a:off x="108584" y="6553264"/>
+              <a:ext cx="1158241" cy="274191"/>
+            </a:xfrm>
+            <a:prstGeom prst="rect">
+              <a:avLst/>
+            </a:prstGeom>
+          </p:spPr>
+        </p:pic>
+      </p:grpSp>
     </p:spTree>
   </p:cSld>
   <p:clrMapOvr>
@@ -5744,7 +5998,23 @@
               </a:defRPr>
             </a:pPr>
             <a:r>
-              <a:t>Open Manage Session</a:t>
+              <a:t>Read your schedule</a:t>
+            </a:r>
+          </a:p>
+          <a:p>
+            <a:pPr>
+              <a:spcBef>
+                <a:spcPts val="600"/>
+              </a:spcBef>
+              <a:defRPr sz="1800">
+                <a:solidFill>
+                  <a:srgbClr val="6C757D"/>
+                </a:solidFill>
+                <a:latin typeface="Segoe UI"/>
+              </a:defRPr>
+            </a:pPr>
+            <a:r>
+              <a:t>Session Details</a:t>
             </a:r>
           </a:p>
         </p:txBody>
@@ -5783,7 +6053,7 @@
               </a:defRPr>
             </a:pPr>
             <a:r>
-              <a:t>Click the session row (or Details)</a:t>
+              <a:t>Each row = one class session</a:t>
             </a:r>
           </a:p>
           <a:p>
@@ -5799,14 +6069,30 @@
               </a:defRPr>
             </a:pPr>
             <a:r>
-              <a:t>You land on Manage Session for that date and time</a:t>
+              <a:t>Status shows open vs done (colors)</a:t>
+            </a:r>
+          </a:p>
+          <a:p>
+            <a:pPr>
+              <a:spcAft>
+                <a:spcPts val="1000"/>
+              </a:spcAft>
+              <a:defRPr sz="2000">
+                <a:solidFill>
+                  <a:srgbClr val="212529"/>
+                </a:solidFill>
+                <a:latin typeface="Segoe UI"/>
+              </a:defRPr>
+            </a:pPr>
+            <a:r>
+              <a:t>Role should show Teacher for sessions you lead</a:t>
             </a:r>
           </a:p>
         </p:txBody>
       </p:sp>
       <p:pic>
         <p:nvPicPr>
-          <p:cNvPr id="4" name="Picture 3" descr="05-open-manage-session.png"/>
+          <p:cNvPr id="4" name="Picture 3" descr="04-session-details-table.png"/>
           <p:cNvPicPr>
             <a:picLocks noChangeAspect="1"/>
           </p:cNvPicPr>
@@ -5945,7 +6231,7 @@
               </a:defRPr>
             </a:pPr>
             <a:r>
-              <a:t>Manage Session — quick tour</a:t>
+              <a:t>Open Manage Session</a:t>
             </a:r>
           </a:p>
         </p:txBody>
@@ -5959,7 +6245,7 @@
         <p:spPr>
           <a:xfrm>
             <a:off x="594360" y="1417320"/>
-            <a:ext cx="5029200" cy="4754880"/>
+            <a:ext cx="5303520" cy="4754880"/>
           </a:xfrm>
           <a:prstGeom prst="rect">
             <a:avLst/>
@@ -5984,7 +6270,7 @@
               </a:defRPr>
             </a:pPr>
             <a:r>
-              <a:t>Top: class name, date, time</a:t>
+              <a:t>Click the session row (or Details)</a:t>
             </a:r>
           </a:p>
           <a:p>
@@ -6000,46 +6286,14 @@
               </a:defRPr>
             </a:pPr>
             <a:r>
-              <a:t>Session status (Required until finished)</a:t>
-            </a:r>
-          </a:p>
-          <a:p>
-            <a:pPr>
-              <a:spcAft>
-                <a:spcPts val="1000"/>
-              </a:spcAft>
-              <a:defRPr sz="2000">
-                <a:solidFill>
-                  <a:srgbClr val="212529"/>
-                </a:solidFill>
-                <a:latin typeface="Segoe UI"/>
-              </a:defRPr>
-            </a:pPr>
-            <a:r>
-              <a:t>Left menu: work areas</a:t>
-            </a:r>
-          </a:p>
-          <a:p>
-            <a:pPr>
-              <a:spcAft>
-                <a:spcPts val="1000"/>
-              </a:spcAft>
-              <a:defRPr sz="2000">
-                <a:solidFill>
-                  <a:srgbClr val="212529"/>
-                </a:solidFill>
-                <a:latin typeface="Segoe UI"/>
-              </a:defRPr>
-            </a:pPr>
-            <a:r>
-              <a:t>Save session and Close</a:t>
+              <a:t>You land on Manage Session for that date and time</a:t>
             </a:r>
           </a:p>
         </p:txBody>
       </p:sp>
       <p:pic>
         <p:nvPicPr>
-          <p:cNvPr id="4" name="Picture 3" descr="06-manage-session-map.png"/>
+          <p:cNvPr id="4" name="Picture 3" descr="05-open-manage-session.png"/>
           <p:cNvPicPr>
             <a:picLocks noChangeAspect="1"/>
           </p:cNvPicPr>
@@ -6123,6 +6377,239 @@
 </file>
 
 <file path=ppt/slides/slide14.xml><?xml version="1.0" encoding="utf-8"?>
+<p:sld xmlns:a="http://schemas.openxmlformats.org/drawingml/2006/main" xmlns:r="http://schemas.openxmlformats.org/officeDocument/2006/relationships" xmlns:p="http://schemas.openxmlformats.org/presentationml/2006/main">
+  <p:cSld>
+    <p:bg>
+      <p:bgPr>
+        <a:solidFill>
+          <a:srgbClr val="FFFFFF"/>
+        </a:solidFill>
+        <a:effectLst/>
+      </p:bgPr>
+    </p:bg>
+    <p:spTree>
+      <p:nvGrpSpPr>
+        <p:cNvPr id="1" name=""/>
+        <p:cNvGrpSpPr/>
+        <p:nvPr/>
+      </p:nvGrpSpPr>
+      <p:grpSpPr>
+        <a:xfrm>
+          <a:off x="0" y="0"/>
+          <a:ext cx="0" cy="0"/>
+          <a:chOff x="0" y="0"/>
+          <a:chExt cx="0" cy="0"/>
+        </a:xfrm>
+      </p:grpSpPr>
+      <p:sp>
+        <p:nvSpPr>
+          <p:cNvPr id="2" name="TextBox 1"/>
+          <p:cNvSpPr txBox="1"/>
+          <p:nvPr/>
+        </p:nvSpPr>
+        <p:spPr>
+          <a:xfrm>
+            <a:off x="548640" y="411480"/>
+            <a:ext cx="11064240" cy="1097280"/>
+          </a:xfrm>
+          <a:prstGeom prst="rect">
+            <a:avLst/>
+          </a:prstGeom>
+          <a:noFill/>
+        </p:spPr>
+        <p:txBody>
+          <a:bodyPr wrap="square">
+            <a:spAutoFit/>
+          </a:bodyPr>
+          <a:lstStyle/>
+          <a:p>
+            <a:pPr>
+              <a:defRPr sz="3200" b="1">
+                <a:solidFill>
+                  <a:srgbClr val="212529"/>
+                </a:solidFill>
+                <a:latin typeface="Segoe UI"/>
+              </a:defRPr>
+            </a:pPr>
+            <a:r>
+              <a:t>Manage Session — quick tour</a:t>
+            </a:r>
+          </a:p>
+        </p:txBody>
+      </p:sp>
+      <p:sp>
+        <p:nvSpPr>
+          <p:cNvPr id="3" name="TextBox 2"/>
+          <p:cNvSpPr txBox="1"/>
+          <p:nvPr/>
+        </p:nvSpPr>
+        <p:spPr>
+          <a:xfrm>
+            <a:off x="594360" y="1417320"/>
+            <a:ext cx="5029200" cy="4754880"/>
+          </a:xfrm>
+          <a:prstGeom prst="rect">
+            <a:avLst/>
+          </a:prstGeom>
+          <a:noFill/>
+        </p:spPr>
+        <p:txBody>
+          <a:bodyPr wrap="square">
+            <a:spAutoFit/>
+          </a:bodyPr>
+          <a:lstStyle/>
+          <a:p>
+            <a:pPr>
+              <a:spcAft>
+                <a:spcPts val="1000"/>
+              </a:spcAft>
+              <a:defRPr sz="2000">
+                <a:solidFill>
+                  <a:srgbClr val="212529"/>
+                </a:solidFill>
+                <a:latin typeface="Segoe UI"/>
+              </a:defRPr>
+            </a:pPr>
+            <a:r>
+              <a:t>Top: class name, date, time</a:t>
+            </a:r>
+          </a:p>
+          <a:p>
+            <a:pPr>
+              <a:spcAft>
+                <a:spcPts val="1000"/>
+              </a:spcAft>
+              <a:defRPr sz="2000">
+                <a:solidFill>
+                  <a:srgbClr val="212529"/>
+                </a:solidFill>
+                <a:latin typeface="Segoe UI"/>
+              </a:defRPr>
+            </a:pPr>
+            <a:r>
+              <a:t>Session status (Required until finished)</a:t>
+            </a:r>
+          </a:p>
+          <a:p>
+            <a:pPr>
+              <a:spcAft>
+                <a:spcPts val="1000"/>
+              </a:spcAft>
+              <a:defRPr sz="2000">
+                <a:solidFill>
+                  <a:srgbClr val="212529"/>
+                </a:solidFill>
+                <a:latin typeface="Segoe UI"/>
+              </a:defRPr>
+            </a:pPr>
+            <a:r>
+              <a:t>Left menu: work areas</a:t>
+            </a:r>
+          </a:p>
+          <a:p>
+            <a:pPr>
+              <a:spcAft>
+                <a:spcPts val="1000"/>
+              </a:spcAft>
+              <a:defRPr sz="2000">
+                <a:solidFill>
+                  <a:srgbClr val="212529"/>
+                </a:solidFill>
+                <a:latin typeface="Segoe UI"/>
+              </a:defRPr>
+            </a:pPr>
+            <a:r>
+              <a:t>Save session and Close</a:t>
+            </a:r>
+          </a:p>
+        </p:txBody>
+      </p:sp>
+      <p:pic>
+        <p:nvPicPr>
+          <p:cNvPr id="4" name="Picture 3" descr="06-manage-session-map.png"/>
+          <p:cNvPicPr>
+            <a:picLocks noChangeAspect="1"/>
+          </p:cNvPicPr>
+          <p:nvPr/>
+        </p:nvPicPr>
+        <p:blipFill>
+          <a:blip r:embed="rId3"/>
+          <a:stretch>
+            <a:fillRect/>
+          </a:stretch>
+        </p:blipFill>
+        <p:spPr>
+          <a:xfrm>
+            <a:off x="5760720" y="1234440"/>
+            <a:ext cx="5852160" cy="4709160"/>
+          </a:xfrm>
+          <a:prstGeom prst="rect">
+            <a:avLst/>
+          </a:prstGeom>
+        </p:spPr>
+      </p:pic>
+      <p:sp>
+        <p:nvSpPr>
+          <p:cNvPr id="5" name="Rectangle 4"/>
+          <p:cNvSpPr/>
+          <p:nvPr/>
+        </p:nvSpPr>
+        <p:spPr>
+          <a:xfrm>
+            <a:off x="0" y="6537960"/>
+            <a:ext cx="12191695" cy="320040"/>
+          </a:xfrm>
+          <a:prstGeom prst="rect">
+            <a:avLst/>
+          </a:prstGeom>
+          <a:solidFill>
+            <a:srgbClr val="0D6EFD"/>
+          </a:solidFill>
+          <a:ln>
+            <a:noFill/>
+          </a:ln>
+        </p:spPr>
+        <p:style>
+          <a:lnRef idx="1">
+            <a:schemeClr val="accent1"/>
+          </a:lnRef>
+          <a:fillRef idx="3">
+            <a:schemeClr val="accent1"/>
+          </a:fillRef>
+          <a:effectRef idx="2">
+            <a:schemeClr val="accent1"/>
+          </a:effectRef>
+          <a:fontRef idx="minor">
+            <a:schemeClr val="lt1"/>
+          </a:fontRef>
+        </p:style>
+        <p:txBody>
+          <a:bodyPr rtlCol="0" anchor="ctr"/>
+          <a:lstStyle/>
+          <a:p>
+            <a:pPr algn="ctr">
+              <a:defRPr sz="1100">
+                <a:solidFill>
+                  <a:srgbClr val="FFFFFF"/>
+                </a:solidFill>
+                <a:latin typeface="Segoe UI"/>
+              </a:defRPr>
+            </a:pPr>
+            <a:r>
+              <a:t>Teacher daily routine</a:t>
+            </a:r>
+          </a:p>
+        </p:txBody>
+      </p:sp>
+    </p:spTree>
+  </p:cSld>
+  <p:clrMapOvr>
+    <a:masterClrMapping/>
+  </p:clrMapOvr>
+</p:sld>
+</file>
+
+<file path=ppt/slides/slide15.xml><?xml version="1.0" encoding="utf-8"?>
 <p:sld xmlns:a="http://schemas.openxmlformats.org/drawingml/2006/main" xmlns:r="http://schemas.openxmlformats.org/officeDocument/2006/relationships" xmlns:p="http://schemas.openxmlformats.org/presentationml/2006/main">
   <p:cSld>
     <p:bg>
@@ -6395,7 +6882,7 @@
 </p:sld>
 </file>
 
-<file path=ppt/slides/slide15.xml><?xml version="1.0" encoding="utf-8"?>
+<file path=ppt/slides/slide16.xml><?xml version="1.0" encoding="utf-8"?>
 <p:sld xmlns:a="http://schemas.openxmlformats.org/drawingml/2006/main" xmlns:r="http://schemas.openxmlformats.org/officeDocument/2006/relationships" xmlns:p="http://schemas.openxmlformats.org/presentationml/2006/main">
   <p:cSld>
     <p:bg>
@@ -6596,7 +7083,7 @@
 </p:sld>
 </file>
 
-<file path=ppt/slides/slide16.xml><?xml version="1.0" encoding="utf-8"?>
+<file path=ppt/slides/slide17.xml><?xml version="1.0" encoding="utf-8"?>
 <p:sld xmlns:a="http://schemas.openxmlformats.org/drawingml/2006/main" xmlns:r="http://schemas.openxmlformats.org/officeDocument/2006/relationships" xmlns:p="http://schemas.openxmlformats.org/presentationml/2006/main">
   <p:cSld>
     <p:bg>
@@ -6853,7 +7340,7 @@
 </p:sld>
 </file>
 
-<file path=ppt/slides/slide17.xml><?xml version="1.0" encoding="utf-8"?>
+<file path=ppt/slides/slide18.xml><?xml version="1.0" encoding="utf-8"?>
 <p:sld xmlns:a="http://schemas.openxmlformats.org/drawingml/2006/main" xmlns:r="http://schemas.openxmlformats.org/officeDocument/2006/relationships" xmlns:p="http://schemas.openxmlformats.org/presentationml/2006/main">
   <p:cSld>
     <p:bg>
@@ -7054,7 +7541,7 @@
 </p:sld>
 </file>
 
-<file path=ppt/slides/slide18.xml><?xml version="1.0" encoding="utf-8"?>
+<file path=ppt/slides/slide19.xml><?xml version="1.0" encoding="utf-8"?>
 <p:sld xmlns:a="http://schemas.openxmlformats.org/drawingml/2006/main" xmlns:r="http://schemas.openxmlformats.org/officeDocument/2006/relationships" xmlns:p="http://schemas.openxmlformats.org/presentationml/2006/main">
   <p:cSld>
     <p:bg>
@@ -7301,592 +7788,6 @@
 </p:sld>
 </file>
 
-<file path=ppt/slides/slide19.xml><?xml version="1.0" encoding="utf-8"?>
-<p:sld xmlns:a="http://schemas.openxmlformats.org/drawingml/2006/main" xmlns:r="http://schemas.openxmlformats.org/officeDocument/2006/relationships" xmlns:p="http://schemas.openxmlformats.org/presentationml/2006/main">
-  <p:cSld>
-    <p:bg>
-      <p:bgPr>
-        <a:solidFill>
-          <a:srgbClr val="F3F8FF"/>
-        </a:solidFill>
-        <a:effectLst/>
-      </p:bgPr>
-    </p:bg>
-    <p:spTree>
-      <p:nvGrpSpPr>
-        <p:cNvPr id="1" name=""/>
-        <p:cNvGrpSpPr/>
-        <p:nvPr/>
-      </p:nvGrpSpPr>
-      <p:grpSpPr>
-        <a:xfrm>
-          <a:off x="0" y="0"/>
-          <a:ext cx="0" cy="0"/>
-          <a:chOff x="0" y="0"/>
-          <a:chExt cx="0" cy="0"/>
-        </a:xfrm>
-      </p:grpSpPr>
-      <p:sp>
-        <p:nvSpPr>
-          <p:cNvPr id="2" name="TextBox 1"/>
-          <p:cNvSpPr txBox="1"/>
-          <p:nvPr/>
-        </p:nvSpPr>
-        <p:spPr>
-          <a:xfrm>
-            <a:off x="548640" y="502920"/>
-            <a:ext cx="11064240" cy="1097280"/>
-          </a:xfrm>
-          <a:prstGeom prst="rect">
-            <a:avLst/>
-          </a:prstGeom>
-          <a:noFill/>
-        </p:spPr>
-        <p:txBody>
-          <a:bodyPr wrap="square">
-            <a:spAutoFit/>
-          </a:bodyPr>
-          <a:lstStyle/>
-          <a:p>
-            <a:pPr>
-              <a:defRPr sz="3200" b="1">
-                <a:solidFill>
-                  <a:srgbClr val="212529"/>
-                </a:solidFill>
-                <a:latin typeface="Segoe UI"/>
-              </a:defRPr>
-            </a:pPr>
-            <a:r>
-              <a:t>Your daily routine — recap</a:t>
-            </a:r>
-          </a:p>
-        </p:txBody>
-      </p:sp>
-      <p:sp>
-        <p:nvSpPr>
-          <p:cNvPr id="3" name="Oval 2"/>
-          <p:cNvSpPr/>
-          <p:nvPr/>
-        </p:nvSpPr>
-        <p:spPr>
-          <a:xfrm>
-            <a:off x="685800" y="1600200"/>
-            <a:ext cx="502920" cy="502920"/>
-          </a:xfrm>
-          <a:prstGeom prst="ellipse">
-            <a:avLst/>
-          </a:prstGeom>
-          <a:solidFill>
-            <a:srgbClr val="0D6EFD"/>
-          </a:solidFill>
-          <a:ln>
-            <a:noFill/>
-          </a:ln>
-        </p:spPr>
-        <p:style>
-          <a:lnRef idx="1">
-            <a:schemeClr val="accent1"/>
-          </a:lnRef>
-          <a:fillRef idx="3">
-            <a:schemeClr val="accent1"/>
-          </a:fillRef>
-          <a:effectRef idx="2">
-            <a:schemeClr val="accent1"/>
-          </a:effectRef>
-          <a:fontRef idx="minor">
-            <a:schemeClr val="lt1"/>
-          </a:fontRef>
-        </p:style>
-        <p:txBody>
-          <a:bodyPr rtlCol="0" anchor="ctr"/>
-          <a:lstStyle/>
-          <a:p>
-            <a:pPr algn="ctr">
-              <a:defRPr sz="1800" b="1">
-                <a:solidFill>
-                  <a:srgbClr val="FFFFFF"/>
-                </a:solidFill>
-              </a:defRPr>
-            </a:pPr>
-            <a:r>
-              <a:t>1</a:t>
-            </a:r>
-          </a:p>
-        </p:txBody>
-      </p:sp>
-      <p:sp>
-        <p:nvSpPr>
-          <p:cNvPr id="4" name="TextBox 3"/>
-          <p:cNvSpPr txBox="1"/>
-          <p:nvPr/>
-        </p:nvSpPr>
-        <p:spPr>
-          <a:xfrm>
-            <a:off x="1325880" y="1554480"/>
-            <a:ext cx="9601200" cy="594360"/>
-          </a:xfrm>
-          <a:prstGeom prst="rect">
-            <a:avLst/>
-          </a:prstGeom>
-          <a:noFill/>
-        </p:spPr>
-        <p:txBody>
-          <a:bodyPr wrap="none">
-            <a:spAutoFit/>
-          </a:bodyPr>
-          <a:lstStyle/>
-          <a:p>
-            <a:pPr>
-              <a:defRPr sz="2200">
-                <a:solidFill>
-                  <a:srgbClr val="212529"/>
-                </a:solidFill>
-                <a:latin typeface="Segoe UI"/>
-              </a:defRPr>
-            </a:pPr>
-            <a:r>
-              <a:t>Open My Schedule</a:t>
-            </a:r>
-          </a:p>
-        </p:txBody>
-      </p:sp>
-      <p:sp>
-        <p:nvSpPr>
-          <p:cNvPr id="5" name="Oval 4"/>
-          <p:cNvSpPr/>
-          <p:nvPr/>
-        </p:nvSpPr>
-        <p:spPr>
-          <a:xfrm>
-            <a:off x="685800" y="2468880"/>
-            <a:ext cx="502920" cy="502920"/>
-          </a:xfrm>
-          <a:prstGeom prst="ellipse">
-            <a:avLst/>
-          </a:prstGeom>
-          <a:solidFill>
-            <a:srgbClr val="0D6EFD"/>
-          </a:solidFill>
-          <a:ln>
-            <a:noFill/>
-          </a:ln>
-        </p:spPr>
-        <p:style>
-          <a:lnRef idx="1">
-            <a:schemeClr val="accent1"/>
-          </a:lnRef>
-          <a:fillRef idx="3">
-            <a:schemeClr val="accent1"/>
-          </a:fillRef>
-          <a:effectRef idx="2">
-            <a:schemeClr val="accent1"/>
-          </a:effectRef>
-          <a:fontRef idx="minor">
-            <a:schemeClr val="lt1"/>
-          </a:fontRef>
-        </p:style>
-        <p:txBody>
-          <a:bodyPr rtlCol="0" anchor="ctr"/>
-          <a:lstStyle/>
-          <a:p>
-            <a:pPr algn="ctr">
-              <a:defRPr sz="1800" b="1">
-                <a:solidFill>
-                  <a:srgbClr val="FFFFFF"/>
-                </a:solidFill>
-              </a:defRPr>
-            </a:pPr>
-            <a:r>
-              <a:t>2</a:t>
-            </a:r>
-          </a:p>
-        </p:txBody>
-      </p:sp>
-      <p:sp>
-        <p:nvSpPr>
-          <p:cNvPr id="6" name="TextBox 5"/>
-          <p:cNvSpPr txBox="1"/>
-          <p:nvPr/>
-        </p:nvSpPr>
-        <p:spPr>
-          <a:xfrm>
-            <a:off x="1325880" y="2423160"/>
-            <a:ext cx="9601200" cy="594360"/>
-          </a:xfrm>
-          <a:prstGeom prst="rect">
-            <a:avLst/>
-          </a:prstGeom>
-          <a:noFill/>
-        </p:spPr>
-        <p:txBody>
-          <a:bodyPr wrap="none">
-            <a:spAutoFit/>
-          </a:bodyPr>
-          <a:lstStyle/>
-          <a:p>
-            <a:pPr>
-              <a:defRPr sz="2200">
-                <a:solidFill>
-                  <a:srgbClr val="212529"/>
-                </a:solidFill>
-                <a:latin typeface="Segoe UI"/>
-              </a:defRPr>
-            </a:pPr>
-            <a:r>
-              <a:t>Anchor Date + period → Load</a:t>
-            </a:r>
-          </a:p>
-        </p:txBody>
-      </p:sp>
-      <p:sp>
-        <p:nvSpPr>
-          <p:cNvPr id="7" name="Oval 6"/>
-          <p:cNvSpPr/>
-          <p:nvPr/>
-        </p:nvSpPr>
-        <p:spPr>
-          <a:xfrm>
-            <a:off x="685800" y="3337560"/>
-            <a:ext cx="502920" cy="502920"/>
-          </a:xfrm>
-          <a:prstGeom prst="ellipse">
-            <a:avLst/>
-          </a:prstGeom>
-          <a:solidFill>
-            <a:srgbClr val="0D6EFD"/>
-          </a:solidFill>
-          <a:ln>
-            <a:noFill/>
-          </a:ln>
-        </p:spPr>
-        <p:style>
-          <a:lnRef idx="1">
-            <a:schemeClr val="accent1"/>
-          </a:lnRef>
-          <a:fillRef idx="3">
-            <a:schemeClr val="accent1"/>
-          </a:fillRef>
-          <a:effectRef idx="2">
-            <a:schemeClr val="accent1"/>
-          </a:effectRef>
-          <a:fontRef idx="minor">
-            <a:schemeClr val="lt1"/>
-          </a:fontRef>
-        </p:style>
-        <p:txBody>
-          <a:bodyPr rtlCol="0" anchor="ctr"/>
-          <a:lstStyle/>
-          <a:p>
-            <a:pPr algn="ctr">
-              <a:defRPr sz="1800" b="1">
-                <a:solidFill>
-                  <a:srgbClr val="FFFFFF"/>
-                </a:solidFill>
-              </a:defRPr>
-            </a:pPr>
-            <a:r>
-              <a:t>3</a:t>
-            </a:r>
-          </a:p>
-        </p:txBody>
-      </p:sp>
-      <p:sp>
-        <p:nvSpPr>
-          <p:cNvPr id="8" name="TextBox 7"/>
-          <p:cNvSpPr txBox="1"/>
-          <p:nvPr/>
-        </p:nvSpPr>
-        <p:spPr>
-          <a:xfrm>
-            <a:off x="1325880" y="3291840"/>
-            <a:ext cx="9601200" cy="594360"/>
-          </a:xfrm>
-          <a:prstGeom prst="rect">
-            <a:avLst/>
-          </a:prstGeom>
-          <a:noFill/>
-        </p:spPr>
-        <p:txBody>
-          <a:bodyPr wrap="none">
-            <a:spAutoFit/>
-          </a:bodyPr>
-          <a:lstStyle/>
-          <a:p>
-            <a:pPr>
-              <a:defRPr sz="2200">
-                <a:solidFill>
-                  <a:srgbClr val="212529"/>
-                </a:solidFill>
-                <a:latin typeface="Segoe UI"/>
-              </a:defRPr>
-            </a:pPr>
-            <a:r>
-              <a:t>Click session → Manage Session</a:t>
-            </a:r>
-          </a:p>
-        </p:txBody>
-      </p:sp>
-      <p:sp>
-        <p:nvSpPr>
-          <p:cNvPr id="9" name="Oval 8"/>
-          <p:cNvSpPr/>
-          <p:nvPr/>
-        </p:nvSpPr>
-        <p:spPr>
-          <a:xfrm>
-            <a:off x="685800" y="4206240"/>
-            <a:ext cx="502920" cy="502920"/>
-          </a:xfrm>
-          <a:prstGeom prst="ellipse">
-            <a:avLst/>
-          </a:prstGeom>
-          <a:solidFill>
-            <a:srgbClr val="0D6EFD"/>
-          </a:solidFill>
-          <a:ln>
-            <a:noFill/>
-          </a:ln>
-        </p:spPr>
-        <p:style>
-          <a:lnRef idx="1">
-            <a:schemeClr val="accent1"/>
-          </a:lnRef>
-          <a:fillRef idx="3">
-            <a:schemeClr val="accent1"/>
-          </a:fillRef>
-          <a:effectRef idx="2">
-            <a:schemeClr val="accent1"/>
-          </a:effectRef>
-          <a:fontRef idx="minor">
-            <a:schemeClr val="lt1"/>
-          </a:fontRef>
-        </p:style>
-        <p:txBody>
-          <a:bodyPr rtlCol="0" anchor="ctr"/>
-          <a:lstStyle/>
-          <a:p>
-            <a:pPr algn="ctr">
-              <a:defRPr sz="1800" b="1">
-                <a:solidFill>
-                  <a:srgbClr val="FFFFFF"/>
-                </a:solidFill>
-              </a:defRPr>
-            </a:pPr>
-            <a:r>
-              <a:t>4</a:t>
-            </a:r>
-          </a:p>
-        </p:txBody>
-      </p:sp>
-      <p:sp>
-        <p:nvSpPr>
-          <p:cNvPr id="10" name="TextBox 9"/>
-          <p:cNvSpPr txBox="1"/>
-          <p:nvPr/>
-        </p:nvSpPr>
-        <p:spPr>
-          <a:xfrm>
-            <a:off x="1325880" y="4160520"/>
-            <a:ext cx="9601200" cy="594360"/>
-          </a:xfrm>
-          <a:prstGeom prst="rect">
-            <a:avLst/>
-          </a:prstGeom>
-          <a:noFill/>
-        </p:spPr>
-        <p:txBody>
-          <a:bodyPr wrap="none">
-            <a:spAutoFit/>
-          </a:bodyPr>
-          <a:lstStyle/>
-          <a:p>
-            <a:pPr>
-              <a:defRPr sz="2200">
-                <a:solidFill>
-                  <a:srgbClr val="212529"/>
-                </a:solidFill>
-                <a:latin typeface="Segoe UI"/>
-              </a:defRPr>
-            </a:pPr>
-            <a:r>
-              <a:t>Attendance · Notes · Curriculum (and other visible sections)</a:t>
-            </a:r>
-          </a:p>
-        </p:txBody>
-      </p:sp>
-      <p:sp>
-        <p:nvSpPr>
-          <p:cNvPr id="11" name="Oval 10"/>
-          <p:cNvSpPr/>
-          <p:nvPr/>
-        </p:nvSpPr>
-        <p:spPr>
-          <a:xfrm>
-            <a:off x="685800" y="5074920"/>
-            <a:ext cx="502920" cy="502920"/>
-          </a:xfrm>
-          <a:prstGeom prst="ellipse">
-            <a:avLst/>
-          </a:prstGeom>
-          <a:solidFill>
-            <a:srgbClr val="0D6EFD"/>
-          </a:solidFill>
-          <a:ln>
-            <a:noFill/>
-          </a:ln>
-        </p:spPr>
-        <p:style>
-          <a:lnRef idx="1">
-            <a:schemeClr val="accent1"/>
-          </a:lnRef>
-          <a:fillRef idx="3">
-            <a:schemeClr val="accent1"/>
-          </a:fillRef>
-          <a:effectRef idx="2">
-            <a:schemeClr val="accent1"/>
-          </a:effectRef>
-          <a:fontRef idx="minor">
-            <a:schemeClr val="lt1"/>
-          </a:fontRef>
-        </p:style>
-        <p:txBody>
-          <a:bodyPr rtlCol="0" anchor="ctr"/>
-          <a:lstStyle/>
-          <a:p>
-            <a:pPr algn="ctr">
-              <a:defRPr sz="1800" b="1">
-                <a:solidFill>
-                  <a:srgbClr val="FFFFFF"/>
-                </a:solidFill>
-              </a:defRPr>
-            </a:pPr>
-            <a:r>
-              <a:t>5</a:t>
-            </a:r>
-          </a:p>
-        </p:txBody>
-      </p:sp>
-      <p:sp>
-        <p:nvSpPr>
-          <p:cNvPr id="12" name="TextBox 11"/>
-          <p:cNvSpPr txBox="1"/>
-          <p:nvPr/>
-        </p:nvSpPr>
-        <p:spPr>
-          <a:xfrm>
-            <a:off x="1325880" y="5029200"/>
-            <a:ext cx="9601200" cy="594360"/>
-          </a:xfrm>
-          <a:prstGeom prst="rect">
-            <a:avLst/>
-          </a:prstGeom>
-          <a:noFill/>
-        </p:spPr>
-        <p:txBody>
-          <a:bodyPr wrap="none">
-            <a:spAutoFit/>
-          </a:bodyPr>
-          <a:lstStyle/>
-          <a:p>
-            <a:pPr>
-              <a:defRPr sz="2200">
-                <a:solidFill>
-                  <a:srgbClr val="212529"/>
-                </a:solidFill>
-                <a:latin typeface="Segoe UI"/>
-              </a:defRPr>
-            </a:pPr>
-            <a:r>
-              <a:t>Session status = Completed → Save session</a:t>
-            </a:r>
-          </a:p>
-        </p:txBody>
-      </p:sp>
-      <p:pic>
-        <p:nvPicPr>
-          <p:cNvPr id="13" name="Picture 12" descr="01-dashboard-open-my-schedule.png"/>
-          <p:cNvPicPr>
-            <a:picLocks noChangeAspect="1"/>
-          </p:cNvPicPr>
-          <p:nvPr/>
-        </p:nvPicPr>
-        <p:blipFill>
-          <a:blip r:embed="rId3"/>
-          <a:stretch>
-            <a:fillRect/>
-          </a:stretch>
-        </p:blipFill>
-        <p:spPr>
-          <a:xfrm>
-            <a:off x="8046720" y="1371600"/>
-            <a:ext cx="3566160" cy="1828800"/>
-          </a:xfrm>
-          <a:prstGeom prst="rect">
-            <a:avLst/>
-          </a:prstGeom>
-        </p:spPr>
-      </p:pic>
-      <p:sp>
-        <p:nvSpPr>
-          <p:cNvPr id="14" name="Rectangle 13"/>
-          <p:cNvSpPr/>
-          <p:nvPr/>
-        </p:nvSpPr>
-        <p:spPr>
-          <a:xfrm>
-            <a:off x="0" y="6537960"/>
-            <a:ext cx="12191695" cy="320040"/>
-          </a:xfrm>
-          <a:prstGeom prst="rect">
-            <a:avLst/>
-          </a:prstGeom>
-          <a:solidFill>
-            <a:srgbClr val="0D6EFD"/>
-          </a:solidFill>
-          <a:ln>
-            <a:noFill/>
-          </a:ln>
-        </p:spPr>
-        <p:style>
-          <a:lnRef idx="1">
-            <a:schemeClr val="accent1"/>
-          </a:lnRef>
-          <a:fillRef idx="3">
-            <a:schemeClr val="accent1"/>
-          </a:fillRef>
-          <a:effectRef idx="2">
-            <a:schemeClr val="accent1"/>
-          </a:effectRef>
-          <a:fontRef idx="minor">
-            <a:schemeClr val="lt1"/>
-          </a:fontRef>
-        </p:style>
-        <p:txBody>
-          <a:bodyPr rtlCol="0" anchor="ctr"/>
-          <a:lstStyle/>
-          <a:p>
-            <a:pPr algn="ctr">
-              <a:defRPr sz="1100">
-                <a:solidFill>
-                  <a:srgbClr val="FFFFFF"/>
-                </a:solidFill>
-                <a:latin typeface="Segoe UI"/>
-              </a:defRPr>
-            </a:pPr>
-            <a:r>
-              <a:t>Handout: save this slide as PDF for your desk</a:t>
-            </a:r>
-          </a:p>
-        </p:txBody>
-      </p:sp>
-    </p:spTree>
-  </p:cSld>
-  <p:clrMapOvr>
-    <a:masterClrMapping/>
-  </p:clrMapOvr>
-</p:sld>
-</file>
-
 <file path=ppt/slides/slide2.xml><?xml version="1.0" encoding="utf-8"?>
 <p:sld xmlns:a="http://schemas.openxmlformats.org/drawingml/2006/main" xmlns:r="http://schemas.openxmlformats.org/officeDocument/2006/relationships" xmlns:p="http://schemas.openxmlformats.org/presentationml/2006/main">
   <p:cSld>
@@ -8199,9 +8100,644 @@
           </a:p>
         </p:txBody>
       </p:sp>
-      <p:sp>
-        <p:nvSpPr>
-          <p:cNvPr id="7" name="Rectangle 6"/>
+      <p:grpSp>
+        <p:nvGrpSpPr>
+          <p:cNvPr id="10" name="Group 9">
+            <a:extLst>
+              <a:ext uri="{FF2B5EF4-FFF2-40B4-BE49-F238E27FC236}">
+                <a16:creationId xmlns:a16="http://schemas.microsoft.com/office/drawing/2014/main" id="{8DAE6E6D-49AA-27EE-B7EC-CDE08BC3BF68}"/>
+              </a:ext>
+            </a:extLst>
+          </p:cNvPr>
+          <p:cNvGrpSpPr/>
+          <p:nvPr/>
+        </p:nvGrpSpPr>
+        <p:grpSpPr>
+          <a:xfrm>
+            <a:off x="0" y="6537960"/>
+            <a:ext cx="12191695" cy="320040"/>
+            <a:chOff x="0" y="6537960"/>
+            <a:chExt cx="12191695" cy="320040"/>
+          </a:xfrm>
+        </p:grpSpPr>
+        <p:sp>
+          <p:nvSpPr>
+            <p:cNvPr id="7" name="Rectangle 6"/>
+            <p:cNvSpPr/>
+            <p:nvPr/>
+          </p:nvSpPr>
+          <p:spPr>
+            <a:xfrm>
+              <a:off x="0" y="6537960"/>
+              <a:ext cx="12191695" cy="320040"/>
+            </a:xfrm>
+            <a:prstGeom prst="rect">
+              <a:avLst/>
+            </a:prstGeom>
+            <a:solidFill>
+              <a:srgbClr val="0D6EFD"/>
+            </a:solidFill>
+            <a:ln>
+              <a:noFill/>
+            </a:ln>
+          </p:spPr>
+          <p:style>
+            <a:lnRef idx="1">
+              <a:schemeClr val="accent1"/>
+            </a:lnRef>
+            <a:fillRef idx="3">
+              <a:schemeClr val="accent1"/>
+            </a:fillRef>
+            <a:effectRef idx="2">
+              <a:schemeClr val="accent1"/>
+            </a:effectRef>
+            <a:fontRef idx="minor">
+              <a:schemeClr val="lt1"/>
+            </a:fontRef>
+          </p:style>
+          <p:txBody>
+            <a:bodyPr rtlCol="0" anchor="ctr"/>
+            <a:lstStyle/>
+            <a:p>
+              <a:pPr>
+                <a:defRPr sz="1100">
+                  <a:solidFill>
+                    <a:srgbClr val="FFFFFF"/>
+                  </a:solidFill>
+                  <a:latin typeface="Segoe UI"/>
+                </a:defRPr>
+              </a:pPr>
+              <a:endParaRPr dirty="0"/>
+            </a:p>
+          </p:txBody>
+        </p:sp>
+        <p:pic>
+          <p:nvPicPr>
+            <p:cNvPr id="9" name="Picture 8">
+              <a:extLst>
+                <a:ext uri="{FF2B5EF4-FFF2-40B4-BE49-F238E27FC236}">
+                  <a16:creationId xmlns:a16="http://schemas.microsoft.com/office/drawing/2014/main" id="{16EECB69-1228-5660-BFA1-D12DAE4C4B56}"/>
+                </a:ext>
+              </a:extLst>
+            </p:cNvPr>
+            <p:cNvPicPr>
+              <a:picLocks noChangeAspect="1"/>
+            </p:cNvPicPr>
+            <p:nvPr/>
+          </p:nvPicPr>
+          <p:blipFill>
+            <a:blip r:embed="rId3"/>
+            <a:stretch>
+              <a:fillRect/>
+            </a:stretch>
+          </p:blipFill>
+          <p:spPr>
+            <a:xfrm>
+              <a:off x="108584" y="6553264"/>
+              <a:ext cx="1158241" cy="274191"/>
+            </a:xfrm>
+            <a:prstGeom prst="rect">
+              <a:avLst/>
+            </a:prstGeom>
+          </p:spPr>
+        </p:pic>
+      </p:grpSp>
+    </p:spTree>
+  </p:cSld>
+  <p:clrMapOvr>
+    <a:masterClrMapping/>
+  </p:clrMapOvr>
+</p:sld>
+</file>
+
+<file path=ppt/slides/slide20.xml><?xml version="1.0" encoding="utf-8"?>
+<p:sld xmlns:a="http://schemas.openxmlformats.org/drawingml/2006/main" xmlns:r="http://schemas.openxmlformats.org/officeDocument/2006/relationships" xmlns:p="http://schemas.openxmlformats.org/presentationml/2006/main">
+  <p:cSld>
+    <p:bg>
+      <p:bgPr>
+        <a:solidFill>
+          <a:srgbClr val="F3F8FF"/>
+        </a:solidFill>
+        <a:effectLst/>
+      </p:bgPr>
+    </p:bg>
+    <p:spTree>
+      <p:nvGrpSpPr>
+        <p:cNvPr id="1" name=""/>
+        <p:cNvGrpSpPr/>
+        <p:nvPr/>
+      </p:nvGrpSpPr>
+      <p:grpSpPr>
+        <a:xfrm>
+          <a:off x="0" y="0"/>
+          <a:ext cx="0" cy="0"/>
+          <a:chOff x="0" y="0"/>
+          <a:chExt cx="0" cy="0"/>
+        </a:xfrm>
+      </p:grpSpPr>
+      <p:sp>
+        <p:nvSpPr>
+          <p:cNvPr id="2" name="TextBox 1"/>
+          <p:cNvSpPr txBox="1"/>
+          <p:nvPr/>
+        </p:nvSpPr>
+        <p:spPr>
+          <a:xfrm>
+            <a:off x="548640" y="502920"/>
+            <a:ext cx="11064240" cy="1097280"/>
+          </a:xfrm>
+          <a:prstGeom prst="rect">
+            <a:avLst/>
+          </a:prstGeom>
+          <a:noFill/>
+        </p:spPr>
+        <p:txBody>
+          <a:bodyPr wrap="square">
+            <a:spAutoFit/>
+          </a:bodyPr>
+          <a:lstStyle/>
+          <a:p>
+            <a:pPr>
+              <a:defRPr sz="3200" b="1">
+                <a:solidFill>
+                  <a:srgbClr val="212529"/>
+                </a:solidFill>
+                <a:latin typeface="Segoe UI"/>
+              </a:defRPr>
+            </a:pPr>
+            <a:r>
+              <a:t>Your daily routine — recap</a:t>
+            </a:r>
+          </a:p>
+        </p:txBody>
+      </p:sp>
+      <p:sp>
+        <p:nvSpPr>
+          <p:cNvPr id="3" name="Oval 2"/>
+          <p:cNvSpPr/>
+          <p:nvPr/>
+        </p:nvSpPr>
+        <p:spPr>
+          <a:xfrm>
+            <a:off x="685800" y="1600200"/>
+            <a:ext cx="502920" cy="502920"/>
+          </a:xfrm>
+          <a:prstGeom prst="ellipse">
+            <a:avLst/>
+          </a:prstGeom>
+          <a:solidFill>
+            <a:srgbClr val="0D6EFD"/>
+          </a:solidFill>
+          <a:ln>
+            <a:noFill/>
+          </a:ln>
+        </p:spPr>
+        <p:style>
+          <a:lnRef idx="1">
+            <a:schemeClr val="accent1"/>
+          </a:lnRef>
+          <a:fillRef idx="3">
+            <a:schemeClr val="accent1"/>
+          </a:fillRef>
+          <a:effectRef idx="2">
+            <a:schemeClr val="accent1"/>
+          </a:effectRef>
+          <a:fontRef idx="minor">
+            <a:schemeClr val="lt1"/>
+          </a:fontRef>
+        </p:style>
+        <p:txBody>
+          <a:bodyPr rtlCol="0" anchor="ctr"/>
+          <a:lstStyle/>
+          <a:p>
+            <a:pPr algn="ctr">
+              <a:defRPr sz="1800" b="1">
+                <a:solidFill>
+                  <a:srgbClr val="FFFFFF"/>
+                </a:solidFill>
+              </a:defRPr>
+            </a:pPr>
+            <a:r>
+              <a:t>1</a:t>
+            </a:r>
+          </a:p>
+        </p:txBody>
+      </p:sp>
+      <p:sp>
+        <p:nvSpPr>
+          <p:cNvPr id="4" name="TextBox 3"/>
+          <p:cNvSpPr txBox="1"/>
+          <p:nvPr/>
+        </p:nvSpPr>
+        <p:spPr>
+          <a:xfrm>
+            <a:off x="1325880" y="1554480"/>
+            <a:ext cx="9601200" cy="594360"/>
+          </a:xfrm>
+          <a:prstGeom prst="rect">
+            <a:avLst/>
+          </a:prstGeom>
+          <a:noFill/>
+        </p:spPr>
+        <p:txBody>
+          <a:bodyPr wrap="none">
+            <a:spAutoFit/>
+          </a:bodyPr>
+          <a:lstStyle/>
+          <a:p>
+            <a:pPr>
+              <a:defRPr sz="2200">
+                <a:solidFill>
+                  <a:srgbClr val="212529"/>
+                </a:solidFill>
+                <a:latin typeface="Segoe UI"/>
+              </a:defRPr>
+            </a:pPr>
+            <a:r>
+              <a:t>Open My Schedule</a:t>
+            </a:r>
+          </a:p>
+        </p:txBody>
+      </p:sp>
+      <p:sp>
+        <p:nvSpPr>
+          <p:cNvPr id="5" name="Oval 4"/>
+          <p:cNvSpPr/>
+          <p:nvPr/>
+        </p:nvSpPr>
+        <p:spPr>
+          <a:xfrm>
+            <a:off x="685800" y="2468880"/>
+            <a:ext cx="502920" cy="502920"/>
+          </a:xfrm>
+          <a:prstGeom prst="ellipse">
+            <a:avLst/>
+          </a:prstGeom>
+          <a:solidFill>
+            <a:srgbClr val="0D6EFD"/>
+          </a:solidFill>
+          <a:ln>
+            <a:noFill/>
+          </a:ln>
+        </p:spPr>
+        <p:style>
+          <a:lnRef idx="1">
+            <a:schemeClr val="accent1"/>
+          </a:lnRef>
+          <a:fillRef idx="3">
+            <a:schemeClr val="accent1"/>
+          </a:fillRef>
+          <a:effectRef idx="2">
+            <a:schemeClr val="accent1"/>
+          </a:effectRef>
+          <a:fontRef idx="minor">
+            <a:schemeClr val="lt1"/>
+          </a:fontRef>
+        </p:style>
+        <p:txBody>
+          <a:bodyPr rtlCol="0" anchor="ctr"/>
+          <a:lstStyle/>
+          <a:p>
+            <a:pPr algn="ctr">
+              <a:defRPr sz="1800" b="1">
+                <a:solidFill>
+                  <a:srgbClr val="FFFFFF"/>
+                </a:solidFill>
+              </a:defRPr>
+            </a:pPr>
+            <a:r>
+              <a:t>2</a:t>
+            </a:r>
+          </a:p>
+        </p:txBody>
+      </p:sp>
+      <p:sp>
+        <p:nvSpPr>
+          <p:cNvPr id="6" name="TextBox 5"/>
+          <p:cNvSpPr txBox="1"/>
+          <p:nvPr/>
+        </p:nvSpPr>
+        <p:spPr>
+          <a:xfrm>
+            <a:off x="1325880" y="2423160"/>
+            <a:ext cx="9601200" cy="594360"/>
+          </a:xfrm>
+          <a:prstGeom prst="rect">
+            <a:avLst/>
+          </a:prstGeom>
+          <a:noFill/>
+        </p:spPr>
+        <p:txBody>
+          <a:bodyPr wrap="none">
+            <a:spAutoFit/>
+          </a:bodyPr>
+          <a:lstStyle/>
+          <a:p>
+            <a:pPr>
+              <a:defRPr sz="2200">
+                <a:solidFill>
+                  <a:srgbClr val="212529"/>
+                </a:solidFill>
+                <a:latin typeface="Segoe UI"/>
+              </a:defRPr>
+            </a:pPr>
+            <a:r>
+              <a:t>Anchor Date + period → Load</a:t>
+            </a:r>
+          </a:p>
+        </p:txBody>
+      </p:sp>
+      <p:sp>
+        <p:nvSpPr>
+          <p:cNvPr id="7" name="Oval 6"/>
+          <p:cNvSpPr/>
+          <p:nvPr/>
+        </p:nvSpPr>
+        <p:spPr>
+          <a:xfrm>
+            <a:off x="685800" y="3337560"/>
+            <a:ext cx="502920" cy="502920"/>
+          </a:xfrm>
+          <a:prstGeom prst="ellipse">
+            <a:avLst/>
+          </a:prstGeom>
+          <a:solidFill>
+            <a:srgbClr val="0D6EFD"/>
+          </a:solidFill>
+          <a:ln>
+            <a:noFill/>
+          </a:ln>
+        </p:spPr>
+        <p:style>
+          <a:lnRef idx="1">
+            <a:schemeClr val="accent1"/>
+          </a:lnRef>
+          <a:fillRef idx="3">
+            <a:schemeClr val="accent1"/>
+          </a:fillRef>
+          <a:effectRef idx="2">
+            <a:schemeClr val="accent1"/>
+          </a:effectRef>
+          <a:fontRef idx="minor">
+            <a:schemeClr val="lt1"/>
+          </a:fontRef>
+        </p:style>
+        <p:txBody>
+          <a:bodyPr rtlCol="0" anchor="ctr"/>
+          <a:lstStyle/>
+          <a:p>
+            <a:pPr algn="ctr">
+              <a:defRPr sz="1800" b="1">
+                <a:solidFill>
+                  <a:srgbClr val="FFFFFF"/>
+                </a:solidFill>
+              </a:defRPr>
+            </a:pPr>
+            <a:r>
+              <a:t>3</a:t>
+            </a:r>
+          </a:p>
+        </p:txBody>
+      </p:sp>
+      <p:sp>
+        <p:nvSpPr>
+          <p:cNvPr id="8" name="TextBox 7"/>
+          <p:cNvSpPr txBox="1"/>
+          <p:nvPr/>
+        </p:nvSpPr>
+        <p:spPr>
+          <a:xfrm>
+            <a:off x="1325880" y="3291840"/>
+            <a:ext cx="9601200" cy="594360"/>
+          </a:xfrm>
+          <a:prstGeom prst="rect">
+            <a:avLst/>
+          </a:prstGeom>
+          <a:noFill/>
+        </p:spPr>
+        <p:txBody>
+          <a:bodyPr wrap="none">
+            <a:spAutoFit/>
+          </a:bodyPr>
+          <a:lstStyle/>
+          <a:p>
+            <a:pPr>
+              <a:defRPr sz="2200">
+                <a:solidFill>
+                  <a:srgbClr val="212529"/>
+                </a:solidFill>
+                <a:latin typeface="Segoe UI"/>
+              </a:defRPr>
+            </a:pPr>
+            <a:r>
+              <a:t>Click session → Manage Session</a:t>
+            </a:r>
+          </a:p>
+        </p:txBody>
+      </p:sp>
+      <p:sp>
+        <p:nvSpPr>
+          <p:cNvPr id="9" name="Oval 8"/>
+          <p:cNvSpPr/>
+          <p:nvPr/>
+        </p:nvSpPr>
+        <p:spPr>
+          <a:xfrm>
+            <a:off x="685800" y="4206240"/>
+            <a:ext cx="502920" cy="502920"/>
+          </a:xfrm>
+          <a:prstGeom prst="ellipse">
+            <a:avLst/>
+          </a:prstGeom>
+          <a:solidFill>
+            <a:srgbClr val="0D6EFD"/>
+          </a:solidFill>
+          <a:ln>
+            <a:noFill/>
+          </a:ln>
+        </p:spPr>
+        <p:style>
+          <a:lnRef idx="1">
+            <a:schemeClr val="accent1"/>
+          </a:lnRef>
+          <a:fillRef idx="3">
+            <a:schemeClr val="accent1"/>
+          </a:fillRef>
+          <a:effectRef idx="2">
+            <a:schemeClr val="accent1"/>
+          </a:effectRef>
+          <a:fontRef idx="minor">
+            <a:schemeClr val="lt1"/>
+          </a:fontRef>
+        </p:style>
+        <p:txBody>
+          <a:bodyPr rtlCol="0" anchor="ctr"/>
+          <a:lstStyle/>
+          <a:p>
+            <a:pPr algn="ctr">
+              <a:defRPr sz="1800" b="1">
+                <a:solidFill>
+                  <a:srgbClr val="FFFFFF"/>
+                </a:solidFill>
+              </a:defRPr>
+            </a:pPr>
+            <a:r>
+              <a:t>4</a:t>
+            </a:r>
+          </a:p>
+        </p:txBody>
+      </p:sp>
+      <p:sp>
+        <p:nvSpPr>
+          <p:cNvPr id="10" name="TextBox 9"/>
+          <p:cNvSpPr txBox="1"/>
+          <p:nvPr/>
+        </p:nvSpPr>
+        <p:spPr>
+          <a:xfrm>
+            <a:off x="1325880" y="4160520"/>
+            <a:ext cx="9601200" cy="594360"/>
+          </a:xfrm>
+          <a:prstGeom prst="rect">
+            <a:avLst/>
+          </a:prstGeom>
+          <a:noFill/>
+        </p:spPr>
+        <p:txBody>
+          <a:bodyPr wrap="none">
+            <a:spAutoFit/>
+          </a:bodyPr>
+          <a:lstStyle/>
+          <a:p>
+            <a:pPr>
+              <a:defRPr sz="2200">
+                <a:solidFill>
+                  <a:srgbClr val="212529"/>
+                </a:solidFill>
+                <a:latin typeface="Segoe UI"/>
+              </a:defRPr>
+            </a:pPr>
+            <a:r>
+              <a:t>Attendance · Notes · Curriculum (and other visible sections)</a:t>
+            </a:r>
+          </a:p>
+        </p:txBody>
+      </p:sp>
+      <p:sp>
+        <p:nvSpPr>
+          <p:cNvPr id="11" name="Oval 10"/>
+          <p:cNvSpPr/>
+          <p:nvPr/>
+        </p:nvSpPr>
+        <p:spPr>
+          <a:xfrm>
+            <a:off x="685800" y="5074920"/>
+            <a:ext cx="502920" cy="502920"/>
+          </a:xfrm>
+          <a:prstGeom prst="ellipse">
+            <a:avLst/>
+          </a:prstGeom>
+          <a:solidFill>
+            <a:srgbClr val="0D6EFD"/>
+          </a:solidFill>
+          <a:ln>
+            <a:noFill/>
+          </a:ln>
+        </p:spPr>
+        <p:style>
+          <a:lnRef idx="1">
+            <a:schemeClr val="accent1"/>
+          </a:lnRef>
+          <a:fillRef idx="3">
+            <a:schemeClr val="accent1"/>
+          </a:fillRef>
+          <a:effectRef idx="2">
+            <a:schemeClr val="accent1"/>
+          </a:effectRef>
+          <a:fontRef idx="minor">
+            <a:schemeClr val="lt1"/>
+          </a:fontRef>
+        </p:style>
+        <p:txBody>
+          <a:bodyPr rtlCol="0" anchor="ctr"/>
+          <a:lstStyle/>
+          <a:p>
+            <a:pPr algn="ctr">
+              <a:defRPr sz="1800" b="1">
+                <a:solidFill>
+                  <a:srgbClr val="FFFFFF"/>
+                </a:solidFill>
+              </a:defRPr>
+            </a:pPr>
+            <a:r>
+              <a:t>5</a:t>
+            </a:r>
+          </a:p>
+        </p:txBody>
+      </p:sp>
+      <p:sp>
+        <p:nvSpPr>
+          <p:cNvPr id="12" name="TextBox 11"/>
+          <p:cNvSpPr txBox="1"/>
+          <p:nvPr/>
+        </p:nvSpPr>
+        <p:spPr>
+          <a:xfrm>
+            <a:off x="1325880" y="5029200"/>
+            <a:ext cx="9601200" cy="594360"/>
+          </a:xfrm>
+          <a:prstGeom prst="rect">
+            <a:avLst/>
+          </a:prstGeom>
+          <a:noFill/>
+        </p:spPr>
+        <p:txBody>
+          <a:bodyPr wrap="none">
+            <a:spAutoFit/>
+          </a:bodyPr>
+          <a:lstStyle/>
+          <a:p>
+            <a:pPr>
+              <a:defRPr sz="2200">
+                <a:solidFill>
+                  <a:srgbClr val="212529"/>
+                </a:solidFill>
+                <a:latin typeface="Segoe UI"/>
+              </a:defRPr>
+            </a:pPr>
+            <a:r>
+              <a:t>Session status = Completed → Save session</a:t>
+            </a:r>
+          </a:p>
+        </p:txBody>
+      </p:sp>
+      <p:pic>
+        <p:nvPicPr>
+          <p:cNvPr id="13" name="Picture 12" descr="01-dashboard-open-my-schedule.png"/>
+          <p:cNvPicPr>
+            <a:picLocks noChangeAspect="1"/>
+          </p:cNvPicPr>
+          <p:nvPr/>
+        </p:nvPicPr>
+        <p:blipFill>
+          <a:blip r:embed="rId3"/>
+          <a:stretch>
+            <a:fillRect/>
+          </a:stretch>
+        </p:blipFill>
+        <p:spPr>
+          <a:xfrm>
+            <a:off x="8046720" y="1371600"/>
+            <a:ext cx="3566160" cy="1828800"/>
+          </a:xfrm>
+          <a:prstGeom prst="rect">
+            <a:avLst/>
+          </a:prstGeom>
+        </p:spPr>
+      </p:pic>
+      <p:sp>
+        <p:nvSpPr>
+          <p:cNvPr id="14" name="Rectangle 13"/>
           <p:cNvSpPr/>
           <p:nvPr/>
         </p:nvSpPr>
@@ -8238,7 +8774,7 @@
           <a:bodyPr rtlCol="0" anchor="ctr"/>
           <a:lstStyle/>
           <a:p>
-            <a:pPr>
+            <a:pPr algn="ctr">
               <a:defRPr sz="1100">
                 <a:solidFill>
                   <a:srgbClr val="FFFFFF"/>
@@ -8247,8 +8783,7 @@
               </a:defRPr>
             </a:pPr>
             <a:r>
-              <a:rPr dirty="0"/>
-              <a:t>Teacher daily routine</a:t>
+              <a:t>Handout: save this slide as PDF for your desk</a:t>
             </a:r>
           </a:p>
         </p:txBody>
@@ -8532,67 +9067,6 @@
             <a:r>
               <a:rPr lang="en-US" dirty="0"/>
               <a:t> email account. Then follow the on-screen steps to log in into the app.</a:t>
-            </a:r>
-            <a:endParaRPr dirty="0"/>
-          </a:p>
-        </p:txBody>
-      </p:sp>
-      <p:sp>
-        <p:nvSpPr>
-          <p:cNvPr id="5" name="Rectangle 4">
-            <a:extLst>
-              <a:ext uri="{FF2B5EF4-FFF2-40B4-BE49-F238E27FC236}">
-                <a16:creationId xmlns:a16="http://schemas.microsoft.com/office/drawing/2014/main" id="{564B2A67-B4D9-E26D-BE15-AA4010D348E8}"/>
-              </a:ext>
-            </a:extLst>
-          </p:cNvPr>
-          <p:cNvSpPr/>
-          <p:nvPr/>
-        </p:nvSpPr>
-        <p:spPr>
-          <a:xfrm>
-            <a:off x="0" y="6537960"/>
-            <a:ext cx="12191695" cy="320040"/>
-          </a:xfrm>
-          <a:prstGeom prst="rect">
-            <a:avLst/>
-          </a:prstGeom>
-          <a:solidFill>
-            <a:srgbClr val="0D6EFD"/>
-          </a:solidFill>
-          <a:ln>
-            <a:noFill/>
-          </a:ln>
-        </p:spPr>
-        <p:style>
-          <a:lnRef idx="1">
-            <a:schemeClr val="accent1"/>
-          </a:lnRef>
-          <a:fillRef idx="3">
-            <a:schemeClr val="accent1"/>
-          </a:fillRef>
-          <a:effectRef idx="2">
-            <a:schemeClr val="accent1"/>
-          </a:effectRef>
-          <a:fontRef idx="minor">
-            <a:schemeClr val="lt1"/>
-          </a:fontRef>
-        </p:style>
-        <p:txBody>
-          <a:bodyPr rtlCol="0" anchor="ctr"/>
-          <a:lstStyle/>
-          <a:p>
-            <a:pPr>
-              <a:defRPr sz="1100">
-                <a:solidFill>
-                  <a:srgbClr val="FFFFFF"/>
-                </a:solidFill>
-                <a:latin typeface="Segoe UI"/>
-              </a:defRPr>
-            </a:pPr>
-            <a:r>
-              <a:rPr lang="en-US" dirty="0"/>
-              <a:t>Where to start</a:t>
             </a:r>
             <a:endParaRPr dirty="0"/>
           </a:p>
@@ -9959,6 +10433,114 @@
           </a:p>
         </p:txBody>
       </p:sp>
+      <p:grpSp>
+        <p:nvGrpSpPr>
+          <p:cNvPr id="8" name="Group 7">
+            <a:extLst>
+              <a:ext uri="{FF2B5EF4-FFF2-40B4-BE49-F238E27FC236}">
+                <a16:creationId xmlns:a16="http://schemas.microsoft.com/office/drawing/2014/main" id="{BB640376-A1E9-C6B7-EFF6-F5C5AAD6FB0F}"/>
+              </a:ext>
+            </a:extLst>
+          </p:cNvPr>
+          <p:cNvGrpSpPr/>
+          <p:nvPr/>
+        </p:nvGrpSpPr>
+        <p:grpSpPr>
+          <a:xfrm>
+            <a:off x="0" y="6537960"/>
+            <a:ext cx="12191695" cy="320040"/>
+            <a:chOff x="0" y="6537960"/>
+            <a:chExt cx="12191695" cy="320040"/>
+          </a:xfrm>
+        </p:grpSpPr>
+        <p:sp>
+          <p:nvSpPr>
+            <p:cNvPr id="10" name="Rectangle 9">
+              <a:extLst>
+                <a:ext uri="{FF2B5EF4-FFF2-40B4-BE49-F238E27FC236}">
+                  <a16:creationId xmlns:a16="http://schemas.microsoft.com/office/drawing/2014/main" id="{A997D92E-6F4E-65AB-B3BC-18912CD4CDB6}"/>
+                </a:ext>
+              </a:extLst>
+            </p:cNvPr>
+            <p:cNvSpPr/>
+            <p:nvPr/>
+          </p:nvSpPr>
+          <p:spPr>
+            <a:xfrm>
+              <a:off x="0" y="6537960"/>
+              <a:ext cx="12191695" cy="320040"/>
+            </a:xfrm>
+            <a:prstGeom prst="rect">
+              <a:avLst/>
+            </a:prstGeom>
+            <a:solidFill>
+              <a:srgbClr val="0D6EFD"/>
+            </a:solidFill>
+            <a:ln>
+              <a:noFill/>
+            </a:ln>
+          </p:spPr>
+          <p:style>
+            <a:lnRef idx="1">
+              <a:schemeClr val="accent1"/>
+            </a:lnRef>
+            <a:fillRef idx="3">
+              <a:schemeClr val="accent1"/>
+            </a:fillRef>
+            <a:effectRef idx="2">
+              <a:schemeClr val="accent1"/>
+            </a:effectRef>
+            <a:fontRef idx="minor">
+              <a:schemeClr val="lt1"/>
+            </a:fontRef>
+          </p:style>
+          <p:txBody>
+            <a:bodyPr rtlCol="0" anchor="ctr"/>
+            <a:lstStyle/>
+            <a:p>
+              <a:pPr>
+                <a:defRPr sz="1100">
+                  <a:solidFill>
+                    <a:srgbClr val="FFFFFF"/>
+                  </a:solidFill>
+                  <a:latin typeface="Segoe UI"/>
+                </a:defRPr>
+              </a:pPr>
+              <a:endParaRPr dirty="0"/>
+            </a:p>
+          </p:txBody>
+        </p:sp>
+        <p:pic>
+          <p:nvPicPr>
+            <p:cNvPr id="12" name="Picture 11">
+              <a:extLst>
+                <a:ext uri="{FF2B5EF4-FFF2-40B4-BE49-F238E27FC236}">
+                  <a16:creationId xmlns:a16="http://schemas.microsoft.com/office/drawing/2014/main" id="{8C376115-60E8-BD5E-0D43-9CA822023547}"/>
+                </a:ext>
+              </a:extLst>
+            </p:cNvPr>
+            <p:cNvPicPr>
+              <a:picLocks noChangeAspect="1"/>
+            </p:cNvPicPr>
+            <p:nvPr/>
+          </p:nvPicPr>
+          <p:blipFill>
+            <a:blip r:embed="rId6"/>
+            <a:stretch>
+              <a:fillRect/>
+            </a:stretch>
+          </p:blipFill>
+          <p:spPr>
+            <a:xfrm>
+              <a:off x="108584" y="6553264"/>
+              <a:ext cx="1158241" cy="274191"/>
+            </a:xfrm>
+            <a:prstGeom prst="rect">
+              <a:avLst/>
+            </a:prstGeom>
+          </p:spPr>
+        </p:pic>
+      </p:grpSp>
     </p:spTree>
     <p:extLst>
       <p:ext uri="{BB962C8B-B14F-4D97-AF65-F5344CB8AC3E}">
@@ -10225,67 +10807,6 @@
               <a:rPr lang="en-US" dirty="0"/>
               <a:t>School Calendar</a:t>
             </a:r>
-          </a:p>
-        </p:txBody>
-      </p:sp>
-      <p:sp>
-        <p:nvSpPr>
-          <p:cNvPr id="5" name="Rectangle 4">
-            <a:extLst>
-              <a:ext uri="{FF2B5EF4-FFF2-40B4-BE49-F238E27FC236}">
-                <a16:creationId xmlns:a16="http://schemas.microsoft.com/office/drawing/2014/main" id="{C0798364-195A-B7A4-5384-6A3022CD4AFC}"/>
-              </a:ext>
-            </a:extLst>
-          </p:cNvPr>
-          <p:cNvSpPr/>
-          <p:nvPr/>
-        </p:nvSpPr>
-        <p:spPr>
-          <a:xfrm>
-            <a:off x="0" y="6537960"/>
-            <a:ext cx="12191695" cy="320040"/>
-          </a:xfrm>
-          <a:prstGeom prst="rect">
-            <a:avLst/>
-          </a:prstGeom>
-          <a:solidFill>
-            <a:srgbClr val="0D6EFD"/>
-          </a:solidFill>
-          <a:ln>
-            <a:noFill/>
-          </a:ln>
-        </p:spPr>
-        <p:style>
-          <a:lnRef idx="1">
-            <a:schemeClr val="accent1"/>
-          </a:lnRef>
-          <a:fillRef idx="3">
-            <a:schemeClr val="accent1"/>
-          </a:fillRef>
-          <a:effectRef idx="2">
-            <a:schemeClr val="accent1"/>
-          </a:effectRef>
-          <a:fontRef idx="minor">
-            <a:schemeClr val="lt1"/>
-          </a:fontRef>
-        </p:style>
-        <p:txBody>
-          <a:bodyPr rtlCol="0" anchor="ctr"/>
-          <a:lstStyle/>
-          <a:p>
-            <a:pPr>
-              <a:defRPr sz="1100">
-                <a:solidFill>
-                  <a:srgbClr val="FFFFFF"/>
-                </a:solidFill>
-                <a:latin typeface="Segoe UI"/>
-              </a:defRPr>
-            </a:pPr>
-            <a:r>
-              <a:rPr lang="en-US" dirty="0"/>
-              <a:t>Where to start</a:t>
-            </a:r>
-            <a:endParaRPr dirty="0"/>
           </a:p>
         </p:txBody>
       </p:sp>
@@ -11433,6 +11954,114 @@
           </a:p>
         </p:txBody>
       </p:sp>
+      <p:grpSp>
+        <p:nvGrpSpPr>
+          <p:cNvPr id="4" name="Group 3">
+            <a:extLst>
+              <a:ext uri="{FF2B5EF4-FFF2-40B4-BE49-F238E27FC236}">
+                <a16:creationId xmlns:a16="http://schemas.microsoft.com/office/drawing/2014/main" id="{B68FC33E-110E-8A0F-119C-D4551728667B}"/>
+              </a:ext>
+            </a:extLst>
+          </p:cNvPr>
+          <p:cNvGrpSpPr/>
+          <p:nvPr/>
+        </p:nvGrpSpPr>
+        <p:grpSpPr>
+          <a:xfrm>
+            <a:off x="0" y="6537960"/>
+            <a:ext cx="12191695" cy="320040"/>
+            <a:chOff x="0" y="6537960"/>
+            <a:chExt cx="12191695" cy="320040"/>
+          </a:xfrm>
+        </p:grpSpPr>
+        <p:sp>
+          <p:nvSpPr>
+            <p:cNvPr id="7" name="Rectangle 6">
+              <a:extLst>
+                <a:ext uri="{FF2B5EF4-FFF2-40B4-BE49-F238E27FC236}">
+                  <a16:creationId xmlns:a16="http://schemas.microsoft.com/office/drawing/2014/main" id="{033167B1-B885-A9D0-915C-E1AAC8B0486A}"/>
+                </a:ext>
+              </a:extLst>
+            </p:cNvPr>
+            <p:cNvSpPr/>
+            <p:nvPr/>
+          </p:nvSpPr>
+          <p:spPr>
+            <a:xfrm>
+              <a:off x="0" y="6537960"/>
+              <a:ext cx="12191695" cy="320040"/>
+            </a:xfrm>
+            <a:prstGeom prst="rect">
+              <a:avLst/>
+            </a:prstGeom>
+            <a:solidFill>
+              <a:srgbClr val="0D6EFD"/>
+            </a:solidFill>
+            <a:ln>
+              <a:noFill/>
+            </a:ln>
+          </p:spPr>
+          <p:style>
+            <a:lnRef idx="1">
+              <a:schemeClr val="accent1"/>
+            </a:lnRef>
+            <a:fillRef idx="3">
+              <a:schemeClr val="accent1"/>
+            </a:fillRef>
+            <a:effectRef idx="2">
+              <a:schemeClr val="accent1"/>
+            </a:effectRef>
+            <a:fontRef idx="minor">
+              <a:schemeClr val="lt1"/>
+            </a:fontRef>
+          </p:style>
+          <p:txBody>
+            <a:bodyPr rtlCol="0" anchor="ctr"/>
+            <a:lstStyle/>
+            <a:p>
+              <a:pPr>
+                <a:defRPr sz="1100">
+                  <a:solidFill>
+                    <a:srgbClr val="FFFFFF"/>
+                  </a:solidFill>
+                  <a:latin typeface="Segoe UI"/>
+                </a:defRPr>
+              </a:pPr>
+              <a:endParaRPr dirty="0"/>
+            </a:p>
+          </p:txBody>
+        </p:sp>
+        <p:pic>
+          <p:nvPicPr>
+            <p:cNvPr id="8" name="Picture 7">
+              <a:extLst>
+                <a:ext uri="{FF2B5EF4-FFF2-40B4-BE49-F238E27FC236}">
+                  <a16:creationId xmlns:a16="http://schemas.microsoft.com/office/drawing/2014/main" id="{8A26731D-7834-1509-1D19-976F51A30945}"/>
+                </a:ext>
+              </a:extLst>
+            </p:cNvPr>
+            <p:cNvPicPr>
+              <a:picLocks noChangeAspect="1"/>
+            </p:cNvPicPr>
+            <p:nvPr/>
+          </p:nvPicPr>
+          <p:blipFill>
+            <a:blip r:embed="rId4"/>
+            <a:stretch>
+              <a:fillRect/>
+            </a:stretch>
+          </p:blipFill>
+          <p:spPr>
+            <a:xfrm>
+              <a:off x="108584" y="6553264"/>
+              <a:ext cx="1158241" cy="274191"/>
+            </a:xfrm>
+            <a:prstGeom prst="rect">
+              <a:avLst/>
+            </a:prstGeom>
+          </p:spPr>
+        </p:pic>
+      </p:grpSp>
     </p:spTree>
     <p:extLst>
       <p:ext uri="{BB962C8B-B14F-4D97-AF65-F5344CB8AC3E}">
@@ -11483,8 +12112,8 @@
         </p:nvSpPr>
         <p:spPr>
           <a:xfrm>
-            <a:off x="548640" y="411480"/>
-            <a:ext cx="11064240" cy="938719"/>
+            <a:off x="386202" y="411480"/>
+            <a:ext cx="11226678" cy="938719"/>
           </a:xfrm>
           <a:prstGeom prst="rect">
             <a:avLst/>
@@ -11699,66 +12328,6 @@
               <a:t>You can change the start and end date in the ‘Choose dates’ section to see the schedule of other days.</a:t>
             </a:r>
             <a:endParaRPr sz="1600" dirty="0"/>
-          </a:p>
-        </p:txBody>
-      </p:sp>
-      <p:sp>
-        <p:nvSpPr>
-          <p:cNvPr id="5" name="Rectangle 4">
-            <a:extLst>
-              <a:ext uri="{FF2B5EF4-FFF2-40B4-BE49-F238E27FC236}">
-                <a16:creationId xmlns:a16="http://schemas.microsoft.com/office/drawing/2014/main" id="{D3405538-4AB3-F50E-510C-1B52EE0B376A}"/>
-              </a:ext>
-            </a:extLst>
-          </p:cNvPr>
-          <p:cNvSpPr/>
-          <p:nvPr/>
-        </p:nvSpPr>
-        <p:spPr>
-          <a:xfrm>
-            <a:off x="0" y="6537960"/>
-            <a:ext cx="12191695" cy="320040"/>
-          </a:xfrm>
-          <a:prstGeom prst="rect">
-            <a:avLst/>
-          </a:prstGeom>
-          <a:solidFill>
-            <a:srgbClr val="0D6EFD"/>
-          </a:solidFill>
-          <a:ln>
-            <a:noFill/>
-          </a:ln>
-        </p:spPr>
-        <p:style>
-          <a:lnRef idx="1">
-            <a:schemeClr val="accent1"/>
-          </a:lnRef>
-          <a:fillRef idx="3">
-            <a:schemeClr val="accent1"/>
-          </a:fillRef>
-          <a:effectRef idx="2">
-            <a:schemeClr val="accent1"/>
-          </a:effectRef>
-          <a:fontRef idx="minor">
-            <a:schemeClr val="lt1"/>
-          </a:fontRef>
-        </p:style>
-        <p:txBody>
-          <a:bodyPr rtlCol="0" anchor="ctr"/>
-          <a:lstStyle/>
-          <a:p>
-            <a:pPr>
-              <a:defRPr sz="1100">
-                <a:solidFill>
-                  <a:srgbClr val="FFFFFF"/>
-                </a:solidFill>
-                <a:latin typeface="Segoe UI"/>
-              </a:defRPr>
-            </a:pPr>
-            <a:r>
-              <a:rPr lang="en-US" dirty="0"/>
-              <a:t>MY SCHEDULE</a:t>
-            </a:r>
           </a:p>
         </p:txBody>
       </p:sp>
@@ -13071,8 +13640,8 @@
           </a:prstGeom>
         </p:spPr>
       </p:pic>
-      <mc:AlternateContent xmlns:mc="http://schemas.openxmlformats.org/markup-compatibility/2006">
-        <mc:Choice xmlns:p14="http://schemas.microsoft.com/office/powerpoint/2010/main" Requires="p14">
+      <mc:AlternateContent xmlns:mc="http://schemas.openxmlformats.org/markup-compatibility/2006" xmlns:p14="http://schemas.microsoft.com/office/powerpoint/2010/main">
+        <mc:Choice Requires="p14">
           <p:contentPart p14:bwMode="auto" r:id="rId6">
             <p14:nvContentPartPr>
               <p14:cNvPr id="42" name="Ink 41">
@@ -13091,7 +13660,7 @@
             </p14:xfrm>
           </p:contentPart>
         </mc:Choice>
-        <mc:Fallback>
+        <mc:Fallback xmlns="">
           <p:pic>
             <p:nvPicPr>
               <p:cNvPr id="42" name="Ink 41">
@@ -13142,8 +13711,8 @@
             <a:chExt cx="148680" cy="200880"/>
           </a:xfrm>
         </p:grpSpPr>
-        <mc:AlternateContent xmlns:mc="http://schemas.openxmlformats.org/markup-compatibility/2006">
-          <mc:Choice xmlns:p14="http://schemas.microsoft.com/office/powerpoint/2010/main" Requires="p14">
+        <mc:AlternateContent xmlns:mc="http://schemas.openxmlformats.org/markup-compatibility/2006" xmlns:p14="http://schemas.microsoft.com/office/powerpoint/2010/main">
+          <mc:Choice Requires="p14">
             <p:contentPart p14:bwMode="auto" r:id="rId8">
               <p14:nvContentPartPr>
                 <p14:cNvPr id="43" name="Ink 42">
@@ -13162,7 +13731,7 @@
               </p14:xfrm>
             </p:contentPart>
           </mc:Choice>
-          <mc:Fallback>
+          <mc:Fallback xmlns="">
             <p:pic>
               <p:nvPicPr>
                 <p:cNvPr id="43" name="Ink 42">
@@ -13193,8 +13762,8 @@
             </p:pic>
           </mc:Fallback>
         </mc:AlternateContent>
-        <mc:AlternateContent xmlns:mc="http://schemas.openxmlformats.org/markup-compatibility/2006">
-          <mc:Choice xmlns:p14="http://schemas.microsoft.com/office/powerpoint/2010/main" Requires="p14">
+        <mc:AlternateContent xmlns:mc="http://schemas.openxmlformats.org/markup-compatibility/2006" xmlns:p14="http://schemas.microsoft.com/office/powerpoint/2010/main">
+          <mc:Choice Requires="p14">
             <p:contentPart p14:bwMode="auto" r:id="rId10">
               <p14:nvContentPartPr>
                 <p14:cNvPr id="44" name="Ink 43">
@@ -13213,7 +13782,7 @@
               </p14:xfrm>
             </p:contentPart>
           </mc:Choice>
-          <mc:Fallback>
+          <mc:Fallback xmlns="">
             <p:pic>
               <p:nvPicPr>
                 <p:cNvPr id="44" name="Ink 43">
@@ -13430,8 +13999,8 @@
             <a:chExt cx="459360" cy="227880"/>
           </a:xfrm>
         </p:grpSpPr>
-        <mc:AlternateContent xmlns:mc="http://schemas.openxmlformats.org/markup-compatibility/2006">
-          <mc:Choice xmlns:p14="http://schemas.microsoft.com/office/powerpoint/2010/main" Requires="p14">
+        <mc:AlternateContent xmlns:mc="http://schemas.openxmlformats.org/markup-compatibility/2006" xmlns:p14="http://schemas.microsoft.com/office/powerpoint/2010/main">
+          <mc:Choice Requires="p14">
             <p:contentPart p14:bwMode="auto" r:id="rId12">
               <p14:nvContentPartPr>
                 <p14:cNvPr id="52" name="Ink 51">
@@ -13450,7 +14019,7 @@
               </p14:xfrm>
             </p:contentPart>
           </mc:Choice>
-          <mc:Fallback>
+          <mc:Fallback xmlns="">
             <p:pic>
               <p:nvPicPr>
                 <p:cNvPr id="52" name="Ink 51">
@@ -13481,8 +14050,8 @@
             </p:pic>
           </mc:Fallback>
         </mc:AlternateContent>
-        <mc:AlternateContent xmlns:mc="http://schemas.openxmlformats.org/markup-compatibility/2006">
-          <mc:Choice xmlns:p14="http://schemas.microsoft.com/office/powerpoint/2010/main" Requires="p14">
+        <mc:AlternateContent xmlns:mc="http://schemas.openxmlformats.org/markup-compatibility/2006" xmlns:p14="http://schemas.microsoft.com/office/powerpoint/2010/main">
+          <mc:Choice Requires="p14">
             <p:contentPart p14:bwMode="auto" r:id="rId14">
               <p14:nvContentPartPr>
                 <p14:cNvPr id="53" name="Ink 52">
@@ -13501,7 +14070,7 @@
               </p14:xfrm>
             </p:contentPart>
           </mc:Choice>
-          <mc:Fallback>
+          <mc:Fallback xmlns="">
             <p:pic>
               <p:nvPicPr>
                 <p:cNvPr id="53" name="Ink 52">
@@ -13553,8 +14122,8 @@
             <a:chExt cx="146880" cy="200520"/>
           </a:xfrm>
         </p:grpSpPr>
-        <mc:AlternateContent xmlns:mc="http://schemas.openxmlformats.org/markup-compatibility/2006">
-          <mc:Choice xmlns:p14="http://schemas.microsoft.com/office/powerpoint/2010/main" Requires="p14">
+        <mc:AlternateContent xmlns:mc="http://schemas.openxmlformats.org/markup-compatibility/2006" xmlns:p14="http://schemas.microsoft.com/office/powerpoint/2010/main">
+          <mc:Choice Requires="p14">
             <p:contentPart p14:bwMode="auto" r:id="rId16">
               <p14:nvContentPartPr>
                 <p14:cNvPr id="54" name="Ink 53">
@@ -13573,7 +14142,7 @@
               </p14:xfrm>
             </p:contentPart>
           </mc:Choice>
-          <mc:Fallback>
+          <mc:Fallback xmlns="">
             <p:pic>
               <p:nvPicPr>
                 <p:cNvPr id="54" name="Ink 53">
@@ -13604,8 +14173,8 @@
             </p:pic>
           </mc:Fallback>
         </mc:AlternateContent>
-        <mc:AlternateContent xmlns:mc="http://schemas.openxmlformats.org/markup-compatibility/2006">
-          <mc:Choice xmlns:p14="http://schemas.microsoft.com/office/powerpoint/2010/main" Requires="p14">
+        <mc:AlternateContent xmlns:mc="http://schemas.openxmlformats.org/markup-compatibility/2006" xmlns:p14="http://schemas.microsoft.com/office/powerpoint/2010/main">
+          <mc:Choice Requires="p14">
             <p:contentPart p14:bwMode="auto" r:id="rId18">
               <p14:nvContentPartPr>
                 <p14:cNvPr id="56" name="Ink 55">
@@ -13624,7 +14193,7 @@
               </p14:xfrm>
             </p:contentPart>
           </mc:Choice>
-          <mc:Fallback>
+          <mc:Fallback xmlns="">
             <p:pic>
               <p:nvPicPr>
                 <p:cNvPr id="56" name="Ink 55">
@@ -13676,8 +14245,8 @@
             <a:chExt cx="363600" cy="190080"/>
           </a:xfrm>
         </p:grpSpPr>
-        <mc:AlternateContent xmlns:mc="http://schemas.openxmlformats.org/markup-compatibility/2006">
-          <mc:Choice xmlns:p14="http://schemas.microsoft.com/office/powerpoint/2010/main" Requires="p14">
+        <mc:AlternateContent xmlns:mc="http://schemas.openxmlformats.org/markup-compatibility/2006" xmlns:p14="http://schemas.microsoft.com/office/powerpoint/2010/main">
+          <mc:Choice Requires="p14">
             <p:contentPart p14:bwMode="auto" r:id="rId20">
               <p14:nvContentPartPr>
                 <p14:cNvPr id="58" name="Ink 57">
@@ -13696,7 +14265,7 @@
               </p14:xfrm>
             </p:contentPart>
           </mc:Choice>
-          <mc:Fallback>
+          <mc:Fallback xmlns="">
             <p:pic>
               <p:nvPicPr>
                 <p:cNvPr id="58" name="Ink 57">
@@ -13727,8 +14296,8 @@
             </p:pic>
           </mc:Fallback>
         </mc:AlternateContent>
-        <mc:AlternateContent xmlns:mc="http://schemas.openxmlformats.org/markup-compatibility/2006">
-          <mc:Choice xmlns:p14="http://schemas.microsoft.com/office/powerpoint/2010/main" Requires="p14">
+        <mc:AlternateContent xmlns:mc="http://schemas.openxmlformats.org/markup-compatibility/2006" xmlns:p14="http://schemas.microsoft.com/office/powerpoint/2010/main">
+          <mc:Choice Requires="p14">
             <p:contentPart p14:bwMode="auto" r:id="rId22">
               <p14:nvContentPartPr>
                 <p14:cNvPr id="59" name="Ink 58">
@@ -13747,7 +14316,7 @@
               </p14:xfrm>
             </p:contentPart>
           </mc:Choice>
-          <mc:Fallback>
+          <mc:Fallback xmlns="">
             <p:pic>
               <p:nvPicPr>
                 <p:cNvPr id="59" name="Ink 58">
@@ -13778,6 +14347,114 @@
             </p:pic>
           </mc:Fallback>
         </mc:AlternateContent>
+      </p:grpSp>
+      <p:grpSp>
+        <p:nvGrpSpPr>
+          <p:cNvPr id="4" name="Group 3">
+            <a:extLst>
+              <a:ext uri="{FF2B5EF4-FFF2-40B4-BE49-F238E27FC236}">
+                <a16:creationId xmlns:a16="http://schemas.microsoft.com/office/drawing/2014/main" id="{87138A85-34C8-853C-14F6-FA877F3244E0}"/>
+              </a:ext>
+            </a:extLst>
+          </p:cNvPr>
+          <p:cNvGrpSpPr/>
+          <p:nvPr/>
+        </p:nvGrpSpPr>
+        <p:grpSpPr>
+          <a:xfrm>
+            <a:off x="0" y="6537960"/>
+            <a:ext cx="12191695" cy="320040"/>
+            <a:chOff x="0" y="6537960"/>
+            <a:chExt cx="12191695" cy="320040"/>
+          </a:xfrm>
+        </p:grpSpPr>
+        <p:sp>
+          <p:nvSpPr>
+            <p:cNvPr id="7" name="Rectangle 6">
+              <a:extLst>
+                <a:ext uri="{FF2B5EF4-FFF2-40B4-BE49-F238E27FC236}">
+                  <a16:creationId xmlns:a16="http://schemas.microsoft.com/office/drawing/2014/main" id="{8D06EACA-4D7E-BDBA-3EDC-E2D4523AC1EE}"/>
+                </a:ext>
+              </a:extLst>
+            </p:cNvPr>
+            <p:cNvSpPr/>
+            <p:nvPr/>
+          </p:nvSpPr>
+          <p:spPr>
+            <a:xfrm>
+              <a:off x="0" y="6537960"/>
+              <a:ext cx="12191695" cy="320040"/>
+            </a:xfrm>
+            <a:prstGeom prst="rect">
+              <a:avLst/>
+            </a:prstGeom>
+            <a:solidFill>
+              <a:srgbClr val="0D6EFD"/>
+            </a:solidFill>
+            <a:ln>
+              <a:noFill/>
+            </a:ln>
+          </p:spPr>
+          <p:style>
+            <a:lnRef idx="1">
+              <a:schemeClr val="accent1"/>
+            </a:lnRef>
+            <a:fillRef idx="3">
+              <a:schemeClr val="accent1"/>
+            </a:fillRef>
+            <a:effectRef idx="2">
+              <a:schemeClr val="accent1"/>
+            </a:effectRef>
+            <a:fontRef idx="minor">
+              <a:schemeClr val="lt1"/>
+            </a:fontRef>
+          </p:style>
+          <p:txBody>
+            <a:bodyPr rtlCol="0" anchor="ctr"/>
+            <a:lstStyle/>
+            <a:p>
+              <a:pPr>
+                <a:defRPr sz="1100">
+                  <a:solidFill>
+                    <a:srgbClr val="FFFFFF"/>
+                  </a:solidFill>
+                  <a:latin typeface="Segoe UI"/>
+                </a:defRPr>
+              </a:pPr>
+              <a:endParaRPr dirty="0"/>
+            </a:p>
+          </p:txBody>
+        </p:sp>
+        <p:pic>
+          <p:nvPicPr>
+            <p:cNvPr id="8" name="Picture 7">
+              <a:extLst>
+                <a:ext uri="{FF2B5EF4-FFF2-40B4-BE49-F238E27FC236}">
+                  <a16:creationId xmlns:a16="http://schemas.microsoft.com/office/drawing/2014/main" id="{88780933-582C-D27E-730B-54D5F9968E75}"/>
+                </a:ext>
+              </a:extLst>
+            </p:cNvPr>
+            <p:cNvPicPr>
+              <a:picLocks noChangeAspect="1"/>
+            </p:cNvPicPr>
+            <p:nvPr/>
+          </p:nvPicPr>
+          <p:blipFill>
+            <a:blip r:embed="rId24"/>
+            <a:stretch>
+              <a:fillRect/>
+            </a:stretch>
+          </p:blipFill>
+          <p:spPr>
+            <a:xfrm>
+              <a:off x="108584" y="6553264"/>
+              <a:ext cx="1158241" cy="274191"/>
+            </a:xfrm>
+            <a:prstGeom prst="rect">
+              <a:avLst/>
+            </a:prstGeom>
+          </p:spPr>
+        </p:pic>
       </p:grpSp>
     </p:spTree>
     <p:extLst>
@@ -13829,8 +14506,8 @@
         </p:nvSpPr>
         <p:spPr>
           <a:xfrm>
-            <a:off x="548640" y="411480"/>
-            <a:ext cx="11064240" cy="938719"/>
+            <a:off x="322633" y="411480"/>
+            <a:ext cx="11290247" cy="938719"/>
           </a:xfrm>
           <a:prstGeom prst="rect">
             <a:avLst/>
@@ -13891,7 +14568,7 @@
         <p:spPr>
           <a:xfrm>
             <a:off x="322633" y="1371485"/>
-            <a:ext cx="6554173" cy="5047536"/>
+            <a:ext cx="6554173" cy="4919295"/>
           </a:xfrm>
           <a:prstGeom prst="rect">
             <a:avLst/>
@@ -14041,20 +14718,6 @@
                 <a:latin typeface="Segoe UI"/>
               </a:defRPr>
             </a:pPr>
-            <a:endParaRPr lang="en-US" sz="1600" dirty="0"/>
-          </a:p>
-          <a:p>
-            <a:pPr>
-              <a:spcAft>
-                <a:spcPts val="1000"/>
-              </a:spcAft>
-              <a:defRPr sz="2000">
-                <a:solidFill>
-                  <a:srgbClr val="212529"/>
-                </a:solidFill>
-                <a:latin typeface="Segoe UI"/>
-              </a:defRPr>
-            </a:pPr>
             <a:r>
               <a:rPr lang="en-US" sz="1600" dirty="0"/>
               <a:t>The background </a:t>
@@ -14065,7 +14728,7 @@
             </a:r>
             <a:r>
               <a:rPr lang="en-US" sz="1600" dirty="0"/>
-              <a:t> of the cards shows the status of the session. </a:t>
+              <a:t> of the cards also shows the status of the session. </a:t>
             </a:r>
             <a:r>
               <a:rPr lang="en-US" sz="1600" b="1" dirty="0"/>
@@ -14081,69 +14744,9 @@
             </a:r>
             <a:r>
               <a:rPr lang="en-US" sz="1600" dirty="0"/>
-              <a:t> sessions.</a:t>
+              <a:t> sessions. Refer to the Legend to see the other references.</a:t>
             </a:r>
             <a:endParaRPr sz="1600" dirty="0"/>
-          </a:p>
-        </p:txBody>
-      </p:sp>
-      <p:sp>
-        <p:nvSpPr>
-          <p:cNvPr id="5" name="Rectangle 4">
-            <a:extLst>
-              <a:ext uri="{FF2B5EF4-FFF2-40B4-BE49-F238E27FC236}">
-                <a16:creationId xmlns:a16="http://schemas.microsoft.com/office/drawing/2014/main" id="{C16BB9F1-A7EF-643C-8E5B-39C523C38D3E}"/>
-              </a:ext>
-            </a:extLst>
-          </p:cNvPr>
-          <p:cNvSpPr/>
-          <p:nvPr/>
-        </p:nvSpPr>
-        <p:spPr>
-          <a:xfrm>
-            <a:off x="0" y="6537960"/>
-            <a:ext cx="12191695" cy="320040"/>
-          </a:xfrm>
-          <a:prstGeom prst="rect">
-            <a:avLst/>
-          </a:prstGeom>
-          <a:solidFill>
-            <a:srgbClr val="0D6EFD"/>
-          </a:solidFill>
-          <a:ln>
-            <a:noFill/>
-          </a:ln>
-        </p:spPr>
-        <p:style>
-          <a:lnRef idx="1">
-            <a:schemeClr val="accent1"/>
-          </a:lnRef>
-          <a:fillRef idx="3">
-            <a:schemeClr val="accent1"/>
-          </a:fillRef>
-          <a:effectRef idx="2">
-            <a:schemeClr val="accent1"/>
-          </a:effectRef>
-          <a:fontRef idx="minor">
-            <a:schemeClr val="lt1"/>
-          </a:fontRef>
-        </p:style>
-        <p:txBody>
-          <a:bodyPr rtlCol="0" anchor="ctr"/>
-          <a:lstStyle/>
-          <a:p>
-            <a:pPr>
-              <a:defRPr sz="1100">
-                <a:solidFill>
-                  <a:srgbClr val="FFFFFF"/>
-                </a:solidFill>
-                <a:latin typeface="Segoe UI"/>
-              </a:defRPr>
-            </a:pPr>
-            <a:r>
-              <a:rPr lang="en-US" dirty="0"/>
-              <a:t>MY SCHEDULE</a:t>
-            </a:r>
           </a:p>
         </p:txBody>
       </p:sp>
@@ -14169,82 +14772,96 @@
         </p:blipFill>
         <p:spPr>
           <a:xfrm>
-            <a:off x="6923824" y="1322800"/>
-            <a:ext cx="4778713" cy="5309681"/>
+            <a:off x="6876806" y="526796"/>
+            <a:ext cx="5208352" cy="5787058"/>
           </a:xfrm>
           <a:custGeom>
             <a:avLst/>
             <a:gdLst>
-              <a:gd name="csX0" fmla="*/ 0 w 4778713"/>
-              <a:gd name="csY0" fmla="*/ 0 h 5309681"/>
-              <a:gd name="csX1" fmla="*/ 645126 w 4778713"/>
-              <a:gd name="csY1" fmla="*/ 0 h 5309681"/>
-              <a:gd name="csX2" fmla="*/ 1338040 w 4778713"/>
-              <a:gd name="csY2" fmla="*/ 0 h 5309681"/>
-              <a:gd name="csX3" fmla="*/ 2030953 w 4778713"/>
-              <a:gd name="csY3" fmla="*/ 0 h 5309681"/>
-              <a:gd name="csX4" fmla="*/ 2628292 w 4778713"/>
-              <a:gd name="csY4" fmla="*/ 0 h 5309681"/>
-              <a:gd name="csX5" fmla="*/ 3273418 w 4778713"/>
-              <a:gd name="csY5" fmla="*/ 0 h 5309681"/>
-              <a:gd name="csX6" fmla="*/ 3775183 w 4778713"/>
-              <a:gd name="csY6" fmla="*/ 0 h 5309681"/>
-              <a:gd name="csX7" fmla="*/ 4778713 w 4778713"/>
-              <a:gd name="csY7" fmla="*/ 0 h 5309681"/>
-              <a:gd name="csX8" fmla="*/ 4778713 w 4778713"/>
-              <a:gd name="csY8" fmla="*/ 589965 h 5309681"/>
-              <a:gd name="csX9" fmla="*/ 4778713 w 4778713"/>
-              <a:gd name="csY9" fmla="*/ 1179929 h 5309681"/>
-              <a:gd name="csX10" fmla="*/ 4778713 w 4778713"/>
-              <a:gd name="csY10" fmla="*/ 1876087 h 5309681"/>
-              <a:gd name="csX11" fmla="*/ 4778713 w 4778713"/>
-              <a:gd name="csY11" fmla="*/ 2412955 h 5309681"/>
-              <a:gd name="csX12" fmla="*/ 4778713 w 4778713"/>
-              <a:gd name="csY12" fmla="*/ 2843629 h 5309681"/>
-              <a:gd name="csX13" fmla="*/ 4778713 w 4778713"/>
-              <a:gd name="csY13" fmla="*/ 3327400 h 5309681"/>
-              <a:gd name="csX14" fmla="*/ 4778713 w 4778713"/>
-              <a:gd name="csY14" fmla="*/ 3864268 h 5309681"/>
-              <a:gd name="csX15" fmla="*/ 4778713 w 4778713"/>
-              <a:gd name="csY15" fmla="*/ 4294942 h 5309681"/>
-              <a:gd name="csX16" fmla="*/ 4778713 w 4778713"/>
-              <a:gd name="csY16" fmla="*/ 5309681 h 5309681"/>
-              <a:gd name="csX17" fmla="*/ 4324735 w 4778713"/>
-              <a:gd name="csY17" fmla="*/ 5309681 h 5309681"/>
-              <a:gd name="csX18" fmla="*/ 3679609 w 4778713"/>
-              <a:gd name="csY18" fmla="*/ 5309681 h 5309681"/>
-              <a:gd name="csX19" fmla="*/ 3225631 w 4778713"/>
-              <a:gd name="csY19" fmla="*/ 5309681 h 5309681"/>
-              <a:gd name="csX20" fmla="*/ 2771654 w 4778713"/>
-              <a:gd name="csY20" fmla="*/ 5309681 h 5309681"/>
-              <a:gd name="csX21" fmla="*/ 2078740 w 4778713"/>
-              <a:gd name="csY21" fmla="*/ 5309681 h 5309681"/>
-              <a:gd name="csX22" fmla="*/ 1481401 w 4778713"/>
-              <a:gd name="csY22" fmla="*/ 5309681 h 5309681"/>
-              <a:gd name="csX23" fmla="*/ 979636 w 4778713"/>
-              <a:gd name="csY23" fmla="*/ 5309681 h 5309681"/>
-              <a:gd name="csX24" fmla="*/ 0 w 4778713"/>
-              <a:gd name="csY24" fmla="*/ 5309681 h 5309681"/>
-              <a:gd name="csX25" fmla="*/ 0 w 4778713"/>
-              <a:gd name="csY25" fmla="*/ 4879007 h 5309681"/>
-              <a:gd name="csX26" fmla="*/ 0 w 4778713"/>
-              <a:gd name="csY26" fmla="*/ 4182849 h 5309681"/>
-              <a:gd name="csX27" fmla="*/ 0 w 4778713"/>
-              <a:gd name="csY27" fmla="*/ 3699078 h 5309681"/>
-              <a:gd name="csX28" fmla="*/ 0 w 4778713"/>
-              <a:gd name="csY28" fmla="*/ 3268404 h 5309681"/>
-              <a:gd name="csX29" fmla="*/ 0 w 4778713"/>
-              <a:gd name="csY29" fmla="*/ 2837730 h 5309681"/>
-              <a:gd name="csX30" fmla="*/ 0 w 4778713"/>
-              <a:gd name="csY30" fmla="*/ 2353959 h 5309681"/>
-              <a:gd name="csX31" fmla="*/ 0 w 4778713"/>
-              <a:gd name="csY31" fmla="*/ 1817091 h 5309681"/>
-              <a:gd name="csX32" fmla="*/ 0 w 4778713"/>
-              <a:gd name="csY32" fmla="*/ 1333320 h 5309681"/>
-              <a:gd name="csX33" fmla="*/ 0 w 4778713"/>
-              <a:gd name="csY33" fmla="*/ 637162 h 5309681"/>
-              <a:gd name="csX34" fmla="*/ 0 w 4778713"/>
-              <a:gd name="csY34" fmla="*/ 0 h 5309681"/>
+              <a:gd name="csX0" fmla="*/ 0 w 5208352"/>
+              <a:gd name="csY0" fmla="*/ 0 h 5787058"/>
+              <a:gd name="csX1" fmla="*/ 422455 w 5208352"/>
+              <a:gd name="csY1" fmla="*/ 0 h 5787058"/>
+              <a:gd name="csX2" fmla="*/ 896994 w 5208352"/>
+              <a:gd name="csY2" fmla="*/ 0 h 5787058"/>
+              <a:gd name="csX3" fmla="*/ 1423616 w 5208352"/>
+              <a:gd name="csY3" fmla="*/ 0 h 5787058"/>
+              <a:gd name="csX4" fmla="*/ 2002322 w 5208352"/>
+              <a:gd name="csY4" fmla="*/ 0 h 5787058"/>
+              <a:gd name="csX5" fmla="*/ 2581028 w 5208352"/>
+              <a:gd name="csY5" fmla="*/ 0 h 5787058"/>
+              <a:gd name="csX6" fmla="*/ 3211817 w 5208352"/>
+              <a:gd name="csY6" fmla="*/ 0 h 5787058"/>
+              <a:gd name="csX7" fmla="*/ 3738439 w 5208352"/>
+              <a:gd name="csY7" fmla="*/ 0 h 5787058"/>
+              <a:gd name="csX8" fmla="*/ 4160895 w 5208352"/>
+              <a:gd name="csY8" fmla="*/ 0 h 5787058"/>
+              <a:gd name="csX9" fmla="*/ 4635433 w 5208352"/>
+              <a:gd name="csY9" fmla="*/ 0 h 5787058"/>
+              <a:gd name="csX10" fmla="*/ 5208352 w 5208352"/>
+              <a:gd name="csY10" fmla="*/ 0 h 5787058"/>
+              <a:gd name="csX11" fmla="*/ 5208352 w 5208352"/>
+              <a:gd name="csY11" fmla="*/ 405094 h 5787058"/>
+              <a:gd name="csX12" fmla="*/ 5208352 w 5208352"/>
+              <a:gd name="csY12" fmla="*/ 1099541 h 5787058"/>
+              <a:gd name="csX13" fmla="*/ 5208352 w 5208352"/>
+              <a:gd name="csY13" fmla="*/ 1504635 h 5787058"/>
+              <a:gd name="csX14" fmla="*/ 5208352 w 5208352"/>
+              <a:gd name="csY14" fmla="*/ 1909729 h 5787058"/>
+              <a:gd name="csX15" fmla="*/ 5208352 w 5208352"/>
+              <a:gd name="csY15" fmla="*/ 2430564 h 5787058"/>
+              <a:gd name="csX16" fmla="*/ 5208352 w 5208352"/>
+              <a:gd name="csY16" fmla="*/ 2951400 h 5787058"/>
+              <a:gd name="csX17" fmla="*/ 5208352 w 5208352"/>
+              <a:gd name="csY17" fmla="*/ 3414364 h 5787058"/>
+              <a:gd name="csX18" fmla="*/ 5208352 w 5208352"/>
+              <a:gd name="csY18" fmla="*/ 4050941 h 5787058"/>
+              <a:gd name="csX19" fmla="*/ 5208352 w 5208352"/>
+              <a:gd name="csY19" fmla="*/ 4629646 h 5787058"/>
+              <a:gd name="csX20" fmla="*/ 5208352 w 5208352"/>
+              <a:gd name="csY20" fmla="*/ 5092611 h 5787058"/>
+              <a:gd name="csX21" fmla="*/ 5208352 w 5208352"/>
+              <a:gd name="csY21" fmla="*/ 5787058 h 5787058"/>
+              <a:gd name="csX22" fmla="*/ 4525479 w 5208352"/>
+              <a:gd name="csY22" fmla="*/ 5787058 h 5787058"/>
+              <a:gd name="csX23" fmla="*/ 4103024 w 5208352"/>
+              <a:gd name="csY23" fmla="*/ 5787058 h 5787058"/>
+              <a:gd name="csX24" fmla="*/ 3472235 w 5208352"/>
+              <a:gd name="csY24" fmla="*/ 5787058 h 5787058"/>
+              <a:gd name="csX25" fmla="*/ 2997696 w 5208352"/>
+              <a:gd name="csY25" fmla="*/ 5787058 h 5787058"/>
+              <a:gd name="csX26" fmla="*/ 2418990 w 5208352"/>
+              <a:gd name="csY26" fmla="*/ 5787058 h 5787058"/>
+              <a:gd name="csX27" fmla="*/ 1736117 w 5208352"/>
+              <a:gd name="csY27" fmla="*/ 5787058 h 5787058"/>
+              <a:gd name="csX28" fmla="*/ 1313662 w 5208352"/>
+              <a:gd name="csY28" fmla="*/ 5787058 h 5787058"/>
+              <a:gd name="csX29" fmla="*/ 839123 w 5208352"/>
+              <a:gd name="csY29" fmla="*/ 5787058 h 5787058"/>
+              <a:gd name="csX30" fmla="*/ 0 w 5208352"/>
+              <a:gd name="csY30" fmla="*/ 5787058 h 5787058"/>
+              <a:gd name="csX31" fmla="*/ 0 w 5208352"/>
+              <a:gd name="csY31" fmla="*/ 5266223 h 5787058"/>
+              <a:gd name="csX32" fmla="*/ 0 w 5208352"/>
+              <a:gd name="csY32" fmla="*/ 4803258 h 5787058"/>
+              <a:gd name="csX33" fmla="*/ 0 w 5208352"/>
+              <a:gd name="csY33" fmla="*/ 4398164 h 5787058"/>
+              <a:gd name="csX34" fmla="*/ 0 w 5208352"/>
+              <a:gd name="csY34" fmla="*/ 3935199 h 5787058"/>
+              <a:gd name="csX35" fmla="*/ 0 w 5208352"/>
+              <a:gd name="csY35" fmla="*/ 3298623 h 5787058"/>
+              <a:gd name="csX36" fmla="*/ 0 w 5208352"/>
+              <a:gd name="csY36" fmla="*/ 2893529 h 5787058"/>
+              <a:gd name="csX37" fmla="*/ 0 w 5208352"/>
+              <a:gd name="csY37" fmla="*/ 2199082 h 5787058"/>
+              <a:gd name="csX38" fmla="*/ 0 w 5208352"/>
+              <a:gd name="csY38" fmla="*/ 1736117 h 5787058"/>
+              <a:gd name="csX39" fmla="*/ 0 w 5208352"/>
+              <a:gd name="csY39" fmla="*/ 1273153 h 5787058"/>
+              <a:gd name="csX40" fmla="*/ 0 w 5208352"/>
+              <a:gd name="csY40" fmla="*/ 636576 h 5787058"/>
+              <a:gd name="csX41" fmla="*/ 0 w 5208352"/>
+              <a:gd name="csY41" fmla="*/ 0 h 5787058"/>
             </a:gdLst>
             <a:ahLst/>
             <a:cxnLst>
@@ -14353,362 +14970,438 @@
               <a:cxn ang="0">
                 <a:pos x="csX34" y="csY34"/>
               </a:cxn>
+              <a:cxn ang="0">
+                <a:pos x="csX35" y="csY35"/>
+              </a:cxn>
+              <a:cxn ang="0">
+                <a:pos x="csX36" y="csY36"/>
+              </a:cxn>
+              <a:cxn ang="0">
+                <a:pos x="csX37" y="csY37"/>
+              </a:cxn>
+              <a:cxn ang="0">
+                <a:pos x="csX38" y="csY38"/>
+              </a:cxn>
+              <a:cxn ang="0">
+                <a:pos x="csX39" y="csY39"/>
+              </a:cxn>
+              <a:cxn ang="0">
+                <a:pos x="csX40" y="csY40"/>
+              </a:cxn>
+              <a:cxn ang="0">
+                <a:pos x="csX41" y="csY41"/>
+              </a:cxn>
             </a:cxnLst>
             <a:rect l="l" t="t" r="r" b="b"/>
             <a:pathLst>
-              <a:path w="4778713" h="5309681" fill="none" extrusionOk="0">
+              <a:path w="5208352" h="5787058" fill="none" extrusionOk="0">
                 <a:moveTo>
                   <a:pt x="0" y="0"/>
                 </a:moveTo>
                 <a:cubicBezTo>
-                  <a:pt x="312341" y="-52759"/>
-                  <a:pt x="375543" y="62422"/>
-                  <a:pt x="645126" y="0"/>
-                </a:cubicBezTo>
-                <a:cubicBezTo>
-                  <a:pt x="914709" y="-62422"/>
-                  <a:pt x="1033922" y="45113"/>
-                  <a:pt x="1338040" y="0"/>
-                </a:cubicBezTo>
-                <a:cubicBezTo>
-                  <a:pt x="1642158" y="-45113"/>
-                  <a:pt x="1864949" y="63983"/>
-                  <a:pt x="2030953" y="0"/>
-                </a:cubicBezTo>
-                <a:cubicBezTo>
-                  <a:pt x="2196957" y="-63983"/>
-                  <a:pt x="2494812" y="12970"/>
-                  <a:pt x="2628292" y="0"/>
-                </a:cubicBezTo>
-                <a:cubicBezTo>
-                  <a:pt x="2761772" y="-12970"/>
-                  <a:pt x="3013888" y="51936"/>
-                  <a:pt x="3273418" y="0"/>
-                </a:cubicBezTo>
-                <a:cubicBezTo>
-                  <a:pt x="3532948" y="-51936"/>
-                  <a:pt x="3542896" y="20947"/>
-                  <a:pt x="3775183" y="0"/>
-                </a:cubicBezTo>
-                <a:cubicBezTo>
-                  <a:pt x="4007470" y="-20947"/>
-                  <a:pt x="4479727" y="26902"/>
-                  <a:pt x="4778713" y="0"/>
-                </a:cubicBezTo>
-                <a:cubicBezTo>
-                  <a:pt x="4820215" y="205891"/>
-                  <a:pt x="4710619" y="300191"/>
-                  <a:pt x="4778713" y="589965"/>
-                </a:cubicBezTo>
-                <a:cubicBezTo>
-                  <a:pt x="4846807" y="879740"/>
-                  <a:pt x="4774381" y="1058884"/>
-                  <a:pt x="4778713" y="1179929"/>
-                </a:cubicBezTo>
-                <a:cubicBezTo>
-                  <a:pt x="4783045" y="1300974"/>
-                  <a:pt x="4719499" y="1545386"/>
-                  <a:pt x="4778713" y="1876087"/>
-                </a:cubicBezTo>
-                <a:cubicBezTo>
-                  <a:pt x="4837927" y="2206788"/>
-                  <a:pt x="4778522" y="2197191"/>
-                  <a:pt x="4778713" y="2412955"/>
-                </a:cubicBezTo>
-                <a:cubicBezTo>
-                  <a:pt x="4778904" y="2628719"/>
-                  <a:pt x="4762359" y="2727911"/>
-                  <a:pt x="4778713" y="2843629"/>
-                </a:cubicBezTo>
-                <a:cubicBezTo>
-                  <a:pt x="4795067" y="2959347"/>
-                  <a:pt x="4761716" y="3215284"/>
-                  <a:pt x="4778713" y="3327400"/>
-                </a:cubicBezTo>
-                <a:cubicBezTo>
-                  <a:pt x="4795710" y="3439516"/>
-                  <a:pt x="4734648" y="3653444"/>
-                  <a:pt x="4778713" y="3864268"/>
-                </a:cubicBezTo>
-                <a:cubicBezTo>
-                  <a:pt x="4822778" y="4075092"/>
-                  <a:pt x="4759443" y="4165549"/>
-                  <a:pt x="4778713" y="4294942"/>
-                </a:cubicBezTo>
-                <a:cubicBezTo>
-                  <a:pt x="4797983" y="4424335"/>
-                  <a:pt x="4727888" y="4849196"/>
-                  <a:pt x="4778713" y="5309681"/>
-                </a:cubicBezTo>
-                <a:cubicBezTo>
-                  <a:pt x="4579077" y="5356053"/>
-                  <a:pt x="4532975" y="5258057"/>
-                  <a:pt x="4324735" y="5309681"/>
-                </a:cubicBezTo>
-                <a:cubicBezTo>
-                  <a:pt x="4116495" y="5361305"/>
-                  <a:pt x="3841292" y="5262307"/>
-                  <a:pt x="3679609" y="5309681"/>
-                </a:cubicBezTo>
-                <a:cubicBezTo>
-                  <a:pt x="3517926" y="5357055"/>
-                  <a:pt x="3380060" y="5294819"/>
-                  <a:pt x="3225631" y="5309681"/>
-                </a:cubicBezTo>
-                <a:cubicBezTo>
-                  <a:pt x="3071202" y="5324543"/>
-                  <a:pt x="2933418" y="5272167"/>
-                  <a:pt x="2771654" y="5309681"/>
-                </a:cubicBezTo>
-                <a:cubicBezTo>
-                  <a:pt x="2609890" y="5347195"/>
-                  <a:pt x="2326345" y="5286691"/>
-                  <a:pt x="2078740" y="5309681"/>
-                </a:cubicBezTo>
-                <a:cubicBezTo>
-                  <a:pt x="1831135" y="5332671"/>
-                  <a:pt x="1649765" y="5288048"/>
-                  <a:pt x="1481401" y="5309681"/>
-                </a:cubicBezTo>
-                <a:cubicBezTo>
-                  <a:pt x="1313037" y="5331314"/>
-                  <a:pt x="1123191" y="5250974"/>
-                  <a:pt x="979636" y="5309681"/>
-                </a:cubicBezTo>
-                <a:cubicBezTo>
-                  <a:pt x="836082" y="5368388"/>
-                  <a:pt x="458717" y="5252515"/>
-                  <a:pt x="0" y="5309681"/>
-                </a:cubicBezTo>
-                <a:cubicBezTo>
-                  <a:pt x="-50623" y="5108120"/>
-                  <a:pt x="5473" y="5020467"/>
-                  <a:pt x="0" y="4879007"/>
-                </a:cubicBezTo>
-                <a:cubicBezTo>
-                  <a:pt x="-5473" y="4737547"/>
-                  <a:pt x="76686" y="4502784"/>
-                  <a:pt x="0" y="4182849"/>
-                </a:cubicBezTo>
-                <a:cubicBezTo>
-                  <a:pt x="-76686" y="3862914"/>
-                  <a:pt x="51398" y="3940920"/>
-                  <a:pt x="0" y="3699078"/>
-                </a:cubicBezTo>
-                <a:cubicBezTo>
-                  <a:pt x="-51398" y="3457236"/>
-                  <a:pt x="50693" y="3434532"/>
-                  <a:pt x="0" y="3268404"/>
-                </a:cubicBezTo>
-                <a:cubicBezTo>
-                  <a:pt x="-50693" y="3102276"/>
-                  <a:pt x="17672" y="3024317"/>
-                  <a:pt x="0" y="2837730"/>
-                </a:cubicBezTo>
-                <a:cubicBezTo>
-                  <a:pt x="-17672" y="2651143"/>
-                  <a:pt x="27635" y="2467607"/>
-                  <a:pt x="0" y="2353959"/>
-                </a:cubicBezTo>
-                <a:cubicBezTo>
-                  <a:pt x="-27635" y="2240311"/>
-                  <a:pt x="6728" y="1983470"/>
-                  <a:pt x="0" y="1817091"/>
-                </a:cubicBezTo>
-                <a:cubicBezTo>
-                  <a:pt x="-6728" y="1650712"/>
-                  <a:pt x="661" y="1492506"/>
-                  <a:pt x="0" y="1333320"/>
-                </a:cubicBezTo>
-                <a:cubicBezTo>
-                  <a:pt x="-661" y="1174134"/>
-                  <a:pt x="60983" y="820867"/>
-                  <a:pt x="0" y="637162"/>
-                </a:cubicBezTo>
-                <a:cubicBezTo>
-                  <a:pt x="-60983" y="453457"/>
-                  <a:pt x="71885" y="303719"/>
+                  <a:pt x="156852" y="-47217"/>
+                  <a:pt x="284759" y="29593"/>
+                  <a:pt x="422455" y="0"/>
+                </a:cubicBezTo>
+                <a:cubicBezTo>
+                  <a:pt x="560152" y="-29593"/>
+                  <a:pt x="775005" y="5976"/>
+                  <a:pt x="896994" y="0"/>
+                </a:cubicBezTo>
+                <a:cubicBezTo>
+                  <a:pt x="1018983" y="-5976"/>
+                  <a:pt x="1193246" y="57282"/>
+                  <a:pt x="1423616" y="0"/>
+                </a:cubicBezTo>
+                <a:cubicBezTo>
+                  <a:pt x="1653986" y="-57282"/>
+                  <a:pt x="1756509" y="58812"/>
+                  <a:pt x="2002322" y="0"/>
+                </a:cubicBezTo>
+                <a:cubicBezTo>
+                  <a:pt x="2248135" y="-58812"/>
+                  <a:pt x="2457753" y="17295"/>
+                  <a:pt x="2581028" y="0"/>
+                </a:cubicBezTo>
+                <a:cubicBezTo>
+                  <a:pt x="2704303" y="-17295"/>
+                  <a:pt x="2950102" y="73415"/>
+                  <a:pt x="3211817" y="0"/>
+                </a:cubicBezTo>
+                <a:cubicBezTo>
+                  <a:pt x="3473532" y="-73415"/>
+                  <a:pt x="3602344" y="31734"/>
+                  <a:pt x="3738439" y="0"/>
+                </a:cubicBezTo>
+                <a:cubicBezTo>
+                  <a:pt x="3874534" y="-31734"/>
+                  <a:pt x="4012234" y="7256"/>
+                  <a:pt x="4160895" y="0"/>
+                </a:cubicBezTo>
+                <a:cubicBezTo>
+                  <a:pt x="4309556" y="-7256"/>
+                  <a:pt x="4409271" y="51219"/>
+                  <a:pt x="4635433" y="0"/>
+                </a:cubicBezTo>
+                <a:cubicBezTo>
+                  <a:pt x="4861595" y="-51219"/>
+                  <a:pt x="4960734" y="3071"/>
+                  <a:pt x="5208352" y="0"/>
+                </a:cubicBezTo>
+                <a:cubicBezTo>
+                  <a:pt x="5219752" y="100379"/>
+                  <a:pt x="5199948" y="309476"/>
+                  <a:pt x="5208352" y="405094"/>
+                </a:cubicBezTo>
+                <a:cubicBezTo>
+                  <a:pt x="5216756" y="500712"/>
+                  <a:pt x="5162169" y="919536"/>
+                  <a:pt x="5208352" y="1099541"/>
+                </a:cubicBezTo>
+                <a:cubicBezTo>
+                  <a:pt x="5254535" y="1279546"/>
+                  <a:pt x="5160546" y="1422900"/>
+                  <a:pt x="5208352" y="1504635"/>
+                </a:cubicBezTo>
+                <a:cubicBezTo>
+                  <a:pt x="5256158" y="1586370"/>
+                  <a:pt x="5188063" y="1787326"/>
+                  <a:pt x="5208352" y="1909729"/>
+                </a:cubicBezTo>
+                <a:cubicBezTo>
+                  <a:pt x="5228641" y="2032132"/>
+                  <a:pt x="5156622" y="2190389"/>
+                  <a:pt x="5208352" y="2430564"/>
+                </a:cubicBezTo>
+                <a:cubicBezTo>
+                  <a:pt x="5260082" y="2670739"/>
+                  <a:pt x="5206067" y="2743228"/>
+                  <a:pt x="5208352" y="2951400"/>
+                </a:cubicBezTo>
+                <a:cubicBezTo>
+                  <a:pt x="5210637" y="3159572"/>
+                  <a:pt x="5177564" y="3273604"/>
+                  <a:pt x="5208352" y="3414364"/>
+                </a:cubicBezTo>
+                <a:cubicBezTo>
+                  <a:pt x="5239140" y="3555124"/>
+                  <a:pt x="5161247" y="3781248"/>
+                  <a:pt x="5208352" y="4050941"/>
+                </a:cubicBezTo>
+                <a:cubicBezTo>
+                  <a:pt x="5255457" y="4320634"/>
+                  <a:pt x="5206193" y="4457953"/>
+                  <a:pt x="5208352" y="4629646"/>
+                </a:cubicBezTo>
+                <a:cubicBezTo>
+                  <a:pt x="5210511" y="4801339"/>
+                  <a:pt x="5179411" y="4940804"/>
+                  <a:pt x="5208352" y="5092611"/>
+                </a:cubicBezTo>
+                <a:cubicBezTo>
+                  <a:pt x="5237293" y="5244418"/>
+                  <a:pt x="5151921" y="5605892"/>
+                  <a:pt x="5208352" y="5787058"/>
+                </a:cubicBezTo>
+                <a:cubicBezTo>
+                  <a:pt x="4935602" y="5821467"/>
+                  <a:pt x="4669992" y="5763153"/>
+                  <a:pt x="4525479" y="5787058"/>
+                </a:cubicBezTo>
+                <a:cubicBezTo>
+                  <a:pt x="4380966" y="5810963"/>
+                  <a:pt x="4203881" y="5774948"/>
+                  <a:pt x="4103024" y="5787058"/>
+                </a:cubicBezTo>
+                <a:cubicBezTo>
+                  <a:pt x="4002168" y="5799168"/>
+                  <a:pt x="3681137" y="5727586"/>
+                  <a:pt x="3472235" y="5787058"/>
+                </a:cubicBezTo>
+                <a:cubicBezTo>
+                  <a:pt x="3263333" y="5846530"/>
+                  <a:pt x="3196461" y="5748154"/>
+                  <a:pt x="2997696" y="5787058"/>
+                </a:cubicBezTo>
+                <a:cubicBezTo>
+                  <a:pt x="2798931" y="5825962"/>
+                  <a:pt x="2636005" y="5775001"/>
+                  <a:pt x="2418990" y="5787058"/>
+                </a:cubicBezTo>
+                <a:cubicBezTo>
+                  <a:pt x="2201975" y="5799115"/>
+                  <a:pt x="2003810" y="5721078"/>
+                  <a:pt x="1736117" y="5787058"/>
+                </a:cubicBezTo>
+                <a:cubicBezTo>
+                  <a:pt x="1468424" y="5853038"/>
+                  <a:pt x="1473614" y="5756629"/>
+                  <a:pt x="1313662" y="5787058"/>
+                </a:cubicBezTo>
+                <a:cubicBezTo>
+                  <a:pt x="1153711" y="5817487"/>
+                  <a:pt x="950024" y="5777670"/>
+                  <a:pt x="839123" y="5787058"/>
+                </a:cubicBezTo>
+                <a:cubicBezTo>
+                  <a:pt x="728222" y="5796446"/>
+                  <a:pt x="328788" y="5706453"/>
+                  <a:pt x="0" y="5787058"/>
+                </a:cubicBezTo>
+                <a:cubicBezTo>
+                  <a:pt x="-13650" y="5552431"/>
+                  <a:pt x="3744" y="5410658"/>
+                  <a:pt x="0" y="5266223"/>
+                </a:cubicBezTo>
+                <a:cubicBezTo>
+                  <a:pt x="-3744" y="5121788"/>
+                  <a:pt x="3222" y="4953750"/>
+                  <a:pt x="0" y="4803258"/>
+                </a:cubicBezTo>
+                <a:cubicBezTo>
+                  <a:pt x="-3222" y="4652767"/>
+                  <a:pt x="26411" y="4597884"/>
+                  <a:pt x="0" y="4398164"/>
+                </a:cubicBezTo>
+                <a:cubicBezTo>
+                  <a:pt x="-26411" y="4198444"/>
+                  <a:pt x="7861" y="4111140"/>
+                  <a:pt x="0" y="3935199"/>
+                </a:cubicBezTo>
+                <a:cubicBezTo>
+                  <a:pt x="-7861" y="3759259"/>
+                  <a:pt x="6094" y="3439739"/>
+                  <a:pt x="0" y="3298623"/>
+                </a:cubicBezTo>
+                <a:cubicBezTo>
+                  <a:pt x="-6094" y="3157507"/>
+                  <a:pt x="40258" y="3082539"/>
+                  <a:pt x="0" y="2893529"/>
+                </a:cubicBezTo>
+                <a:cubicBezTo>
+                  <a:pt x="-40258" y="2704519"/>
+                  <a:pt x="35822" y="2382780"/>
+                  <a:pt x="0" y="2199082"/>
+                </a:cubicBezTo>
+                <a:cubicBezTo>
+                  <a:pt x="-35822" y="2015384"/>
+                  <a:pt x="27435" y="1894397"/>
+                  <a:pt x="0" y="1736117"/>
+                </a:cubicBezTo>
+                <a:cubicBezTo>
+                  <a:pt x="-27435" y="1577837"/>
+                  <a:pt x="10935" y="1471795"/>
+                  <a:pt x="0" y="1273153"/>
+                </a:cubicBezTo>
+                <a:cubicBezTo>
+                  <a:pt x="-10935" y="1074511"/>
+                  <a:pt x="25112" y="940277"/>
+                  <a:pt x="0" y="636576"/>
+                </a:cubicBezTo>
+                <a:cubicBezTo>
+                  <a:pt x="-25112" y="332875"/>
+                  <a:pt x="6389" y="221998"/>
                   <a:pt x="0" y="0"/>
                 </a:cubicBezTo>
                 <a:close/>
               </a:path>
-              <a:path w="4778713" h="5309681" stroke="0" extrusionOk="0">
+              <a:path w="5208352" h="5787058" stroke="0" extrusionOk="0">
                 <a:moveTo>
                   <a:pt x="0" y="0"/>
                 </a:moveTo>
                 <a:cubicBezTo>
-                  <a:pt x="194959" y="-14426"/>
-                  <a:pt x="290047" y="32103"/>
-                  <a:pt x="501765" y="0"/>
-                </a:cubicBezTo>
-                <a:cubicBezTo>
-                  <a:pt x="713484" y="-32103"/>
-                  <a:pt x="907513" y="5070"/>
-                  <a:pt x="1146891" y="0"/>
-                </a:cubicBezTo>
-                <a:cubicBezTo>
-                  <a:pt x="1386269" y="-5070"/>
-                  <a:pt x="1376080" y="36722"/>
-                  <a:pt x="1600869" y="0"/>
-                </a:cubicBezTo>
-                <a:cubicBezTo>
-                  <a:pt x="1825658" y="-36722"/>
-                  <a:pt x="1945987" y="23512"/>
-                  <a:pt x="2245995" y="0"/>
-                </a:cubicBezTo>
-                <a:cubicBezTo>
-                  <a:pt x="2546003" y="-23512"/>
-                  <a:pt x="2538687" y="19477"/>
-                  <a:pt x="2747760" y="0"/>
-                </a:cubicBezTo>
-                <a:cubicBezTo>
-                  <a:pt x="2956834" y="-19477"/>
-                  <a:pt x="3084814" y="26908"/>
-                  <a:pt x="3297312" y="0"/>
-                </a:cubicBezTo>
-                <a:cubicBezTo>
-                  <a:pt x="3509810" y="-26908"/>
-                  <a:pt x="3666069" y="3707"/>
-                  <a:pt x="3799077" y="0"/>
-                </a:cubicBezTo>
-                <a:cubicBezTo>
-                  <a:pt x="3932085" y="-3707"/>
-                  <a:pt x="4043393" y="15381"/>
-                  <a:pt x="4253055" y="0"/>
-                </a:cubicBezTo>
-                <a:cubicBezTo>
-                  <a:pt x="4462717" y="-15381"/>
-                  <a:pt x="4578672" y="30325"/>
-                  <a:pt x="4778713" y="0"/>
-                </a:cubicBezTo>
-                <a:cubicBezTo>
-                  <a:pt x="4817348" y="104109"/>
-                  <a:pt x="4755423" y="277337"/>
-                  <a:pt x="4778713" y="483771"/>
-                </a:cubicBezTo>
-                <a:cubicBezTo>
-                  <a:pt x="4802003" y="690205"/>
-                  <a:pt x="4770538" y="837779"/>
-                  <a:pt x="4778713" y="967542"/>
-                </a:cubicBezTo>
-                <a:cubicBezTo>
-                  <a:pt x="4786888" y="1097305"/>
-                  <a:pt x="4702147" y="1371293"/>
-                  <a:pt x="4778713" y="1663700"/>
-                </a:cubicBezTo>
-                <a:cubicBezTo>
-                  <a:pt x="4855279" y="1956107"/>
-                  <a:pt x="4754195" y="2089136"/>
-                  <a:pt x="4778713" y="2306761"/>
-                </a:cubicBezTo>
-                <a:cubicBezTo>
-                  <a:pt x="4803231" y="2524386"/>
-                  <a:pt x="4727212" y="2556269"/>
-                  <a:pt x="4778713" y="2790532"/>
-                </a:cubicBezTo>
-                <a:cubicBezTo>
-                  <a:pt x="4830214" y="3024795"/>
-                  <a:pt x="4749115" y="3164330"/>
-                  <a:pt x="4778713" y="3327400"/>
-                </a:cubicBezTo>
-                <a:cubicBezTo>
-                  <a:pt x="4808311" y="3490470"/>
-                  <a:pt x="4761591" y="3646134"/>
-                  <a:pt x="4778713" y="3811171"/>
-                </a:cubicBezTo>
-                <a:cubicBezTo>
-                  <a:pt x="4795835" y="3976208"/>
-                  <a:pt x="4737672" y="4237194"/>
-                  <a:pt x="4778713" y="4454232"/>
-                </a:cubicBezTo>
-                <a:cubicBezTo>
-                  <a:pt x="4819754" y="4671270"/>
-                  <a:pt x="4775585" y="5024788"/>
-                  <a:pt x="4778713" y="5309681"/>
-                </a:cubicBezTo>
-                <a:cubicBezTo>
-                  <a:pt x="4573614" y="5345933"/>
-                  <a:pt x="4416447" y="5268645"/>
-                  <a:pt x="4324735" y="5309681"/>
-                </a:cubicBezTo>
-                <a:cubicBezTo>
-                  <a:pt x="4233023" y="5350717"/>
-                  <a:pt x="4018164" y="5266031"/>
-                  <a:pt x="3870758" y="5309681"/>
-                </a:cubicBezTo>
-                <a:cubicBezTo>
-                  <a:pt x="3723352" y="5353331"/>
-                  <a:pt x="3534628" y="5258398"/>
-                  <a:pt x="3225631" y="5309681"/>
-                </a:cubicBezTo>
-                <a:cubicBezTo>
-                  <a:pt x="2916634" y="5360964"/>
-                  <a:pt x="2796692" y="5256797"/>
-                  <a:pt x="2580505" y="5309681"/>
-                </a:cubicBezTo>
-                <a:cubicBezTo>
-                  <a:pt x="2364318" y="5362565"/>
-                  <a:pt x="2252286" y="5268366"/>
-                  <a:pt x="2078740" y="5309681"/>
-                </a:cubicBezTo>
-                <a:cubicBezTo>
-                  <a:pt x="1905195" y="5350996"/>
-                  <a:pt x="1844628" y="5258524"/>
-                  <a:pt x="1624762" y="5309681"/>
-                </a:cubicBezTo>
-                <a:cubicBezTo>
-                  <a:pt x="1404896" y="5360838"/>
-                  <a:pt x="1250386" y="5294829"/>
-                  <a:pt x="1027423" y="5309681"/>
-                </a:cubicBezTo>
-                <a:cubicBezTo>
-                  <a:pt x="804460" y="5324533"/>
-                  <a:pt x="386321" y="5266135"/>
-                  <a:pt x="0" y="5309681"/>
-                </a:cubicBezTo>
-                <a:cubicBezTo>
-                  <a:pt x="-17020" y="5046958"/>
-                  <a:pt x="2301" y="4934568"/>
-                  <a:pt x="0" y="4613523"/>
-                </a:cubicBezTo>
-                <a:cubicBezTo>
-                  <a:pt x="-2301" y="4292478"/>
-                  <a:pt x="51224" y="4269772"/>
-                  <a:pt x="0" y="4076655"/>
-                </a:cubicBezTo>
-                <a:cubicBezTo>
-                  <a:pt x="-51224" y="3883538"/>
-                  <a:pt x="64211" y="3567260"/>
-                  <a:pt x="0" y="3433594"/>
-                </a:cubicBezTo>
-                <a:cubicBezTo>
-                  <a:pt x="-64211" y="3299928"/>
-                  <a:pt x="15454" y="3000772"/>
-                  <a:pt x="0" y="2790532"/>
-                </a:cubicBezTo>
-                <a:cubicBezTo>
-                  <a:pt x="-15454" y="2580292"/>
-                  <a:pt x="50689" y="2486019"/>
-                  <a:pt x="0" y="2306761"/>
-                </a:cubicBezTo>
-                <a:cubicBezTo>
-                  <a:pt x="-50689" y="2127503"/>
-                  <a:pt x="11110" y="2014024"/>
-                  <a:pt x="0" y="1769894"/>
-                </a:cubicBezTo>
-                <a:cubicBezTo>
-                  <a:pt x="-11110" y="1525764"/>
-                  <a:pt x="18095" y="1329290"/>
-                  <a:pt x="0" y="1179929"/>
-                </a:cubicBezTo>
-                <a:cubicBezTo>
-                  <a:pt x="-18095" y="1030568"/>
-                  <a:pt x="24641" y="929055"/>
-                  <a:pt x="0" y="696158"/>
-                </a:cubicBezTo>
-                <a:cubicBezTo>
-                  <a:pt x="-24641" y="463261"/>
-                  <a:pt x="63974" y="185274"/>
+                  <a:pt x="118865" y="-26495"/>
+                  <a:pt x="350864" y="56420"/>
+                  <a:pt x="474539" y="0"/>
+                </a:cubicBezTo>
+                <a:cubicBezTo>
+                  <a:pt x="598214" y="-56420"/>
+                  <a:pt x="818285" y="55398"/>
+                  <a:pt x="1105328" y="0"/>
+                </a:cubicBezTo>
+                <a:cubicBezTo>
+                  <a:pt x="1392371" y="-55398"/>
+                  <a:pt x="1345830" y="39352"/>
+                  <a:pt x="1527783" y="0"/>
+                </a:cubicBezTo>
+                <a:cubicBezTo>
+                  <a:pt x="1709737" y="-39352"/>
+                  <a:pt x="1877387" y="64593"/>
+                  <a:pt x="2158573" y="0"/>
+                </a:cubicBezTo>
+                <a:cubicBezTo>
+                  <a:pt x="2439759" y="-64593"/>
+                  <a:pt x="2405953" y="36722"/>
+                  <a:pt x="2633111" y="0"/>
+                </a:cubicBezTo>
+                <a:cubicBezTo>
+                  <a:pt x="2860269" y="-36722"/>
+                  <a:pt x="3011305" y="38066"/>
+                  <a:pt x="3159734" y="0"/>
+                </a:cubicBezTo>
+                <a:cubicBezTo>
+                  <a:pt x="3308163" y="-38066"/>
+                  <a:pt x="3515466" y="3471"/>
+                  <a:pt x="3634272" y="0"/>
+                </a:cubicBezTo>
+                <a:cubicBezTo>
+                  <a:pt x="3753078" y="-3471"/>
+                  <a:pt x="3929420" y="1453"/>
+                  <a:pt x="4056728" y="0"/>
+                </a:cubicBezTo>
+                <a:cubicBezTo>
+                  <a:pt x="4184036" y="-1453"/>
+                  <a:pt x="4537630" y="72046"/>
+                  <a:pt x="4687517" y="0"/>
+                </a:cubicBezTo>
+                <a:cubicBezTo>
+                  <a:pt x="4837404" y="-72046"/>
+                  <a:pt x="4993292" y="43489"/>
+                  <a:pt x="5208352" y="0"/>
+                </a:cubicBezTo>
+                <a:cubicBezTo>
+                  <a:pt x="5269490" y="152497"/>
+                  <a:pt x="5149728" y="369698"/>
+                  <a:pt x="5208352" y="578706"/>
+                </a:cubicBezTo>
+                <a:cubicBezTo>
+                  <a:pt x="5266976" y="787714"/>
+                  <a:pt x="5193052" y="1007090"/>
+                  <a:pt x="5208352" y="1273153"/>
+                </a:cubicBezTo>
+                <a:cubicBezTo>
+                  <a:pt x="5223652" y="1539216"/>
+                  <a:pt x="5197767" y="1723170"/>
+                  <a:pt x="5208352" y="1909729"/>
+                </a:cubicBezTo>
+                <a:cubicBezTo>
+                  <a:pt x="5218937" y="2096288"/>
+                  <a:pt x="5190554" y="2235080"/>
+                  <a:pt x="5208352" y="2372694"/>
+                </a:cubicBezTo>
+                <a:cubicBezTo>
+                  <a:pt x="5226150" y="2510308"/>
+                  <a:pt x="5148160" y="2641150"/>
+                  <a:pt x="5208352" y="2893529"/>
+                </a:cubicBezTo>
+                <a:cubicBezTo>
+                  <a:pt x="5268544" y="3145908"/>
+                  <a:pt x="5204072" y="3258719"/>
+                  <a:pt x="5208352" y="3356494"/>
+                </a:cubicBezTo>
+                <a:cubicBezTo>
+                  <a:pt x="5212632" y="3454269"/>
+                  <a:pt x="5150995" y="3734465"/>
+                  <a:pt x="5208352" y="3993070"/>
+                </a:cubicBezTo>
+                <a:cubicBezTo>
+                  <a:pt x="5265709" y="4251675"/>
+                  <a:pt x="5157414" y="4284478"/>
+                  <a:pt x="5208352" y="4456035"/>
+                </a:cubicBezTo>
+                <a:cubicBezTo>
+                  <a:pt x="5259290" y="4627593"/>
+                  <a:pt x="5160123" y="4760250"/>
+                  <a:pt x="5208352" y="4861129"/>
+                </a:cubicBezTo>
+                <a:cubicBezTo>
+                  <a:pt x="5256581" y="4962008"/>
+                  <a:pt x="5161522" y="5517751"/>
+                  <a:pt x="5208352" y="5787058"/>
+                </a:cubicBezTo>
+                <a:cubicBezTo>
+                  <a:pt x="5011824" y="5801153"/>
+                  <a:pt x="4708816" y="5763909"/>
+                  <a:pt x="4577563" y="5787058"/>
+                </a:cubicBezTo>
+                <a:cubicBezTo>
+                  <a:pt x="4446310" y="5810207"/>
+                  <a:pt x="4135248" y="5756865"/>
+                  <a:pt x="3946773" y="5787058"/>
+                </a:cubicBezTo>
+                <a:cubicBezTo>
+                  <a:pt x="3758298" y="5817251"/>
+                  <a:pt x="3615401" y="5770110"/>
+                  <a:pt x="3472235" y="5787058"/>
+                </a:cubicBezTo>
+                <a:cubicBezTo>
+                  <a:pt x="3329069" y="5804006"/>
+                  <a:pt x="3218984" y="5768091"/>
+                  <a:pt x="3049779" y="5787058"/>
+                </a:cubicBezTo>
+                <a:cubicBezTo>
+                  <a:pt x="2880574" y="5806025"/>
+                  <a:pt x="2736903" y="5738034"/>
+                  <a:pt x="2471074" y="5787058"/>
+                </a:cubicBezTo>
+                <a:cubicBezTo>
+                  <a:pt x="2205245" y="5836082"/>
+                  <a:pt x="2104610" y="5715755"/>
+                  <a:pt x="1840284" y="5787058"/>
+                </a:cubicBezTo>
+                <a:cubicBezTo>
+                  <a:pt x="1575958" y="5858361"/>
+                  <a:pt x="1465879" y="5731445"/>
+                  <a:pt x="1157412" y="5787058"/>
+                </a:cubicBezTo>
+                <a:cubicBezTo>
+                  <a:pt x="848945" y="5842671"/>
+                  <a:pt x="885356" y="5779349"/>
+                  <a:pt x="682873" y="5787058"/>
+                </a:cubicBezTo>
+                <a:cubicBezTo>
+                  <a:pt x="480390" y="5794767"/>
+                  <a:pt x="340207" y="5736972"/>
+                  <a:pt x="0" y="5787058"/>
+                </a:cubicBezTo>
+                <a:cubicBezTo>
+                  <a:pt x="-50126" y="5633476"/>
+                  <a:pt x="32825" y="5346934"/>
+                  <a:pt x="0" y="5092611"/>
+                </a:cubicBezTo>
+                <a:cubicBezTo>
+                  <a:pt x="-32825" y="4838288"/>
+                  <a:pt x="9429" y="4777386"/>
+                  <a:pt x="0" y="4629646"/>
+                </a:cubicBezTo>
+                <a:cubicBezTo>
+                  <a:pt x="-9429" y="4481906"/>
+                  <a:pt x="52539" y="4248158"/>
+                  <a:pt x="0" y="4108811"/>
+                </a:cubicBezTo>
+                <a:cubicBezTo>
+                  <a:pt x="-52539" y="3969465"/>
+                  <a:pt x="55898" y="3729142"/>
+                  <a:pt x="0" y="3530105"/>
+                </a:cubicBezTo>
+                <a:cubicBezTo>
+                  <a:pt x="-55898" y="3331068"/>
+                  <a:pt x="725" y="3169582"/>
+                  <a:pt x="0" y="3067141"/>
+                </a:cubicBezTo>
+                <a:cubicBezTo>
+                  <a:pt x="-725" y="2964700"/>
+                  <a:pt x="23498" y="2644231"/>
+                  <a:pt x="0" y="2372694"/>
+                </a:cubicBezTo>
+                <a:cubicBezTo>
+                  <a:pt x="-23498" y="2101157"/>
+                  <a:pt x="43376" y="1942830"/>
+                  <a:pt x="0" y="1736117"/>
+                </a:cubicBezTo>
+                <a:cubicBezTo>
+                  <a:pt x="-43376" y="1529404"/>
+                  <a:pt x="12219" y="1447920"/>
+                  <a:pt x="0" y="1273153"/>
+                </a:cubicBezTo>
+                <a:cubicBezTo>
+                  <a:pt x="-12219" y="1098386"/>
+                  <a:pt x="3737" y="854687"/>
+                  <a:pt x="0" y="636576"/>
+                </a:cubicBezTo>
+                <a:cubicBezTo>
+                  <a:pt x="-3737" y="418465"/>
+                  <a:pt x="62429" y="232493"/>
                   <a:pt x="0" y="0"/>
                 </a:cubicBezTo>
                 <a:close/>
@@ -14748,8 +15441,8 @@
         </p:nvSpPr>
         <p:spPr>
           <a:xfrm>
-            <a:off x="6995259" y="1755129"/>
-            <a:ext cx="4707278" cy="1196792"/>
+            <a:off x="6912523" y="1032635"/>
+            <a:ext cx="5136917" cy="1196792"/>
           </a:xfrm>
           <a:prstGeom prst="rect">
             <a:avLst/>
@@ -14798,7 +15491,7 @@
         </p:nvSpPr>
         <p:spPr>
           <a:xfrm>
-            <a:off x="8821185" y="1417968"/>
+            <a:off x="9072282" y="652887"/>
             <a:ext cx="382621" cy="311284"/>
           </a:xfrm>
           <a:prstGeom prst="star8">
@@ -14855,8 +15548,8 @@
         </p:nvSpPr>
         <p:spPr>
           <a:xfrm>
-            <a:off x="10661515" y="3104321"/>
-            <a:ext cx="1041022" cy="320040"/>
+            <a:off x="10936941" y="2478305"/>
+            <a:ext cx="1112499" cy="320040"/>
           </a:xfrm>
           <a:prstGeom prst="rect">
             <a:avLst/>
@@ -14905,7 +15598,7 @@
         </p:nvSpPr>
         <p:spPr>
           <a:xfrm>
-            <a:off x="11749555" y="3069625"/>
+            <a:off x="10480701" y="2501536"/>
             <a:ext cx="382621" cy="311284"/>
           </a:xfrm>
           <a:prstGeom prst="star8">
@@ -14962,8 +15655,8 @@
         </p:nvSpPr>
         <p:spPr>
           <a:xfrm>
-            <a:off x="6923824" y="3181637"/>
-            <a:ext cx="1986712" cy="411112"/>
+            <a:off x="6876806" y="2507349"/>
+            <a:ext cx="2195476" cy="451261"/>
           </a:xfrm>
           <a:prstGeom prst="rect">
             <a:avLst/>
@@ -15012,7 +15705,7 @@
         </p:nvSpPr>
         <p:spPr>
           <a:xfrm>
-            <a:off x="8957554" y="3197626"/>
+            <a:off x="9145901" y="2558739"/>
             <a:ext cx="382621" cy="311284"/>
           </a:xfrm>
           <a:prstGeom prst="star8">
@@ -15055,6 +15748,114 @@
           </a:p>
         </p:txBody>
       </p:sp>
+      <p:grpSp>
+        <p:nvGrpSpPr>
+          <p:cNvPr id="4" name="Group 3">
+            <a:extLst>
+              <a:ext uri="{FF2B5EF4-FFF2-40B4-BE49-F238E27FC236}">
+                <a16:creationId xmlns:a16="http://schemas.microsoft.com/office/drawing/2014/main" id="{0116ADC6-1ADB-2881-6BBB-0235BF79D638}"/>
+              </a:ext>
+            </a:extLst>
+          </p:cNvPr>
+          <p:cNvGrpSpPr/>
+          <p:nvPr/>
+        </p:nvGrpSpPr>
+        <p:grpSpPr>
+          <a:xfrm>
+            <a:off x="0" y="6537960"/>
+            <a:ext cx="12191695" cy="320040"/>
+            <a:chOff x="0" y="6537960"/>
+            <a:chExt cx="12191695" cy="320040"/>
+          </a:xfrm>
+        </p:grpSpPr>
+        <p:sp>
+          <p:nvSpPr>
+            <p:cNvPr id="6" name="Rectangle 5">
+              <a:extLst>
+                <a:ext uri="{FF2B5EF4-FFF2-40B4-BE49-F238E27FC236}">
+                  <a16:creationId xmlns:a16="http://schemas.microsoft.com/office/drawing/2014/main" id="{5241B88E-9CC0-02C8-575E-28FF04E24FAA}"/>
+                </a:ext>
+              </a:extLst>
+            </p:cNvPr>
+            <p:cNvSpPr/>
+            <p:nvPr/>
+          </p:nvSpPr>
+          <p:spPr>
+            <a:xfrm>
+              <a:off x="0" y="6537960"/>
+              <a:ext cx="12191695" cy="320040"/>
+            </a:xfrm>
+            <a:prstGeom prst="rect">
+              <a:avLst/>
+            </a:prstGeom>
+            <a:solidFill>
+              <a:srgbClr val="0D6EFD"/>
+            </a:solidFill>
+            <a:ln>
+              <a:noFill/>
+            </a:ln>
+          </p:spPr>
+          <p:style>
+            <a:lnRef idx="1">
+              <a:schemeClr val="accent1"/>
+            </a:lnRef>
+            <a:fillRef idx="3">
+              <a:schemeClr val="accent1"/>
+            </a:fillRef>
+            <a:effectRef idx="2">
+              <a:schemeClr val="accent1"/>
+            </a:effectRef>
+            <a:fontRef idx="minor">
+              <a:schemeClr val="lt1"/>
+            </a:fontRef>
+          </p:style>
+          <p:txBody>
+            <a:bodyPr rtlCol="0" anchor="ctr"/>
+            <a:lstStyle/>
+            <a:p>
+              <a:pPr>
+                <a:defRPr sz="1100">
+                  <a:solidFill>
+                    <a:srgbClr val="FFFFFF"/>
+                  </a:solidFill>
+                  <a:latin typeface="Segoe UI"/>
+                </a:defRPr>
+              </a:pPr>
+              <a:endParaRPr dirty="0"/>
+            </a:p>
+          </p:txBody>
+        </p:sp>
+        <p:pic>
+          <p:nvPicPr>
+            <p:cNvPr id="8" name="Picture 7">
+              <a:extLst>
+                <a:ext uri="{FF2B5EF4-FFF2-40B4-BE49-F238E27FC236}">
+                  <a16:creationId xmlns:a16="http://schemas.microsoft.com/office/drawing/2014/main" id="{0800353B-F7B7-8300-1684-4209CDB719E6}"/>
+                </a:ext>
+              </a:extLst>
+            </p:cNvPr>
+            <p:cNvPicPr>
+              <a:picLocks noChangeAspect="1"/>
+            </p:cNvPicPr>
+            <p:nvPr/>
+          </p:nvPicPr>
+          <p:blipFill>
+            <a:blip r:embed="rId4"/>
+            <a:stretch>
+              <a:fillRect/>
+            </a:stretch>
+          </p:blipFill>
+          <p:spPr>
+            <a:xfrm>
+              <a:off x="108584" y="6553264"/>
+              <a:ext cx="1158241" cy="274191"/>
+            </a:xfrm>
+            <a:prstGeom prst="rect">
+              <a:avLst/>
+            </a:prstGeom>
+          </p:spPr>
+        </p:pic>
+      </p:grpSp>
     </p:spTree>
     <p:extLst>
       <p:ext uri="{BB962C8B-B14F-4D97-AF65-F5344CB8AC3E}">
@@ -15091,6 +15892,114 @@
           <a:chExt cx="0" cy="0"/>
         </a:xfrm>
       </p:grpSpPr>
+      <p:grpSp>
+        <p:nvGrpSpPr>
+          <p:cNvPr id="4" name="Group 3">
+            <a:extLst>
+              <a:ext uri="{FF2B5EF4-FFF2-40B4-BE49-F238E27FC236}">
+                <a16:creationId xmlns:a16="http://schemas.microsoft.com/office/drawing/2014/main" id="{D7BF8AD8-0058-D3F8-F5E3-FDAD4DF248D1}"/>
+              </a:ext>
+            </a:extLst>
+          </p:cNvPr>
+          <p:cNvGrpSpPr/>
+          <p:nvPr/>
+        </p:nvGrpSpPr>
+        <p:grpSpPr>
+          <a:xfrm>
+            <a:off x="0" y="6537960"/>
+            <a:ext cx="12191695" cy="320040"/>
+            <a:chOff x="0" y="6537960"/>
+            <a:chExt cx="12191695" cy="320040"/>
+          </a:xfrm>
+        </p:grpSpPr>
+        <p:sp>
+          <p:nvSpPr>
+            <p:cNvPr id="7" name="Rectangle 6">
+              <a:extLst>
+                <a:ext uri="{FF2B5EF4-FFF2-40B4-BE49-F238E27FC236}">
+                  <a16:creationId xmlns:a16="http://schemas.microsoft.com/office/drawing/2014/main" id="{B13928DC-09F8-2B2E-3BB5-FD510B4A85C0}"/>
+                </a:ext>
+              </a:extLst>
+            </p:cNvPr>
+            <p:cNvSpPr/>
+            <p:nvPr/>
+          </p:nvSpPr>
+          <p:spPr>
+            <a:xfrm>
+              <a:off x="0" y="6537960"/>
+              <a:ext cx="12191695" cy="320040"/>
+            </a:xfrm>
+            <a:prstGeom prst="rect">
+              <a:avLst/>
+            </a:prstGeom>
+            <a:solidFill>
+              <a:srgbClr val="0D6EFD"/>
+            </a:solidFill>
+            <a:ln>
+              <a:noFill/>
+            </a:ln>
+          </p:spPr>
+          <p:style>
+            <a:lnRef idx="1">
+              <a:schemeClr val="accent1"/>
+            </a:lnRef>
+            <a:fillRef idx="3">
+              <a:schemeClr val="accent1"/>
+            </a:fillRef>
+            <a:effectRef idx="2">
+              <a:schemeClr val="accent1"/>
+            </a:effectRef>
+            <a:fontRef idx="minor">
+              <a:schemeClr val="lt1"/>
+            </a:fontRef>
+          </p:style>
+          <p:txBody>
+            <a:bodyPr rtlCol="0" anchor="ctr"/>
+            <a:lstStyle/>
+            <a:p>
+              <a:pPr>
+                <a:defRPr sz="1100">
+                  <a:solidFill>
+                    <a:srgbClr val="FFFFFF"/>
+                  </a:solidFill>
+                  <a:latin typeface="Segoe UI"/>
+                </a:defRPr>
+              </a:pPr>
+              <a:endParaRPr dirty="0"/>
+            </a:p>
+          </p:txBody>
+        </p:sp>
+        <p:pic>
+          <p:nvPicPr>
+            <p:cNvPr id="8" name="Picture 7">
+              <a:extLst>
+                <a:ext uri="{FF2B5EF4-FFF2-40B4-BE49-F238E27FC236}">
+                  <a16:creationId xmlns:a16="http://schemas.microsoft.com/office/drawing/2014/main" id="{F5BDC50F-4A70-73C4-BE10-5438547897B9}"/>
+                </a:ext>
+              </a:extLst>
+            </p:cNvPr>
+            <p:cNvPicPr>
+              <a:picLocks noChangeAspect="1"/>
+            </p:cNvPicPr>
+            <p:nvPr/>
+          </p:nvPicPr>
+          <p:blipFill>
+            <a:blip r:embed="rId3"/>
+            <a:stretch>
+              <a:fillRect/>
+            </a:stretch>
+          </p:blipFill>
+          <p:spPr>
+            <a:xfrm>
+              <a:off x="108584" y="6553264"/>
+              <a:ext cx="1158241" cy="274191"/>
+            </a:xfrm>
+            <a:prstGeom prst="rect">
+              <a:avLst/>
+            </a:prstGeom>
+          </p:spPr>
+        </p:pic>
+      </p:grpSp>
       <p:sp>
         <p:nvSpPr>
           <p:cNvPr id="2" name="TextBox 1">
@@ -15105,8 +16014,8 @@
         </p:nvSpPr>
         <p:spPr>
           <a:xfrm>
-            <a:off x="548640" y="411480"/>
-            <a:ext cx="11064240" cy="938719"/>
+            <a:off x="322634" y="411480"/>
+            <a:ext cx="11290246" cy="938719"/>
           </a:xfrm>
           <a:prstGeom prst="rect">
             <a:avLst/>
@@ -15146,7 +16055,7 @@
             </a:pPr>
             <a:r>
               <a:rPr lang="en-US" dirty="0"/>
-              <a:t>Details and Customize Buttons</a:t>
+              <a:t>Access Manage Session page and Right-Click Menu</a:t>
             </a:r>
             <a:endParaRPr dirty="0"/>
           </a:p>
@@ -15166,8 +16075,8 @@
         </p:nvSpPr>
         <p:spPr>
           <a:xfrm>
-            <a:off x="322633" y="1371485"/>
-            <a:ext cx="6554173" cy="3580467"/>
+            <a:off x="322634" y="1371485"/>
+            <a:ext cx="5352026" cy="4734629"/>
           </a:xfrm>
           <a:prstGeom prst="rect">
             <a:avLst/>
@@ -15192,27 +16101,27 @@
               </a:defRPr>
             </a:pPr>
             <a:r>
-              <a:rPr lang="en-US" sz="1600" b="1" dirty="0"/>
+              <a:rPr lang="en-US" b="1" dirty="0"/>
               <a:t>1- </a:t>
             </a:r>
             <a:r>
-              <a:rPr lang="en-US" sz="1600" dirty="0"/>
+              <a:rPr lang="en-US" dirty="0"/>
               <a:t>Click on a </a:t>
             </a:r>
             <a:r>
-              <a:rPr lang="en-US" sz="1600" b="1" dirty="0"/>
+              <a:rPr lang="en-US" b="1" dirty="0"/>
               <a:t>session/card </a:t>
             </a:r>
             <a:r>
-              <a:rPr lang="en-US" sz="1600" dirty="0"/>
+              <a:rPr lang="en-US" dirty="0"/>
               <a:t>to open the </a:t>
             </a:r>
             <a:r>
-              <a:rPr lang="en-US" sz="1600" b="1" dirty="0"/>
+              <a:rPr lang="en-US" b="1" dirty="0"/>
               <a:t>Manage Session </a:t>
             </a:r>
             <a:r>
-              <a:rPr lang="en-US" sz="1600" dirty="0"/>
+              <a:rPr lang="en-US" dirty="0"/>
               <a:t>page.</a:t>
             </a:r>
           </a:p>
@@ -15228,7 +16137,10 @@
                 <a:latin typeface="Segoe UI"/>
               </a:defRPr>
             </a:pPr>
-            <a:endParaRPr lang="en-US" sz="1600" dirty="0"/>
+            <a:r>
+              <a:rPr lang="en-US" dirty="0"/>
+              <a:t>You just need to hover the mouse on the session/card you wish to open, then click (Left Click) somewhere on the card.</a:t>
+            </a:r>
           </a:p>
           <a:p>
             <a:pPr>
@@ -15242,10 +16154,7 @@
                 <a:latin typeface="Segoe UI"/>
               </a:defRPr>
             </a:pPr>
-            <a:r>
-              <a:rPr lang="en-US" sz="1600" dirty="0"/>
-              <a:t>You just need to hover the mouse on the session/card you wish to open, then click (Left Click) somewhere on the card.</a:t>
-            </a:r>
+            <a:endParaRPr lang="en-US" dirty="0"/>
           </a:p>
           <a:p>
             <a:pPr>
@@ -15259,7 +16168,14 @@
                 <a:latin typeface="Segoe UI"/>
               </a:defRPr>
             </a:pPr>
-            <a:endParaRPr lang="en-US" sz="1600" dirty="0"/>
+            <a:r>
+              <a:rPr lang="en-US" b="1" dirty="0"/>
+              <a:t>2-</a:t>
+            </a:r>
+            <a:r>
+              <a:rPr lang="en-US" dirty="0"/>
+              <a:t> Right-Click on the session/card, then from the menu click on the small square icon under the class name.</a:t>
+            </a:r>
           </a:p>
           <a:p>
             <a:pPr>
@@ -15273,7 +16189,18 @@
                 <a:latin typeface="Segoe UI"/>
               </a:defRPr>
             </a:pPr>
-            <a:endParaRPr lang="en-US" sz="1600" dirty="0"/>
+            <a:r>
+              <a:rPr lang="en-US" dirty="0"/>
+              <a:t>You can click on ‘</a:t>
+            </a:r>
+            <a:r>
+              <a:rPr lang="en-US" dirty="0" err="1"/>
+              <a:t>i</a:t>
+            </a:r>
+            <a:r>
+              <a:rPr lang="en-US" dirty="0"/>
+              <a:t>’ button to see the session details.</a:t>
+            </a:r>
           </a:p>
           <a:p>
             <a:pPr>
@@ -15287,112 +16214,9 @@
                 <a:latin typeface="Segoe UI"/>
               </a:defRPr>
             </a:pPr>
-            <a:endParaRPr lang="en-US" sz="1600" dirty="0"/>
-          </a:p>
-          <a:p>
-            <a:pPr>
-              <a:spcAft>
-                <a:spcPts val="1000"/>
-              </a:spcAft>
-              <a:defRPr sz="2000">
-                <a:solidFill>
-                  <a:srgbClr val="212529"/>
-                </a:solidFill>
-                <a:latin typeface="Segoe UI"/>
-              </a:defRPr>
-            </a:pPr>
-            <a:endParaRPr lang="en-US" sz="1600" dirty="0"/>
-          </a:p>
-          <a:p>
-            <a:pPr>
-              <a:spcAft>
-                <a:spcPts val="1000"/>
-              </a:spcAft>
-              <a:defRPr sz="2000">
-                <a:solidFill>
-                  <a:srgbClr val="212529"/>
-                </a:solidFill>
-                <a:latin typeface="Segoe UI"/>
-              </a:defRPr>
-            </a:pPr>
-            <a:endParaRPr lang="en-US" sz="1600" dirty="0"/>
-          </a:p>
-          <a:p>
-            <a:pPr>
-              <a:spcAft>
-                <a:spcPts val="1000"/>
-              </a:spcAft>
-              <a:defRPr sz="2000">
-                <a:solidFill>
-                  <a:srgbClr val="212529"/>
-                </a:solidFill>
-                <a:latin typeface="Segoe UI"/>
-              </a:defRPr>
-            </a:pPr>
-            <a:r>
-              <a:rPr lang="en-US" sz="1600" dirty="0"/>
-              <a:t>You can also Right-Click on the session/card, and then </a:t>
-            </a:r>
-            <a:endParaRPr sz="1600" dirty="0"/>
-          </a:p>
-        </p:txBody>
-      </p:sp>
-      <p:sp>
-        <p:nvSpPr>
-          <p:cNvPr id="5" name="Rectangle 4">
-            <a:extLst>
-              <a:ext uri="{FF2B5EF4-FFF2-40B4-BE49-F238E27FC236}">
-                <a16:creationId xmlns:a16="http://schemas.microsoft.com/office/drawing/2014/main" id="{BC7F3C57-F10A-8D21-F5F6-7061479D6562}"/>
-              </a:ext>
-            </a:extLst>
-          </p:cNvPr>
-          <p:cNvSpPr/>
-          <p:nvPr/>
-        </p:nvSpPr>
-        <p:spPr>
-          <a:xfrm>
-            <a:off x="0" y="6537960"/>
-            <a:ext cx="12191695" cy="320040"/>
-          </a:xfrm>
-          <a:prstGeom prst="rect">
-            <a:avLst/>
-          </a:prstGeom>
-          <a:solidFill>
-            <a:srgbClr val="0D6EFD"/>
-          </a:solidFill>
-          <a:ln>
-            <a:noFill/>
-          </a:ln>
-        </p:spPr>
-        <p:style>
-          <a:lnRef idx="1">
-            <a:schemeClr val="accent1"/>
-          </a:lnRef>
-          <a:fillRef idx="3">
-            <a:schemeClr val="accent1"/>
-          </a:fillRef>
-          <a:effectRef idx="2">
-            <a:schemeClr val="accent1"/>
-          </a:effectRef>
-          <a:fontRef idx="minor">
-            <a:schemeClr val="lt1"/>
-          </a:fontRef>
-        </p:style>
-        <p:txBody>
-          <a:bodyPr rtlCol="0" anchor="ctr"/>
-          <a:lstStyle/>
-          <a:p>
-            <a:pPr>
-              <a:defRPr sz="1100">
-                <a:solidFill>
-                  <a:srgbClr val="FFFFFF"/>
-                </a:solidFill>
-                <a:latin typeface="Segoe UI"/>
-              </a:defRPr>
-            </a:pPr>
             <a:r>
               <a:rPr lang="en-US" dirty="0"/>
-              <a:t>MY SCHEDULE</a:t>
+              <a:t>You can also check the Attendance List and Enrollment List for that session. </a:t>
             </a:r>
           </a:p>
         </p:txBody>
@@ -15412,76 +16236,102 @@
           <p:nvPr/>
         </p:nvPicPr>
         <p:blipFill>
-          <a:blip r:embed="rId3"/>
-          <a:srcRect t="41286"/>
+          <a:blip r:embed="rId4"/>
+          <a:srcRect t="41286" r="22663"/>
           <a:stretch>
             <a:fillRect/>
           </a:stretch>
         </p:blipFill>
         <p:spPr>
           <a:xfrm>
-            <a:off x="6761128" y="397375"/>
-            <a:ext cx="4778713" cy="3117553"/>
+            <a:off x="5985488" y="85945"/>
+            <a:ext cx="6049009" cy="5102715"/>
           </a:xfrm>
           <a:custGeom>
             <a:avLst/>
             <a:gdLst>
-              <a:gd name="csX0" fmla="*/ 0 w 4778713"/>
-              <a:gd name="csY0" fmla="*/ 0 h 3117553"/>
-              <a:gd name="csX1" fmla="*/ 645126 w 4778713"/>
-              <a:gd name="csY1" fmla="*/ 0 h 3117553"/>
-              <a:gd name="csX2" fmla="*/ 1290253 w 4778713"/>
-              <a:gd name="csY2" fmla="*/ 0 h 3117553"/>
-              <a:gd name="csX3" fmla="*/ 1887592 w 4778713"/>
-              <a:gd name="csY3" fmla="*/ 0 h 3117553"/>
-              <a:gd name="csX4" fmla="*/ 2484931 w 4778713"/>
-              <a:gd name="csY4" fmla="*/ 0 h 3117553"/>
-              <a:gd name="csX5" fmla="*/ 2986696 w 4778713"/>
-              <a:gd name="csY5" fmla="*/ 0 h 3117553"/>
-              <a:gd name="csX6" fmla="*/ 3584035 w 4778713"/>
-              <a:gd name="csY6" fmla="*/ 0 h 3117553"/>
-              <a:gd name="csX7" fmla="*/ 4229161 w 4778713"/>
-              <a:gd name="csY7" fmla="*/ 0 h 3117553"/>
-              <a:gd name="csX8" fmla="*/ 4778713 w 4778713"/>
-              <a:gd name="csY8" fmla="*/ 0 h 3117553"/>
-              <a:gd name="csX9" fmla="*/ 4778713 w 4778713"/>
-              <a:gd name="csY9" fmla="*/ 581943 h 3117553"/>
-              <a:gd name="csX10" fmla="*/ 4778713 w 4778713"/>
-              <a:gd name="csY10" fmla="*/ 1039184 h 3117553"/>
-              <a:gd name="csX11" fmla="*/ 4778713 w 4778713"/>
-              <a:gd name="csY11" fmla="*/ 1527601 h 3117553"/>
-              <a:gd name="csX12" fmla="*/ 4778713 w 4778713"/>
-              <a:gd name="csY12" fmla="*/ 1984842 h 3117553"/>
-              <a:gd name="csX13" fmla="*/ 4778713 w 4778713"/>
-              <a:gd name="csY13" fmla="*/ 2410908 h 3117553"/>
-              <a:gd name="csX14" fmla="*/ 4778713 w 4778713"/>
-              <a:gd name="csY14" fmla="*/ 3117553 h 3117553"/>
-              <a:gd name="csX15" fmla="*/ 4181374 w 4778713"/>
-              <a:gd name="csY15" fmla="*/ 3117553 h 3117553"/>
-              <a:gd name="csX16" fmla="*/ 3631822 w 4778713"/>
-              <a:gd name="csY16" fmla="*/ 3117553 h 3117553"/>
-              <a:gd name="csX17" fmla="*/ 3082270 w 4778713"/>
-              <a:gd name="csY17" fmla="*/ 3117553 h 3117553"/>
-              <a:gd name="csX18" fmla="*/ 2484931 w 4778713"/>
-              <a:gd name="csY18" fmla="*/ 3117553 h 3117553"/>
-              <a:gd name="csX19" fmla="*/ 1983166 w 4778713"/>
-              <a:gd name="csY19" fmla="*/ 3117553 h 3117553"/>
-              <a:gd name="csX20" fmla="*/ 1433614 w 4778713"/>
-              <a:gd name="csY20" fmla="*/ 3117553 h 3117553"/>
-              <a:gd name="csX21" fmla="*/ 931849 w 4778713"/>
-              <a:gd name="csY21" fmla="*/ 3117553 h 3117553"/>
-              <a:gd name="csX22" fmla="*/ 0 w 4778713"/>
-              <a:gd name="csY22" fmla="*/ 3117553 h 3117553"/>
-              <a:gd name="csX23" fmla="*/ 0 w 4778713"/>
-              <a:gd name="csY23" fmla="*/ 2597961 h 3117553"/>
-              <a:gd name="csX24" fmla="*/ 0 w 4778713"/>
-              <a:gd name="csY24" fmla="*/ 2016018 h 3117553"/>
-              <a:gd name="csX25" fmla="*/ 0 w 4778713"/>
-              <a:gd name="csY25" fmla="*/ 1527601 h 3117553"/>
-              <a:gd name="csX26" fmla="*/ 0 w 4778713"/>
-              <a:gd name="csY26" fmla="*/ 976833 h 3117553"/>
-              <a:gd name="csX27" fmla="*/ 0 w 4778713"/>
-              <a:gd name="csY27" fmla="*/ 0 h 3117553"/>
+              <a:gd name="csX0" fmla="*/ 0 w 6049009"/>
+              <a:gd name="csY0" fmla="*/ 0 h 5102715"/>
+              <a:gd name="csX1" fmla="*/ 610400 w 6049009"/>
+              <a:gd name="csY1" fmla="*/ 0 h 5102715"/>
+              <a:gd name="csX2" fmla="*/ 1160310 w 6049009"/>
+              <a:gd name="csY2" fmla="*/ 0 h 5102715"/>
+              <a:gd name="csX3" fmla="*/ 1710220 w 6049009"/>
+              <a:gd name="csY3" fmla="*/ 0 h 5102715"/>
+              <a:gd name="csX4" fmla="*/ 2320620 w 6049009"/>
+              <a:gd name="csY4" fmla="*/ 0 h 5102715"/>
+              <a:gd name="csX5" fmla="*/ 2810040 w 6049009"/>
+              <a:gd name="csY5" fmla="*/ 0 h 5102715"/>
+              <a:gd name="csX6" fmla="*/ 3178479 w 6049009"/>
+              <a:gd name="csY6" fmla="*/ 0 h 5102715"/>
+              <a:gd name="csX7" fmla="*/ 3607409 w 6049009"/>
+              <a:gd name="csY7" fmla="*/ 0 h 5102715"/>
+              <a:gd name="csX8" fmla="*/ 4157319 w 6049009"/>
+              <a:gd name="csY8" fmla="*/ 0 h 5102715"/>
+              <a:gd name="csX9" fmla="*/ 4525759 w 6049009"/>
+              <a:gd name="csY9" fmla="*/ 0 h 5102715"/>
+              <a:gd name="csX10" fmla="*/ 4954688 w 6049009"/>
+              <a:gd name="csY10" fmla="*/ 0 h 5102715"/>
+              <a:gd name="csX11" fmla="*/ 5323128 w 6049009"/>
+              <a:gd name="csY11" fmla="*/ 0 h 5102715"/>
+              <a:gd name="csX12" fmla="*/ 6049009 w 6049009"/>
+              <a:gd name="csY12" fmla="*/ 0 h 5102715"/>
+              <a:gd name="csX13" fmla="*/ 6049009 w 6049009"/>
+              <a:gd name="csY13" fmla="*/ 669023 h 5102715"/>
+              <a:gd name="csX14" fmla="*/ 6049009 w 6049009"/>
+              <a:gd name="csY14" fmla="*/ 1184964 h 5102715"/>
+              <a:gd name="csX15" fmla="*/ 6049009 w 6049009"/>
+              <a:gd name="csY15" fmla="*/ 1649878 h 5102715"/>
+              <a:gd name="csX16" fmla="*/ 6049009 w 6049009"/>
+              <a:gd name="csY16" fmla="*/ 2267873 h 5102715"/>
+              <a:gd name="csX17" fmla="*/ 6049009 w 6049009"/>
+              <a:gd name="csY17" fmla="*/ 2834842 h 5102715"/>
+              <a:gd name="csX18" fmla="*/ 6049009 w 6049009"/>
+              <a:gd name="csY18" fmla="*/ 3299756 h 5102715"/>
+              <a:gd name="csX19" fmla="*/ 6049009 w 6049009"/>
+              <a:gd name="csY19" fmla="*/ 3968778 h 5102715"/>
+              <a:gd name="csX20" fmla="*/ 6049009 w 6049009"/>
+              <a:gd name="csY20" fmla="*/ 5102715 h 5102715"/>
+              <a:gd name="csX21" fmla="*/ 5438609 w 6049009"/>
+              <a:gd name="csY21" fmla="*/ 5102715 h 5102715"/>
+              <a:gd name="csX22" fmla="*/ 4828209 w 6049009"/>
+              <a:gd name="csY22" fmla="*/ 5102715 h 5102715"/>
+              <a:gd name="csX23" fmla="*/ 4399279 w 6049009"/>
+              <a:gd name="csY23" fmla="*/ 5102715 h 5102715"/>
+              <a:gd name="csX24" fmla="*/ 3849369 w 6049009"/>
+              <a:gd name="csY24" fmla="*/ 5102715 h 5102715"/>
+              <a:gd name="csX25" fmla="*/ 3178479 w 6049009"/>
+              <a:gd name="csY25" fmla="*/ 5102715 h 5102715"/>
+              <a:gd name="csX26" fmla="*/ 2810040 w 6049009"/>
+              <a:gd name="csY26" fmla="*/ 5102715 h 5102715"/>
+              <a:gd name="csX27" fmla="*/ 2381110 w 6049009"/>
+              <a:gd name="csY27" fmla="*/ 5102715 h 5102715"/>
+              <a:gd name="csX28" fmla="*/ 1770710 w 6049009"/>
+              <a:gd name="csY28" fmla="*/ 5102715 h 5102715"/>
+              <a:gd name="csX29" fmla="*/ 1281290 w 6049009"/>
+              <a:gd name="csY29" fmla="*/ 5102715 h 5102715"/>
+              <a:gd name="csX30" fmla="*/ 791870 w 6049009"/>
+              <a:gd name="csY30" fmla="*/ 5102715 h 5102715"/>
+              <a:gd name="csX31" fmla="*/ 0 w 6049009"/>
+              <a:gd name="csY31" fmla="*/ 5102715 h 5102715"/>
+              <a:gd name="csX32" fmla="*/ 0 w 6049009"/>
+              <a:gd name="csY32" fmla="*/ 4535747 h 5102715"/>
+              <a:gd name="csX33" fmla="*/ 0 w 6049009"/>
+              <a:gd name="csY33" fmla="*/ 3917751 h 5102715"/>
+              <a:gd name="csX34" fmla="*/ 0 w 6049009"/>
+              <a:gd name="csY34" fmla="*/ 3503864 h 5102715"/>
+              <a:gd name="csX35" fmla="*/ 0 w 6049009"/>
+              <a:gd name="csY35" fmla="*/ 2834842 h 5102715"/>
+              <a:gd name="csX36" fmla="*/ 0 w 6049009"/>
+              <a:gd name="csY36" fmla="*/ 2369928 h 5102715"/>
+              <a:gd name="csX37" fmla="*/ 0 w 6049009"/>
+              <a:gd name="csY37" fmla="*/ 1905014 h 5102715"/>
+              <a:gd name="csX38" fmla="*/ 0 w 6049009"/>
+              <a:gd name="csY38" fmla="*/ 1287018 h 5102715"/>
+              <a:gd name="csX39" fmla="*/ 0 w 6049009"/>
+              <a:gd name="csY39" fmla="*/ 669023 h 5102715"/>
+              <a:gd name="csX40" fmla="*/ 0 w 6049009"/>
+              <a:gd name="csY40" fmla="*/ 0 h 5102715"/>
             </a:gdLst>
             <a:ahLst/>
             <a:cxnLst>
@@ -15569,297 +16419,461 @@
               <a:cxn ang="0">
                 <a:pos x="csX27" y="csY27"/>
               </a:cxn>
+              <a:cxn ang="0">
+                <a:pos x="csX28" y="csY28"/>
+              </a:cxn>
+              <a:cxn ang="0">
+                <a:pos x="csX29" y="csY29"/>
+              </a:cxn>
+              <a:cxn ang="0">
+                <a:pos x="csX30" y="csY30"/>
+              </a:cxn>
+              <a:cxn ang="0">
+                <a:pos x="csX31" y="csY31"/>
+              </a:cxn>
+              <a:cxn ang="0">
+                <a:pos x="csX32" y="csY32"/>
+              </a:cxn>
+              <a:cxn ang="0">
+                <a:pos x="csX33" y="csY33"/>
+              </a:cxn>
+              <a:cxn ang="0">
+                <a:pos x="csX34" y="csY34"/>
+              </a:cxn>
+              <a:cxn ang="0">
+                <a:pos x="csX35" y="csY35"/>
+              </a:cxn>
+              <a:cxn ang="0">
+                <a:pos x="csX36" y="csY36"/>
+              </a:cxn>
+              <a:cxn ang="0">
+                <a:pos x="csX37" y="csY37"/>
+              </a:cxn>
+              <a:cxn ang="0">
+                <a:pos x="csX38" y="csY38"/>
+              </a:cxn>
+              <a:cxn ang="0">
+                <a:pos x="csX39" y="csY39"/>
+              </a:cxn>
+              <a:cxn ang="0">
+                <a:pos x="csX40" y="csY40"/>
+              </a:cxn>
             </a:cxnLst>
             <a:rect l="l" t="t" r="r" b="b"/>
             <a:pathLst>
-              <a:path w="4778713" h="3117553" fill="none" extrusionOk="0">
+              <a:path w="6049009" h="5102715" fill="none" extrusionOk="0">
                 <a:moveTo>
                   <a:pt x="0" y="0"/>
                 </a:moveTo>
                 <a:cubicBezTo>
-                  <a:pt x="139698" y="-25007"/>
-                  <a:pt x="345412" y="20092"/>
-                  <a:pt x="645126" y="0"/>
-                </a:cubicBezTo>
-                <a:cubicBezTo>
-                  <a:pt x="944840" y="-20092"/>
-                  <a:pt x="1003789" y="65586"/>
-                  <a:pt x="1290253" y="0"/>
-                </a:cubicBezTo>
-                <a:cubicBezTo>
-                  <a:pt x="1576717" y="-65586"/>
-                  <a:pt x="1643700" y="53715"/>
-                  <a:pt x="1887592" y="0"/>
-                </a:cubicBezTo>
-                <a:cubicBezTo>
-                  <a:pt x="2131484" y="-53715"/>
-                  <a:pt x="2298837" y="46013"/>
-                  <a:pt x="2484931" y="0"/>
-                </a:cubicBezTo>
-                <a:cubicBezTo>
-                  <a:pt x="2671025" y="-46013"/>
-                  <a:pt x="2861059" y="47553"/>
-                  <a:pt x="2986696" y="0"/>
-                </a:cubicBezTo>
-                <a:cubicBezTo>
-                  <a:pt x="3112334" y="-47553"/>
-                  <a:pt x="3305468" y="4179"/>
-                  <a:pt x="3584035" y="0"/>
-                </a:cubicBezTo>
-                <a:cubicBezTo>
-                  <a:pt x="3862602" y="-4179"/>
-                  <a:pt x="3959578" y="62422"/>
-                  <a:pt x="4229161" y="0"/>
-                </a:cubicBezTo>
-                <a:cubicBezTo>
-                  <a:pt x="4498744" y="-62422"/>
-                  <a:pt x="4581435" y="65910"/>
-                  <a:pt x="4778713" y="0"/>
-                </a:cubicBezTo>
-                <a:cubicBezTo>
-                  <a:pt x="4822953" y="128614"/>
-                  <a:pt x="4776985" y="354939"/>
-                  <a:pt x="4778713" y="581943"/>
-                </a:cubicBezTo>
-                <a:cubicBezTo>
-                  <a:pt x="4780441" y="808947"/>
-                  <a:pt x="4735573" y="916218"/>
-                  <a:pt x="4778713" y="1039184"/>
-                </a:cubicBezTo>
-                <a:cubicBezTo>
-                  <a:pt x="4821853" y="1162150"/>
-                  <a:pt x="4776954" y="1381583"/>
-                  <a:pt x="4778713" y="1527601"/>
-                </a:cubicBezTo>
-                <a:cubicBezTo>
-                  <a:pt x="4780472" y="1673619"/>
-                  <a:pt x="4763661" y="1840770"/>
-                  <a:pt x="4778713" y="1984842"/>
-                </a:cubicBezTo>
-                <a:cubicBezTo>
-                  <a:pt x="4793765" y="2128914"/>
-                  <a:pt x="4765143" y="2295846"/>
-                  <a:pt x="4778713" y="2410908"/>
-                </a:cubicBezTo>
-                <a:cubicBezTo>
-                  <a:pt x="4792283" y="2525970"/>
-                  <a:pt x="4768008" y="2797007"/>
-                  <a:pt x="4778713" y="3117553"/>
-                </a:cubicBezTo>
-                <a:cubicBezTo>
-                  <a:pt x="4618051" y="3142690"/>
-                  <a:pt x="4361802" y="3066741"/>
-                  <a:pt x="4181374" y="3117553"/>
-                </a:cubicBezTo>
-                <a:cubicBezTo>
-                  <a:pt x="4000946" y="3168365"/>
-                  <a:pt x="3796544" y="3074176"/>
-                  <a:pt x="3631822" y="3117553"/>
-                </a:cubicBezTo>
-                <a:cubicBezTo>
-                  <a:pt x="3467100" y="3160930"/>
-                  <a:pt x="3256531" y="3064394"/>
-                  <a:pt x="3082270" y="3117553"/>
-                </a:cubicBezTo>
-                <a:cubicBezTo>
-                  <a:pt x="2908009" y="3170712"/>
-                  <a:pt x="2651964" y="3096254"/>
-                  <a:pt x="2484931" y="3117553"/>
-                </a:cubicBezTo>
-                <a:cubicBezTo>
-                  <a:pt x="2317898" y="3138852"/>
-                  <a:pt x="2130867" y="3073646"/>
-                  <a:pt x="1983166" y="3117553"/>
-                </a:cubicBezTo>
-                <a:cubicBezTo>
-                  <a:pt x="1835465" y="3161460"/>
-                  <a:pt x="1651039" y="3108008"/>
-                  <a:pt x="1433614" y="3117553"/>
-                </a:cubicBezTo>
-                <a:cubicBezTo>
-                  <a:pt x="1216189" y="3127098"/>
-                  <a:pt x="1113590" y="3109359"/>
-                  <a:pt x="931849" y="3117553"/>
-                </a:cubicBezTo>
-                <a:cubicBezTo>
-                  <a:pt x="750108" y="3125747"/>
-                  <a:pt x="268183" y="3061499"/>
-                  <a:pt x="0" y="3117553"/>
-                </a:cubicBezTo>
-                <a:cubicBezTo>
-                  <a:pt x="-56849" y="2926562"/>
-                  <a:pt x="27083" y="2827810"/>
-                  <a:pt x="0" y="2597961"/>
-                </a:cubicBezTo>
-                <a:cubicBezTo>
-                  <a:pt x="-27083" y="2368112"/>
-                  <a:pt x="42203" y="2137773"/>
-                  <a:pt x="0" y="2016018"/>
-                </a:cubicBezTo>
-                <a:cubicBezTo>
-                  <a:pt x="-42203" y="1894263"/>
-                  <a:pt x="56274" y="1725272"/>
-                  <a:pt x="0" y="1527601"/>
-                </a:cubicBezTo>
-                <a:cubicBezTo>
-                  <a:pt x="-56274" y="1329930"/>
-                  <a:pt x="53956" y="1130474"/>
-                  <a:pt x="0" y="976833"/>
-                </a:cubicBezTo>
-                <a:cubicBezTo>
-                  <a:pt x="-53956" y="823192"/>
-                  <a:pt x="48100" y="474019"/>
+                  <a:pt x="164724" y="-20026"/>
+                  <a:pt x="349430" y="62118"/>
+                  <a:pt x="610400" y="0"/>
+                </a:cubicBezTo>
+                <a:cubicBezTo>
+                  <a:pt x="871370" y="-62118"/>
+                  <a:pt x="1034288" y="24324"/>
+                  <a:pt x="1160310" y="0"/>
+                </a:cubicBezTo>
+                <a:cubicBezTo>
+                  <a:pt x="1286332" y="-24324"/>
+                  <a:pt x="1474696" y="19355"/>
+                  <a:pt x="1710220" y="0"/>
+                </a:cubicBezTo>
+                <a:cubicBezTo>
+                  <a:pt x="1945744" y="-19355"/>
+                  <a:pt x="2091325" y="58001"/>
+                  <a:pt x="2320620" y="0"/>
+                </a:cubicBezTo>
+                <a:cubicBezTo>
+                  <a:pt x="2549915" y="-58001"/>
+                  <a:pt x="2649198" y="7880"/>
+                  <a:pt x="2810040" y="0"/>
+                </a:cubicBezTo>
+                <a:cubicBezTo>
+                  <a:pt x="2970882" y="-7880"/>
+                  <a:pt x="3066531" y="15579"/>
+                  <a:pt x="3178479" y="0"/>
+                </a:cubicBezTo>
+                <a:cubicBezTo>
+                  <a:pt x="3290427" y="-15579"/>
+                  <a:pt x="3417541" y="29055"/>
+                  <a:pt x="3607409" y="0"/>
+                </a:cubicBezTo>
+                <a:cubicBezTo>
+                  <a:pt x="3797277" y="-29055"/>
+                  <a:pt x="3908139" y="33849"/>
+                  <a:pt x="4157319" y="0"/>
+                </a:cubicBezTo>
+                <a:cubicBezTo>
+                  <a:pt x="4406499" y="-33849"/>
+                  <a:pt x="4370490" y="35186"/>
+                  <a:pt x="4525759" y="0"/>
+                </a:cubicBezTo>
+                <a:cubicBezTo>
+                  <a:pt x="4681028" y="-35186"/>
+                  <a:pt x="4809088" y="10"/>
+                  <a:pt x="4954688" y="0"/>
+                </a:cubicBezTo>
+                <a:cubicBezTo>
+                  <a:pt x="5100288" y="-10"/>
+                  <a:pt x="5190275" y="42394"/>
+                  <a:pt x="5323128" y="0"/>
+                </a:cubicBezTo>
+                <a:cubicBezTo>
+                  <a:pt x="5455981" y="-42394"/>
+                  <a:pt x="5771258" y="81872"/>
+                  <a:pt x="6049009" y="0"/>
+                </a:cubicBezTo>
+                <a:cubicBezTo>
+                  <a:pt x="6077318" y="143194"/>
+                  <a:pt x="5985536" y="485251"/>
+                  <a:pt x="6049009" y="669023"/>
+                </a:cubicBezTo>
+                <a:cubicBezTo>
+                  <a:pt x="6112482" y="852795"/>
+                  <a:pt x="5994806" y="1010293"/>
+                  <a:pt x="6049009" y="1184964"/>
+                </a:cubicBezTo>
+                <a:cubicBezTo>
+                  <a:pt x="6103212" y="1359635"/>
+                  <a:pt x="5994970" y="1472313"/>
+                  <a:pt x="6049009" y="1649878"/>
+                </a:cubicBezTo>
+                <a:cubicBezTo>
+                  <a:pt x="6103048" y="1827443"/>
+                  <a:pt x="5982780" y="2027027"/>
+                  <a:pt x="6049009" y="2267873"/>
+                </a:cubicBezTo>
+                <a:cubicBezTo>
+                  <a:pt x="6115238" y="2508719"/>
+                  <a:pt x="6006409" y="2671797"/>
+                  <a:pt x="6049009" y="2834842"/>
+                </a:cubicBezTo>
+                <a:cubicBezTo>
+                  <a:pt x="6091609" y="2997887"/>
+                  <a:pt x="6036921" y="3172790"/>
+                  <a:pt x="6049009" y="3299756"/>
+                </a:cubicBezTo>
+                <a:cubicBezTo>
+                  <a:pt x="6061097" y="3426722"/>
+                  <a:pt x="6022613" y="3720648"/>
+                  <a:pt x="6049009" y="3968778"/>
+                </a:cubicBezTo>
+                <a:cubicBezTo>
+                  <a:pt x="6075405" y="4216908"/>
+                  <a:pt x="5945040" y="4825901"/>
+                  <a:pt x="6049009" y="5102715"/>
+                </a:cubicBezTo>
+                <a:cubicBezTo>
+                  <a:pt x="5885566" y="5141973"/>
+                  <a:pt x="5737603" y="5092106"/>
+                  <a:pt x="5438609" y="5102715"/>
+                </a:cubicBezTo>
+                <a:cubicBezTo>
+                  <a:pt x="5139615" y="5113324"/>
+                  <a:pt x="5021190" y="5087985"/>
+                  <a:pt x="4828209" y="5102715"/>
+                </a:cubicBezTo>
+                <a:cubicBezTo>
+                  <a:pt x="4635228" y="5117445"/>
+                  <a:pt x="4515035" y="5056379"/>
+                  <a:pt x="4399279" y="5102715"/>
+                </a:cubicBezTo>
+                <a:cubicBezTo>
+                  <a:pt x="4283523" y="5149051"/>
+                  <a:pt x="4053899" y="5039919"/>
+                  <a:pt x="3849369" y="5102715"/>
+                </a:cubicBezTo>
+                <a:cubicBezTo>
+                  <a:pt x="3644839" y="5165511"/>
+                  <a:pt x="3510218" y="5101656"/>
+                  <a:pt x="3178479" y="5102715"/>
+                </a:cubicBezTo>
+                <a:cubicBezTo>
+                  <a:pt x="2846740" y="5103774"/>
+                  <a:pt x="2948394" y="5093159"/>
+                  <a:pt x="2810040" y="5102715"/>
+                </a:cubicBezTo>
+                <a:cubicBezTo>
+                  <a:pt x="2671686" y="5112271"/>
+                  <a:pt x="2548640" y="5070848"/>
+                  <a:pt x="2381110" y="5102715"/>
+                </a:cubicBezTo>
+                <a:cubicBezTo>
+                  <a:pt x="2213580" y="5134582"/>
+                  <a:pt x="2003735" y="5066239"/>
+                  <a:pt x="1770710" y="5102715"/>
+                </a:cubicBezTo>
+                <a:cubicBezTo>
+                  <a:pt x="1537685" y="5139191"/>
+                  <a:pt x="1442357" y="5073027"/>
+                  <a:pt x="1281290" y="5102715"/>
+                </a:cubicBezTo>
+                <a:cubicBezTo>
+                  <a:pt x="1120223" y="5132403"/>
+                  <a:pt x="1022694" y="5077100"/>
+                  <a:pt x="791870" y="5102715"/>
+                </a:cubicBezTo>
+                <a:cubicBezTo>
+                  <a:pt x="561046" y="5128330"/>
+                  <a:pt x="291076" y="5014929"/>
+                  <a:pt x="0" y="5102715"/>
+                </a:cubicBezTo>
+                <a:cubicBezTo>
+                  <a:pt x="-1793" y="4920856"/>
+                  <a:pt x="57591" y="4668265"/>
+                  <a:pt x="0" y="4535747"/>
+                </a:cubicBezTo>
+                <a:cubicBezTo>
+                  <a:pt x="-57591" y="4403229"/>
+                  <a:pt x="30461" y="4194577"/>
+                  <a:pt x="0" y="3917751"/>
+                </a:cubicBezTo>
+                <a:cubicBezTo>
+                  <a:pt x="-30461" y="3640925"/>
+                  <a:pt x="40915" y="3668354"/>
+                  <a:pt x="0" y="3503864"/>
+                </a:cubicBezTo>
+                <a:cubicBezTo>
+                  <a:pt x="-40915" y="3339374"/>
+                  <a:pt x="79756" y="3012600"/>
+                  <a:pt x="0" y="2834842"/>
+                </a:cubicBezTo>
+                <a:cubicBezTo>
+                  <a:pt x="-79756" y="2657084"/>
+                  <a:pt x="43231" y="2477957"/>
+                  <a:pt x="0" y="2369928"/>
+                </a:cubicBezTo>
+                <a:cubicBezTo>
+                  <a:pt x="-43231" y="2261899"/>
+                  <a:pt x="15470" y="2115221"/>
+                  <a:pt x="0" y="1905014"/>
+                </a:cubicBezTo>
+                <a:cubicBezTo>
+                  <a:pt x="-15470" y="1694807"/>
+                  <a:pt x="44342" y="1544078"/>
+                  <a:pt x="0" y="1287018"/>
+                </a:cubicBezTo>
+                <a:cubicBezTo>
+                  <a:pt x="-44342" y="1029958"/>
+                  <a:pt x="25702" y="948281"/>
+                  <a:pt x="0" y="669023"/>
+                </a:cubicBezTo>
+                <a:cubicBezTo>
+                  <a:pt x="-25702" y="389765"/>
+                  <a:pt x="57306" y="243981"/>
                   <a:pt x="0" y="0"/>
                 </a:cubicBezTo>
                 <a:close/>
               </a:path>
-              <a:path w="4778713" h="3117553" stroke="0" extrusionOk="0">
+              <a:path w="6049009" h="5102715" stroke="0" extrusionOk="0">
                 <a:moveTo>
                   <a:pt x="0" y="0"/>
                 </a:moveTo>
                 <a:cubicBezTo>
-                  <a:pt x="194959" y="-14426"/>
-                  <a:pt x="290047" y="32103"/>
-                  <a:pt x="501765" y="0"/>
-                </a:cubicBezTo>
-                <a:cubicBezTo>
-                  <a:pt x="713484" y="-32103"/>
-                  <a:pt x="907513" y="5070"/>
-                  <a:pt x="1146891" y="0"/>
-                </a:cubicBezTo>
-                <a:cubicBezTo>
-                  <a:pt x="1386269" y="-5070"/>
-                  <a:pt x="1376080" y="36722"/>
-                  <a:pt x="1600869" y="0"/>
-                </a:cubicBezTo>
-                <a:cubicBezTo>
-                  <a:pt x="1825658" y="-36722"/>
-                  <a:pt x="1945987" y="23512"/>
-                  <a:pt x="2245995" y="0"/>
-                </a:cubicBezTo>
-                <a:cubicBezTo>
-                  <a:pt x="2546003" y="-23512"/>
-                  <a:pt x="2538687" y="19477"/>
-                  <a:pt x="2747760" y="0"/>
-                </a:cubicBezTo>
-                <a:cubicBezTo>
-                  <a:pt x="2956834" y="-19477"/>
-                  <a:pt x="3084814" y="26908"/>
-                  <a:pt x="3297312" y="0"/>
-                </a:cubicBezTo>
-                <a:cubicBezTo>
-                  <a:pt x="3509810" y="-26908"/>
-                  <a:pt x="3666069" y="3707"/>
-                  <a:pt x="3799077" y="0"/>
-                </a:cubicBezTo>
-                <a:cubicBezTo>
-                  <a:pt x="3932085" y="-3707"/>
-                  <a:pt x="4043393" y="15381"/>
-                  <a:pt x="4253055" y="0"/>
-                </a:cubicBezTo>
-                <a:cubicBezTo>
-                  <a:pt x="4462717" y="-15381"/>
-                  <a:pt x="4578672" y="30325"/>
-                  <a:pt x="4778713" y="0"/>
-                </a:cubicBezTo>
-                <a:cubicBezTo>
-                  <a:pt x="4780452" y="190540"/>
-                  <a:pt x="4756656" y="306498"/>
-                  <a:pt x="4778713" y="457241"/>
-                </a:cubicBezTo>
-                <a:cubicBezTo>
-                  <a:pt x="4800770" y="607984"/>
-                  <a:pt x="4747320" y="697423"/>
-                  <a:pt x="4778713" y="914482"/>
-                </a:cubicBezTo>
-                <a:cubicBezTo>
-                  <a:pt x="4810106" y="1131541"/>
-                  <a:pt x="4762212" y="1232868"/>
-                  <a:pt x="4778713" y="1496425"/>
-                </a:cubicBezTo>
-                <a:cubicBezTo>
-                  <a:pt x="4795214" y="1759982"/>
-                  <a:pt x="4719679" y="1790548"/>
-                  <a:pt x="4778713" y="2047193"/>
-                </a:cubicBezTo>
-                <a:cubicBezTo>
-                  <a:pt x="4837747" y="2303838"/>
-                  <a:pt x="4762978" y="2411105"/>
-                  <a:pt x="4778713" y="2504434"/>
-                </a:cubicBezTo>
-                <a:cubicBezTo>
-                  <a:pt x="4794448" y="2597763"/>
-                  <a:pt x="4754579" y="2978110"/>
-                  <a:pt x="4778713" y="3117553"/>
-                </a:cubicBezTo>
-                <a:cubicBezTo>
-                  <a:pt x="4578524" y="3145106"/>
-                  <a:pt x="4403507" y="3077984"/>
-                  <a:pt x="4276948" y="3117553"/>
-                </a:cubicBezTo>
-                <a:cubicBezTo>
-                  <a:pt x="4150389" y="3157122"/>
-                  <a:pt x="3902421" y="3103912"/>
-                  <a:pt x="3727396" y="3117553"/>
-                </a:cubicBezTo>
-                <a:cubicBezTo>
-                  <a:pt x="3552371" y="3131194"/>
-                  <a:pt x="3370083" y="3054289"/>
-                  <a:pt x="3177844" y="3117553"/>
-                </a:cubicBezTo>
-                <a:cubicBezTo>
-                  <a:pt x="2985605" y="3180817"/>
-                  <a:pt x="2801428" y="3095799"/>
-                  <a:pt x="2580505" y="3117553"/>
-                </a:cubicBezTo>
-                <a:cubicBezTo>
-                  <a:pt x="2359582" y="3139307"/>
-                  <a:pt x="2282862" y="3082122"/>
-                  <a:pt x="2126527" y="3117553"/>
-                </a:cubicBezTo>
-                <a:cubicBezTo>
-                  <a:pt x="1970192" y="3152984"/>
-                  <a:pt x="1788828" y="3062032"/>
-                  <a:pt x="1481401" y="3117553"/>
-                </a:cubicBezTo>
-                <a:cubicBezTo>
-                  <a:pt x="1173974" y="3173074"/>
-                  <a:pt x="1052462" y="3064669"/>
-                  <a:pt x="836275" y="3117553"/>
-                </a:cubicBezTo>
-                <a:cubicBezTo>
-                  <a:pt x="620088" y="3170437"/>
-                  <a:pt x="237198" y="3056167"/>
-                  <a:pt x="0" y="3117553"/>
-                </a:cubicBezTo>
-                <a:cubicBezTo>
-                  <a:pt x="-164" y="2976931"/>
-                  <a:pt x="35713" y="2804769"/>
-                  <a:pt x="0" y="2691487"/>
-                </a:cubicBezTo>
-                <a:cubicBezTo>
-                  <a:pt x="-35713" y="2578205"/>
-                  <a:pt x="14665" y="2362031"/>
-                  <a:pt x="0" y="2265422"/>
-                </a:cubicBezTo>
-                <a:cubicBezTo>
-                  <a:pt x="-14665" y="2168814"/>
-                  <a:pt x="41852" y="1957653"/>
-                  <a:pt x="0" y="1808181"/>
-                </a:cubicBezTo>
-                <a:cubicBezTo>
-                  <a:pt x="-41852" y="1658709"/>
-                  <a:pt x="19363" y="1472013"/>
-                  <a:pt x="0" y="1382115"/>
-                </a:cubicBezTo>
-                <a:cubicBezTo>
-                  <a:pt x="-19363" y="1292217"/>
-                  <a:pt x="19838" y="1055404"/>
-                  <a:pt x="0" y="893699"/>
-                </a:cubicBezTo>
-                <a:cubicBezTo>
-                  <a:pt x="-19838" y="731994"/>
-                  <a:pt x="29502" y="305961"/>
+                  <a:pt x="126020" y="-23238"/>
+                  <a:pt x="222709" y="22720"/>
+                  <a:pt x="428930" y="0"/>
+                </a:cubicBezTo>
+                <a:cubicBezTo>
+                  <a:pt x="635151" y="-22720"/>
+                  <a:pt x="871997" y="37740"/>
+                  <a:pt x="1039330" y="0"/>
+                </a:cubicBezTo>
+                <a:cubicBezTo>
+                  <a:pt x="1206663" y="-37740"/>
+                  <a:pt x="1256043" y="40657"/>
+                  <a:pt x="1407769" y="0"/>
+                </a:cubicBezTo>
+                <a:cubicBezTo>
+                  <a:pt x="1559495" y="-40657"/>
+                  <a:pt x="1842649" y="7354"/>
+                  <a:pt x="2018169" y="0"/>
+                </a:cubicBezTo>
+                <a:cubicBezTo>
+                  <a:pt x="2193689" y="-7354"/>
+                  <a:pt x="2244519" y="38899"/>
+                  <a:pt x="2447099" y="0"/>
+                </a:cubicBezTo>
+                <a:cubicBezTo>
+                  <a:pt x="2649679" y="-38899"/>
+                  <a:pt x="2732860" y="45765"/>
+                  <a:pt x="2936519" y="0"/>
+                </a:cubicBezTo>
+                <a:cubicBezTo>
+                  <a:pt x="3140178" y="-45765"/>
+                  <a:pt x="3277198" y="42817"/>
+                  <a:pt x="3365449" y="0"/>
+                </a:cubicBezTo>
+                <a:cubicBezTo>
+                  <a:pt x="3453700" y="-42817"/>
+                  <a:pt x="3618339" y="12082"/>
+                  <a:pt x="3733888" y="0"/>
+                </a:cubicBezTo>
+                <a:cubicBezTo>
+                  <a:pt x="3849437" y="-12082"/>
+                  <a:pt x="4212137" y="20653"/>
+                  <a:pt x="4344288" y="0"/>
+                </a:cubicBezTo>
+                <a:cubicBezTo>
+                  <a:pt x="4476439" y="-20653"/>
+                  <a:pt x="4670938" y="2424"/>
+                  <a:pt x="4773218" y="0"/>
+                </a:cubicBezTo>
+                <a:cubicBezTo>
+                  <a:pt x="4875498" y="-2424"/>
+                  <a:pt x="5204945" y="23808"/>
+                  <a:pt x="5323128" y="0"/>
+                </a:cubicBezTo>
+                <a:cubicBezTo>
+                  <a:pt x="5441311" y="-23808"/>
+                  <a:pt x="5807263" y="81768"/>
+                  <a:pt x="6049009" y="0"/>
+                </a:cubicBezTo>
+                <a:cubicBezTo>
+                  <a:pt x="6115399" y="251924"/>
+                  <a:pt x="6030974" y="323510"/>
+                  <a:pt x="6049009" y="617995"/>
+                </a:cubicBezTo>
+                <a:cubicBezTo>
+                  <a:pt x="6067044" y="912480"/>
+                  <a:pt x="6029438" y="891473"/>
+                  <a:pt x="6049009" y="1082910"/>
+                </a:cubicBezTo>
+                <a:cubicBezTo>
+                  <a:pt x="6068580" y="1274347"/>
+                  <a:pt x="6023353" y="1359719"/>
+                  <a:pt x="6049009" y="1598851"/>
+                </a:cubicBezTo>
+                <a:cubicBezTo>
+                  <a:pt x="6074665" y="1837983"/>
+                  <a:pt x="6044849" y="1840249"/>
+                  <a:pt x="6049009" y="2063765"/>
+                </a:cubicBezTo>
+                <a:cubicBezTo>
+                  <a:pt x="6053169" y="2287281"/>
+                  <a:pt x="6023989" y="2461525"/>
+                  <a:pt x="6049009" y="2681760"/>
+                </a:cubicBezTo>
+                <a:cubicBezTo>
+                  <a:pt x="6074029" y="2901995"/>
+                  <a:pt x="6029330" y="3021643"/>
+                  <a:pt x="6049009" y="3146674"/>
+                </a:cubicBezTo>
+                <a:cubicBezTo>
+                  <a:pt x="6068688" y="3271705"/>
+                  <a:pt x="6025487" y="3446200"/>
+                  <a:pt x="6049009" y="3560561"/>
+                </a:cubicBezTo>
+                <a:cubicBezTo>
+                  <a:pt x="6072531" y="3674922"/>
+                  <a:pt x="6010778" y="4078976"/>
+                  <a:pt x="6049009" y="4229584"/>
+                </a:cubicBezTo>
+                <a:cubicBezTo>
+                  <a:pt x="6087240" y="4380192"/>
+                  <a:pt x="5973435" y="4669379"/>
+                  <a:pt x="6049009" y="5102715"/>
+                </a:cubicBezTo>
+                <a:cubicBezTo>
+                  <a:pt x="5875984" y="5180355"/>
+                  <a:pt x="5559480" y="5045303"/>
+                  <a:pt x="5378119" y="5102715"/>
+                </a:cubicBezTo>
+                <a:cubicBezTo>
+                  <a:pt x="5196758" y="5160127"/>
+                  <a:pt x="5151255" y="5093868"/>
+                  <a:pt x="4949189" y="5102715"/>
+                </a:cubicBezTo>
+                <a:cubicBezTo>
+                  <a:pt x="4747123" y="5111562"/>
+                  <a:pt x="4702166" y="5080135"/>
+                  <a:pt x="4580750" y="5102715"/>
+                </a:cubicBezTo>
+                <a:cubicBezTo>
+                  <a:pt x="4459334" y="5125295"/>
+                  <a:pt x="4209690" y="5073805"/>
+                  <a:pt x="4030840" y="5102715"/>
+                </a:cubicBezTo>
+                <a:cubicBezTo>
+                  <a:pt x="3851990" y="5131625"/>
+                  <a:pt x="3596245" y="5101226"/>
+                  <a:pt x="3420440" y="5102715"/>
+                </a:cubicBezTo>
+                <a:cubicBezTo>
+                  <a:pt x="3244635" y="5104204"/>
+                  <a:pt x="2935726" y="5039429"/>
+                  <a:pt x="2749550" y="5102715"/>
+                </a:cubicBezTo>
+                <a:cubicBezTo>
+                  <a:pt x="2563374" y="5166001"/>
+                  <a:pt x="2456168" y="5063610"/>
+                  <a:pt x="2320620" y="5102715"/>
+                </a:cubicBezTo>
+                <a:cubicBezTo>
+                  <a:pt x="2185072" y="5141820"/>
+                  <a:pt x="1872292" y="5028431"/>
+                  <a:pt x="1649730" y="5102715"/>
+                </a:cubicBezTo>
+                <a:cubicBezTo>
+                  <a:pt x="1427168" y="5176999"/>
+                  <a:pt x="1126493" y="5044941"/>
+                  <a:pt x="978840" y="5102715"/>
+                </a:cubicBezTo>
+                <a:cubicBezTo>
+                  <a:pt x="831187" y="5160489"/>
+                  <a:pt x="715331" y="5065990"/>
+                  <a:pt x="549910" y="5102715"/>
+                </a:cubicBezTo>
+                <a:cubicBezTo>
+                  <a:pt x="384489" y="5139440"/>
+                  <a:pt x="269397" y="5057012"/>
+                  <a:pt x="0" y="5102715"/>
+                </a:cubicBezTo>
+                <a:cubicBezTo>
+                  <a:pt x="-19471" y="4897742"/>
+                  <a:pt x="40561" y="4741391"/>
+                  <a:pt x="0" y="4586774"/>
+                </a:cubicBezTo>
+                <a:cubicBezTo>
+                  <a:pt x="-40561" y="4432157"/>
+                  <a:pt x="41523" y="4239750"/>
+                  <a:pt x="0" y="4121860"/>
+                </a:cubicBezTo>
+                <a:cubicBezTo>
+                  <a:pt x="-41523" y="4003970"/>
+                  <a:pt x="28130" y="3599758"/>
+                  <a:pt x="0" y="3452837"/>
+                </a:cubicBezTo>
+                <a:cubicBezTo>
+                  <a:pt x="-28130" y="3305916"/>
+                  <a:pt x="22249" y="2989593"/>
+                  <a:pt x="0" y="2834842"/>
+                </a:cubicBezTo>
+                <a:cubicBezTo>
+                  <a:pt x="-22249" y="2680091"/>
+                  <a:pt x="4151" y="2504245"/>
+                  <a:pt x="0" y="2369928"/>
+                </a:cubicBezTo>
+                <a:cubicBezTo>
+                  <a:pt x="-4151" y="2235611"/>
+                  <a:pt x="43767" y="1937156"/>
+                  <a:pt x="0" y="1751932"/>
+                </a:cubicBezTo>
+                <a:cubicBezTo>
+                  <a:pt x="-43767" y="1566708"/>
+                  <a:pt x="40202" y="1339282"/>
+                  <a:pt x="0" y="1184964"/>
+                </a:cubicBezTo>
+                <a:cubicBezTo>
+                  <a:pt x="-40202" y="1030646"/>
+                  <a:pt x="19060" y="887483"/>
+                  <a:pt x="0" y="771077"/>
+                </a:cubicBezTo>
+                <a:cubicBezTo>
+                  <a:pt x="-19060" y="654671"/>
+                  <a:pt x="36731" y="311850"/>
                   <a:pt x="0" y="0"/>
                 </a:cubicBezTo>
                 <a:close/>
@@ -15899,7 +16913,7 @@
         </p:nvSpPr>
         <p:spPr>
           <a:xfrm>
-            <a:off x="8158668" y="2382304"/>
+            <a:off x="7309208" y="834092"/>
             <a:ext cx="382621" cy="311284"/>
           </a:xfrm>
           <a:prstGeom prst="star8">
@@ -15956,8 +16970,8 @@
         </p:nvSpPr>
         <p:spPr>
           <a:xfrm>
-            <a:off x="8349979" y="1700325"/>
-            <a:ext cx="637810" cy="577729"/>
+            <a:off x="7620146" y="1213248"/>
+            <a:ext cx="977118" cy="938719"/>
           </a:xfrm>
           <a:prstGeom prst="rect">
             <a:avLst/>
@@ -16007,75 +17021,94 @@
           <p:nvPr/>
         </p:nvPicPr>
         <p:blipFill>
-          <a:blip r:embed="rId4"/>
+          <a:blip r:embed="rId5"/>
+          <a:srcRect r="23417" b="12416"/>
           <a:stretch>
             <a:fillRect/>
           </a:stretch>
         </p:blipFill>
         <p:spPr>
           <a:xfrm>
-            <a:off x="6761128" y="3580427"/>
-            <a:ext cx="4799189" cy="3117553"/>
+            <a:off x="5574361" y="2294221"/>
+            <a:ext cx="5972180" cy="4436834"/>
           </a:xfrm>
           <a:custGeom>
             <a:avLst/>
             <a:gdLst>
-              <a:gd name="csX0" fmla="*/ 0 w 4799189"/>
-              <a:gd name="csY0" fmla="*/ 0 h 3117553"/>
-              <a:gd name="csX1" fmla="*/ 599899 w 4799189"/>
-              <a:gd name="csY1" fmla="*/ 0 h 3117553"/>
-              <a:gd name="csX2" fmla="*/ 1103813 w 4799189"/>
-              <a:gd name="csY2" fmla="*/ 0 h 3117553"/>
-              <a:gd name="csX3" fmla="*/ 1607728 w 4799189"/>
-              <a:gd name="csY3" fmla="*/ 0 h 3117553"/>
-              <a:gd name="csX4" fmla="*/ 2207627 w 4799189"/>
-              <a:gd name="csY4" fmla="*/ 0 h 3117553"/>
-              <a:gd name="csX5" fmla="*/ 2855517 w 4799189"/>
-              <a:gd name="csY5" fmla="*/ 0 h 3117553"/>
-              <a:gd name="csX6" fmla="*/ 3359432 w 4799189"/>
-              <a:gd name="csY6" fmla="*/ 0 h 3117553"/>
-              <a:gd name="csX7" fmla="*/ 3911339 w 4799189"/>
-              <a:gd name="csY7" fmla="*/ 0 h 3117553"/>
-              <a:gd name="csX8" fmla="*/ 4799189 w 4799189"/>
-              <a:gd name="csY8" fmla="*/ 0 h 3117553"/>
-              <a:gd name="csX9" fmla="*/ 4799189 w 4799189"/>
-              <a:gd name="csY9" fmla="*/ 550768 h 3117553"/>
-              <a:gd name="csX10" fmla="*/ 4799189 w 4799189"/>
-              <a:gd name="csY10" fmla="*/ 1039184 h 3117553"/>
-              <a:gd name="csX11" fmla="*/ 4799189 w 4799189"/>
-              <a:gd name="csY11" fmla="*/ 1621128 h 3117553"/>
-              <a:gd name="csX12" fmla="*/ 4799189 w 4799189"/>
-              <a:gd name="csY12" fmla="*/ 2171895 h 3117553"/>
-              <a:gd name="csX13" fmla="*/ 4799189 w 4799189"/>
-              <a:gd name="csY13" fmla="*/ 3117553 h 3117553"/>
-              <a:gd name="csX14" fmla="*/ 4103307 w 4799189"/>
-              <a:gd name="csY14" fmla="*/ 3117553 h 3117553"/>
-              <a:gd name="csX15" fmla="*/ 3407424 w 4799189"/>
-              <a:gd name="csY15" fmla="*/ 3117553 h 3117553"/>
-              <a:gd name="csX16" fmla="*/ 2951501 w 4799189"/>
-              <a:gd name="csY16" fmla="*/ 3117553 h 3117553"/>
-              <a:gd name="csX17" fmla="*/ 2399595 w 4799189"/>
-              <a:gd name="csY17" fmla="*/ 3117553 h 3117553"/>
-              <a:gd name="csX18" fmla="*/ 1847688 w 4799189"/>
-              <a:gd name="csY18" fmla="*/ 3117553 h 3117553"/>
-              <a:gd name="csX19" fmla="*/ 1247789 w 4799189"/>
-              <a:gd name="csY19" fmla="*/ 3117553 h 3117553"/>
-              <a:gd name="csX20" fmla="*/ 695882 w 4799189"/>
-              <a:gd name="csY20" fmla="*/ 3117553 h 3117553"/>
-              <a:gd name="csX21" fmla="*/ 0 w 4799189"/>
-              <a:gd name="csY21" fmla="*/ 3117553 h 3117553"/>
-              <a:gd name="csX22" fmla="*/ 0 w 4799189"/>
-              <a:gd name="csY22" fmla="*/ 2535610 h 3117553"/>
-              <a:gd name="csX23" fmla="*/ 0 w 4799189"/>
-              <a:gd name="csY23" fmla="*/ 2016018 h 3117553"/>
-              <a:gd name="csX24" fmla="*/ 0 w 4799189"/>
-              <a:gd name="csY24" fmla="*/ 1465250 h 3117553"/>
-              <a:gd name="csX25" fmla="*/ 0 w 4799189"/>
-              <a:gd name="csY25" fmla="*/ 1039184 h 3117553"/>
-              <a:gd name="csX26" fmla="*/ 0 w 4799189"/>
-              <a:gd name="csY26" fmla="*/ 488417 h 3117553"/>
-              <a:gd name="csX27" fmla="*/ 0 w 4799189"/>
-              <a:gd name="csY27" fmla="*/ 0 h 3117553"/>
+              <a:gd name="csX0" fmla="*/ 0 w 5972180"/>
+              <a:gd name="csY0" fmla="*/ 0 h 4436834"/>
+              <a:gd name="csX1" fmla="*/ 597218 w 5972180"/>
+              <a:gd name="csY1" fmla="*/ 0 h 4436834"/>
+              <a:gd name="csX2" fmla="*/ 1254158 w 5972180"/>
+              <a:gd name="csY2" fmla="*/ 0 h 4436834"/>
+              <a:gd name="csX3" fmla="*/ 1970819 w 5972180"/>
+              <a:gd name="csY3" fmla="*/ 0 h 4436834"/>
+              <a:gd name="csX4" fmla="*/ 2508316 w 5972180"/>
+              <a:gd name="csY4" fmla="*/ 0 h 4436834"/>
+              <a:gd name="csX5" fmla="*/ 3045812 w 5972180"/>
+              <a:gd name="csY5" fmla="*/ 0 h 4436834"/>
+              <a:gd name="csX6" fmla="*/ 3583308 w 5972180"/>
+              <a:gd name="csY6" fmla="*/ 0 h 4436834"/>
+              <a:gd name="csX7" fmla="*/ 4299970 w 5972180"/>
+              <a:gd name="csY7" fmla="*/ 0 h 4436834"/>
+              <a:gd name="csX8" fmla="*/ 4777744 w 5972180"/>
+              <a:gd name="csY8" fmla="*/ 0 h 4436834"/>
+              <a:gd name="csX9" fmla="*/ 5255518 w 5972180"/>
+              <a:gd name="csY9" fmla="*/ 0 h 4436834"/>
+              <a:gd name="csX10" fmla="*/ 5972180 w 5972180"/>
+              <a:gd name="csY10" fmla="*/ 0 h 4436834"/>
+              <a:gd name="csX11" fmla="*/ 5972180 w 5972180"/>
+              <a:gd name="csY11" fmla="*/ 510236 h 4436834"/>
+              <a:gd name="csX12" fmla="*/ 5972180 w 5972180"/>
+              <a:gd name="csY12" fmla="*/ 1064840 h 4436834"/>
+              <a:gd name="csX13" fmla="*/ 5972180 w 5972180"/>
+              <a:gd name="csY13" fmla="*/ 1619444 h 4436834"/>
+              <a:gd name="csX14" fmla="*/ 5972180 w 5972180"/>
+              <a:gd name="csY14" fmla="*/ 2040944 h 4436834"/>
+              <a:gd name="csX15" fmla="*/ 5972180 w 5972180"/>
+              <a:gd name="csY15" fmla="*/ 2462443 h 4436834"/>
+              <a:gd name="csX16" fmla="*/ 5972180 w 5972180"/>
+              <a:gd name="csY16" fmla="*/ 3017047 h 4436834"/>
+              <a:gd name="csX17" fmla="*/ 5972180 w 5972180"/>
+              <a:gd name="csY17" fmla="*/ 3527283 h 4436834"/>
+              <a:gd name="csX18" fmla="*/ 5972180 w 5972180"/>
+              <a:gd name="csY18" fmla="*/ 4436834 h 4436834"/>
+              <a:gd name="csX19" fmla="*/ 5374962 w 5972180"/>
+              <a:gd name="csY19" fmla="*/ 4436834 h 4436834"/>
+              <a:gd name="csX20" fmla="*/ 4837466 w 5972180"/>
+              <a:gd name="csY20" fmla="*/ 4436834 h 4436834"/>
+              <a:gd name="csX21" fmla="*/ 4120804 w 5972180"/>
+              <a:gd name="csY21" fmla="*/ 4436834 h 4436834"/>
+              <a:gd name="csX22" fmla="*/ 3463864 w 5972180"/>
+              <a:gd name="csY22" fmla="*/ 4436834 h 4436834"/>
+              <a:gd name="csX23" fmla="*/ 2926368 w 5972180"/>
+              <a:gd name="csY23" fmla="*/ 4436834 h 4436834"/>
+              <a:gd name="csX24" fmla="*/ 2508316 w 5972180"/>
+              <a:gd name="csY24" fmla="*/ 4436834 h 4436834"/>
+              <a:gd name="csX25" fmla="*/ 1851376 w 5972180"/>
+              <a:gd name="csY25" fmla="*/ 4436834 h 4436834"/>
+              <a:gd name="csX26" fmla="*/ 1313880 w 5972180"/>
+              <a:gd name="csY26" fmla="*/ 4436834 h 4436834"/>
+              <a:gd name="csX27" fmla="*/ 597218 w 5972180"/>
+              <a:gd name="csY27" fmla="*/ 4436834 h 4436834"/>
+              <a:gd name="csX28" fmla="*/ 0 w 5972180"/>
+              <a:gd name="csY28" fmla="*/ 4436834 h 4436834"/>
+              <a:gd name="csX29" fmla="*/ 0 w 5972180"/>
+              <a:gd name="csY29" fmla="*/ 3926598 h 4436834"/>
+              <a:gd name="csX30" fmla="*/ 0 w 5972180"/>
+              <a:gd name="csY30" fmla="*/ 3505099 h 4436834"/>
+              <a:gd name="csX31" fmla="*/ 0 w 5972180"/>
+              <a:gd name="csY31" fmla="*/ 2994863 h 4436834"/>
+              <a:gd name="csX32" fmla="*/ 0 w 5972180"/>
+              <a:gd name="csY32" fmla="*/ 2395890 h 4436834"/>
+              <a:gd name="csX33" fmla="*/ 0 w 5972180"/>
+              <a:gd name="csY33" fmla="*/ 1885654 h 4436834"/>
+              <a:gd name="csX34" fmla="*/ 0 w 5972180"/>
+              <a:gd name="csY34" fmla="*/ 1464155 h 4436834"/>
+              <a:gd name="csX35" fmla="*/ 0 w 5972180"/>
+              <a:gd name="csY35" fmla="*/ 998288 h 4436834"/>
+              <a:gd name="csX36" fmla="*/ 0 w 5972180"/>
+              <a:gd name="csY36" fmla="*/ 0 h 4436834"/>
             </a:gdLst>
             <a:ahLst/>
             <a:cxnLst>
@@ -16163,292 +17196,409 @@
               <a:cxn ang="0">
                 <a:pos x="csX27" y="csY27"/>
               </a:cxn>
+              <a:cxn ang="0">
+                <a:pos x="csX28" y="csY28"/>
+              </a:cxn>
+              <a:cxn ang="0">
+                <a:pos x="csX29" y="csY29"/>
+              </a:cxn>
+              <a:cxn ang="0">
+                <a:pos x="csX30" y="csY30"/>
+              </a:cxn>
+              <a:cxn ang="0">
+                <a:pos x="csX31" y="csY31"/>
+              </a:cxn>
+              <a:cxn ang="0">
+                <a:pos x="csX32" y="csY32"/>
+              </a:cxn>
+              <a:cxn ang="0">
+                <a:pos x="csX33" y="csY33"/>
+              </a:cxn>
+              <a:cxn ang="0">
+                <a:pos x="csX34" y="csY34"/>
+              </a:cxn>
+              <a:cxn ang="0">
+                <a:pos x="csX35" y="csY35"/>
+              </a:cxn>
+              <a:cxn ang="0">
+                <a:pos x="csX36" y="csY36"/>
+              </a:cxn>
             </a:cxnLst>
             <a:rect l="l" t="t" r="r" b="b"/>
             <a:pathLst>
-              <a:path w="4799189" h="3117553" fill="none" extrusionOk="0">
+              <a:path w="5972180" h="4436834" fill="none" extrusionOk="0">
                 <a:moveTo>
                   <a:pt x="0" y="0"/>
                 </a:moveTo>
                 <a:cubicBezTo>
-                  <a:pt x="260649" y="-58001"/>
-                  <a:pt x="369514" y="28264"/>
-                  <a:pt x="599899" y="0"/>
-                </a:cubicBezTo>
-                <a:cubicBezTo>
-                  <a:pt x="830284" y="-28264"/>
-                  <a:pt x="957226" y="49786"/>
-                  <a:pt x="1103813" y="0"/>
-                </a:cubicBezTo>
-                <a:cubicBezTo>
-                  <a:pt x="1250400" y="-49786"/>
-                  <a:pt x="1460484" y="52568"/>
-                  <a:pt x="1607728" y="0"/>
-                </a:cubicBezTo>
-                <a:cubicBezTo>
-                  <a:pt x="1754973" y="-52568"/>
-                  <a:pt x="2066314" y="59974"/>
-                  <a:pt x="2207627" y="0"/>
-                </a:cubicBezTo>
-                <a:cubicBezTo>
-                  <a:pt x="2348940" y="-59974"/>
-                  <a:pt x="2531834" y="60743"/>
-                  <a:pt x="2855517" y="0"/>
-                </a:cubicBezTo>
-                <a:cubicBezTo>
-                  <a:pt x="3179200" y="-60743"/>
-                  <a:pt x="3120186" y="33903"/>
-                  <a:pt x="3359432" y="0"/>
-                </a:cubicBezTo>
-                <a:cubicBezTo>
-                  <a:pt x="3598678" y="-33903"/>
-                  <a:pt x="3727702" y="9748"/>
-                  <a:pt x="3911339" y="0"/>
-                </a:cubicBezTo>
-                <a:cubicBezTo>
-                  <a:pt x="4094976" y="-9748"/>
-                  <a:pt x="4617972" y="57868"/>
-                  <a:pt x="4799189" y="0"/>
-                </a:cubicBezTo>
-                <a:cubicBezTo>
-                  <a:pt x="4847984" y="252856"/>
-                  <a:pt x="4752860" y="428170"/>
-                  <a:pt x="4799189" y="550768"/>
-                </a:cubicBezTo>
-                <a:cubicBezTo>
-                  <a:pt x="4845518" y="673366"/>
-                  <a:pt x="4747917" y="843742"/>
-                  <a:pt x="4799189" y="1039184"/>
-                </a:cubicBezTo>
-                <a:cubicBezTo>
-                  <a:pt x="4850461" y="1234626"/>
-                  <a:pt x="4739364" y="1353791"/>
-                  <a:pt x="4799189" y="1621128"/>
-                </a:cubicBezTo>
-                <a:cubicBezTo>
-                  <a:pt x="4859014" y="1888465"/>
-                  <a:pt x="4762798" y="1993973"/>
-                  <a:pt x="4799189" y="2171895"/>
-                </a:cubicBezTo>
-                <a:cubicBezTo>
-                  <a:pt x="4835580" y="2349817"/>
-                  <a:pt x="4767000" y="2792074"/>
-                  <a:pt x="4799189" y="3117553"/>
-                </a:cubicBezTo>
-                <a:cubicBezTo>
-                  <a:pt x="4598382" y="3178231"/>
-                  <a:pt x="4254727" y="3043193"/>
-                  <a:pt x="4103307" y="3117553"/>
-                </a:cubicBezTo>
-                <a:cubicBezTo>
-                  <a:pt x="3951887" y="3191913"/>
-                  <a:pt x="3678238" y="3101083"/>
-                  <a:pt x="3407424" y="3117553"/>
-                </a:cubicBezTo>
-                <a:cubicBezTo>
-                  <a:pt x="3136610" y="3134023"/>
-                  <a:pt x="3149094" y="3107421"/>
-                  <a:pt x="2951501" y="3117553"/>
-                </a:cubicBezTo>
-                <a:cubicBezTo>
-                  <a:pt x="2753908" y="3127685"/>
-                  <a:pt x="2591069" y="3095100"/>
-                  <a:pt x="2399595" y="3117553"/>
-                </a:cubicBezTo>
-                <a:cubicBezTo>
-                  <a:pt x="2208121" y="3140006"/>
-                  <a:pt x="1973312" y="3105797"/>
-                  <a:pt x="1847688" y="3117553"/>
-                </a:cubicBezTo>
-                <a:cubicBezTo>
-                  <a:pt x="1722064" y="3129309"/>
-                  <a:pt x="1439678" y="3116423"/>
-                  <a:pt x="1247789" y="3117553"/>
-                </a:cubicBezTo>
-                <a:cubicBezTo>
-                  <a:pt x="1055900" y="3118683"/>
-                  <a:pt x="875611" y="3062707"/>
-                  <a:pt x="695882" y="3117553"/>
-                </a:cubicBezTo>
-                <a:cubicBezTo>
-                  <a:pt x="516153" y="3172399"/>
-                  <a:pt x="222664" y="3081421"/>
-                  <a:pt x="0" y="3117553"/>
-                </a:cubicBezTo>
-                <a:cubicBezTo>
-                  <a:pt x="-29808" y="2953405"/>
-                  <a:pt x="30019" y="2770643"/>
-                  <a:pt x="0" y="2535610"/>
-                </a:cubicBezTo>
-                <a:cubicBezTo>
-                  <a:pt x="-30019" y="2300577"/>
-                  <a:pt x="38504" y="2269581"/>
-                  <a:pt x="0" y="2016018"/>
-                </a:cubicBezTo>
-                <a:cubicBezTo>
-                  <a:pt x="-38504" y="1762455"/>
-                  <a:pt x="36861" y="1708377"/>
-                  <a:pt x="0" y="1465250"/>
-                </a:cubicBezTo>
-                <a:cubicBezTo>
-                  <a:pt x="-36861" y="1222123"/>
-                  <a:pt x="11330" y="1208524"/>
-                  <a:pt x="0" y="1039184"/>
-                </a:cubicBezTo>
-                <a:cubicBezTo>
-                  <a:pt x="-11330" y="869844"/>
-                  <a:pt x="754" y="668694"/>
-                  <a:pt x="0" y="488417"/>
-                </a:cubicBezTo>
-                <a:cubicBezTo>
-                  <a:pt x="-754" y="308140"/>
-                  <a:pt x="22968" y="229296"/>
+                  <a:pt x="145011" y="-25683"/>
+                  <a:pt x="445036" y="48613"/>
+                  <a:pt x="597218" y="0"/>
+                </a:cubicBezTo>
+                <a:cubicBezTo>
+                  <a:pt x="749400" y="-48613"/>
+                  <a:pt x="956086" y="39235"/>
+                  <a:pt x="1254158" y="0"/>
+                </a:cubicBezTo>
+                <a:cubicBezTo>
+                  <a:pt x="1552230" y="-39235"/>
+                  <a:pt x="1790735" y="45546"/>
+                  <a:pt x="1970819" y="0"/>
+                </a:cubicBezTo>
+                <a:cubicBezTo>
+                  <a:pt x="2150903" y="-45546"/>
+                  <a:pt x="2261490" y="48831"/>
+                  <a:pt x="2508316" y="0"/>
+                </a:cubicBezTo>
+                <a:cubicBezTo>
+                  <a:pt x="2755142" y="-48831"/>
+                  <a:pt x="2858151" y="34475"/>
+                  <a:pt x="3045812" y="0"/>
+                </a:cubicBezTo>
+                <a:cubicBezTo>
+                  <a:pt x="3233473" y="-34475"/>
+                  <a:pt x="3361241" y="32403"/>
+                  <a:pt x="3583308" y="0"/>
+                </a:cubicBezTo>
+                <a:cubicBezTo>
+                  <a:pt x="3805375" y="-32403"/>
+                  <a:pt x="4056075" y="25906"/>
+                  <a:pt x="4299970" y="0"/>
+                </a:cubicBezTo>
+                <a:cubicBezTo>
+                  <a:pt x="4543865" y="-25906"/>
+                  <a:pt x="4644098" y="19710"/>
+                  <a:pt x="4777744" y="0"/>
+                </a:cubicBezTo>
+                <a:cubicBezTo>
+                  <a:pt x="4911390" y="-19710"/>
+                  <a:pt x="5150109" y="29058"/>
+                  <a:pt x="5255518" y="0"/>
+                </a:cubicBezTo>
+                <a:cubicBezTo>
+                  <a:pt x="5360927" y="-29058"/>
+                  <a:pt x="5701397" y="6442"/>
+                  <a:pt x="5972180" y="0"/>
+                </a:cubicBezTo>
+                <a:cubicBezTo>
+                  <a:pt x="5989997" y="240102"/>
+                  <a:pt x="5913802" y="265956"/>
+                  <a:pt x="5972180" y="510236"/>
+                </a:cubicBezTo>
+                <a:cubicBezTo>
+                  <a:pt x="6030558" y="754516"/>
+                  <a:pt x="5945718" y="814208"/>
+                  <a:pt x="5972180" y="1064840"/>
+                </a:cubicBezTo>
+                <a:cubicBezTo>
+                  <a:pt x="5998642" y="1315472"/>
+                  <a:pt x="5943202" y="1393433"/>
+                  <a:pt x="5972180" y="1619444"/>
+                </a:cubicBezTo>
+                <a:cubicBezTo>
+                  <a:pt x="6001158" y="1845455"/>
+                  <a:pt x="5936291" y="1857407"/>
+                  <a:pt x="5972180" y="2040944"/>
+                </a:cubicBezTo>
+                <a:cubicBezTo>
+                  <a:pt x="6008069" y="2224481"/>
+                  <a:pt x="5935602" y="2261855"/>
+                  <a:pt x="5972180" y="2462443"/>
+                </a:cubicBezTo>
+                <a:cubicBezTo>
+                  <a:pt x="6008758" y="2663031"/>
+                  <a:pt x="5921881" y="2840696"/>
+                  <a:pt x="5972180" y="3017047"/>
+                </a:cubicBezTo>
+                <a:cubicBezTo>
+                  <a:pt x="6022479" y="3193398"/>
+                  <a:pt x="5954237" y="3325550"/>
+                  <a:pt x="5972180" y="3527283"/>
+                </a:cubicBezTo>
+                <a:cubicBezTo>
+                  <a:pt x="5990123" y="3729016"/>
+                  <a:pt x="5965477" y="4073023"/>
+                  <a:pt x="5972180" y="4436834"/>
+                </a:cubicBezTo>
+                <a:cubicBezTo>
+                  <a:pt x="5740240" y="4497540"/>
+                  <a:pt x="5670808" y="4424448"/>
+                  <a:pt x="5374962" y="4436834"/>
+                </a:cubicBezTo>
+                <a:cubicBezTo>
+                  <a:pt x="5079116" y="4449220"/>
+                  <a:pt x="4959179" y="4375822"/>
+                  <a:pt x="4837466" y="4436834"/>
+                </a:cubicBezTo>
+                <a:cubicBezTo>
+                  <a:pt x="4715753" y="4497846"/>
+                  <a:pt x="4300093" y="4431541"/>
+                  <a:pt x="4120804" y="4436834"/>
+                </a:cubicBezTo>
+                <a:cubicBezTo>
+                  <a:pt x="3941515" y="4442127"/>
+                  <a:pt x="3774630" y="4411668"/>
+                  <a:pt x="3463864" y="4436834"/>
+                </a:cubicBezTo>
+                <a:cubicBezTo>
+                  <a:pt x="3153098" y="4462000"/>
+                  <a:pt x="3130912" y="4427426"/>
+                  <a:pt x="2926368" y="4436834"/>
+                </a:cubicBezTo>
+                <a:cubicBezTo>
+                  <a:pt x="2721824" y="4446242"/>
+                  <a:pt x="2620047" y="4401864"/>
+                  <a:pt x="2508316" y="4436834"/>
+                </a:cubicBezTo>
+                <a:cubicBezTo>
+                  <a:pt x="2396585" y="4471804"/>
+                  <a:pt x="2066598" y="4366401"/>
+                  <a:pt x="1851376" y="4436834"/>
+                </a:cubicBezTo>
+                <a:cubicBezTo>
+                  <a:pt x="1636154" y="4507267"/>
+                  <a:pt x="1480908" y="4390646"/>
+                  <a:pt x="1313880" y="4436834"/>
+                </a:cubicBezTo>
+                <a:cubicBezTo>
+                  <a:pt x="1146852" y="4483022"/>
+                  <a:pt x="741661" y="4416821"/>
+                  <a:pt x="597218" y="4436834"/>
+                </a:cubicBezTo>
+                <a:cubicBezTo>
+                  <a:pt x="452775" y="4456847"/>
+                  <a:pt x="255873" y="4420315"/>
+                  <a:pt x="0" y="4436834"/>
+                </a:cubicBezTo>
+                <a:cubicBezTo>
+                  <a:pt x="-16553" y="4223556"/>
+                  <a:pt x="6544" y="4032716"/>
+                  <a:pt x="0" y="3926598"/>
+                </a:cubicBezTo>
+                <a:cubicBezTo>
+                  <a:pt x="-6544" y="3820480"/>
+                  <a:pt x="25564" y="3683887"/>
+                  <a:pt x="0" y="3505099"/>
+                </a:cubicBezTo>
+                <a:cubicBezTo>
+                  <a:pt x="-25564" y="3326311"/>
+                  <a:pt x="9257" y="3148018"/>
+                  <a:pt x="0" y="2994863"/>
+                </a:cubicBezTo>
+                <a:cubicBezTo>
+                  <a:pt x="-9257" y="2841708"/>
+                  <a:pt x="15301" y="2662054"/>
+                  <a:pt x="0" y="2395890"/>
+                </a:cubicBezTo>
+                <a:cubicBezTo>
+                  <a:pt x="-15301" y="2129726"/>
+                  <a:pt x="35943" y="2110907"/>
+                  <a:pt x="0" y="1885654"/>
+                </a:cubicBezTo>
+                <a:cubicBezTo>
+                  <a:pt x="-35943" y="1660401"/>
+                  <a:pt x="49185" y="1556339"/>
+                  <a:pt x="0" y="1464155"/>
+                </a:cubicBezTo>
+                <a:cubicBezTo>
+                  <a:pt x="-49185" y="1371971"/>
+                  <a:pt x="53572" y="1151855"/>
+                  <a:pt x="0" y="998288"/>
+                </a:cubicBezTo>
+                <a:cubicBezTo>
+                  <a:pt x="-53572" y="844721"/>
+                  <a:pt x="499" y="312515"/>
                   <a:pt x="0" y="0"/>
                 </a:cubicBezTo>
                 <a:close/>
               </a:path>
-              <a:path w="4799189" h="3117553" stroke="0" extrusionOk="0">
+              <a:path w="5972180" h="4436834" stroke="0" extrusionOk="0">
                 <a:moveTo>
                   <a:pt x="0" y="0"/>
                 </a:moveTo>
                 <a:cubicBezTo>
-                  <a:pt x="138743" y="-27232"/>
-                  <a:pt x="344717" y="44420"/>
-                  <a:pt x="503915" y="0"/>
-                </a:cubicBezTo>
-                <a:cubicBezTo>
-                  <a:pt x="663113" y="-44420"/>
-                  <a:pt x="1006739" y="42217"/>
-                  <a:pt x="1151805" y="0"/>
-                </a:cubicBezTo>
-                <a:cubicBezTo>
-                  <a:pt x="1296871" y="-42217"/>
-                  <a:pt x="1504058" y="69977"/>
-                  <a:pt x="1847688" y="0"/>
-                </a:cubicBezTo>
-                <a:cubicBezTo>
-                  <a:pt x="2191318" y="-69977"/>
-                  <a:pt x="2173296" y="34066"/>
-                  <a:pt x="2303611" y="0"/>
-                </a:cubicBezTo>
-                <a:cubicBezTo>
-                  <a:pt x="2433926" y="-34066"/>
-                  <a:pt x="2829143" y="21394"/>
-                  <a:pt x="2999493" y="0"/>
-                </a:cubicBezTo>
-                <a:cubicBezTo>
-                  <a:pt x="3169843" y="-21394"/>
-                  <a:pt x="3276902" y="41681"/>
-                  <a:pt x="3503408" y="0"/>
-                </a:cubicBezTo>
-                <a:cubicBezTo>
-                  <a:pt x="3729915" y="-41681"/>
-                  <a:pt x="3833704" y="32483"/>
-                  <a:pt x="3959331" y="0"/>
-                </a:cubicBezTo>
-                <a:cubicBezTo>
-                  <a:pt x="4084958" y="-32483"/>
-                  <a:pt x="4466283" y="54609"/>
-                  <a:pt x="4799189" y="0"/>
-                </a:cubicBezTo>
-                <a:cubicBezTo>
-                  <a:pt x="4825358" y="208516"/>
-                  <a:pt x="4735850" y="367131"/>
-                  <a:pt x="4799189" y="550768"/>
-                </a:cubicBezTo>
-                <a:cubicBezTo>
-                  <a:pt x="4862528" y="734405"/>
-                  <a:pt x="4749789" y="945306"/>
-                  <a:pt x="4799189" y="1070360"/>
-                </a:cubicBezTo>
-                <a:cubicBezTo>
-                  <a:pt x="4848589" y="1195414"/>
-                  <a:pt x="4765608" y="1390905"/>
-                  <a:pt x="4799189" y="1527601"/>
-                </a:cubicBezTo>
-                <a:cubicBezTo>
-                  <a:pt x="4832770" y="1664297"/>
-                  <a:pt x="4758268" y="1867681"/>
-                  <a:pt x="4799189" y="1984842"/>
-                </a:cubicBezTo>
-                <a:cubicBezTo>
-                  <a:pt x="4840110" y="2102003"/>
-                  <a:pt x="4769746" y="2263996"/>
-                  <a:pt x="4799189" y="2410908"/>
-                </a:cubicBezTo>
-                <a:cubicBezTo>
-                  <a:pt x="4828632" y="2557820"/>
-                  <a:pt x="4765639" y="2840863"/>
-                  <a:pt x="4799189" y="3117553"/>
-                </a:cubicBezTo>
-                <a:cubicBezTo>
-                  <a:pt x="4527049" y="3194025"/>
-                  <a:pt x="4458942" y="3068600"/>
-                  <a:pt x="4151298" y="3117553"/>
-                </a:cubicBezTo>
-                <a:cubicBezTo>
-                  <a:pt x="3843654" y="3166506"/>
-                  <a:pt x="3784985" y="3113528"/>
-                  <a:pt x="3647384" y="3117553"/>
-                </a:cubicBezTo>
-                <a:cubicBezTo>
-                  <a:pt x="3509783" y="3121578"/>
-                  <a:pt x="3237369" y="3100584"/>
-                  <a:pt x="3095477" y="3117553"/>
-                </a:cubicBezTo>
-                <a:cubicBezTo>
-                  <a:pt x="2953585" y="3134522"/>
-                  <a:pt x="2770352" y="3111106"/>
-                  <a:pt x="2495578" y="3117553"/>
-                </a:cubicBezTo>
-                <a:cubicBezTo>
-                  <a:pt x="2220804" y="3124000"/>
-                  <a:pt x="2161824" y="3061585"/>
-                  <a:pt x="1943672" y="3117553"/>
-                </a:cubicBezTo>
-                <a:cubicBezTo>
-                  <a:pt x="1725520" y="3173521"/>
-                  <a:pt x="1499272" y="3110429"/>
-                  <a:pt x="1295781" y="3117553"/>
-                </a:cubicBezTo>
-                <a:cubicBezTo>
-                  <a:pt x="1092290" y="3124677"/>
-                  <a:pt x="937899" y="3105361"/>
-                  <a:pt x="839858" y="3117553"/>
-                </a:cubicBezTo>
-                <a:cubicBezTo>
-                  <a:pt x="741817" y="3129745"/>
-                  <a:pt x="362567" y="3108369"/>
-                  <a:pt x="0" y="3117553"/>
-                </a:cubicBezTo>
-                <a:cubicBezTo>
-                  <a:pt x="-40159" y="2936813"/>
-                  <a:pt x="47770" y="2786055"/>
-                  <a:pt x="0" y="2629136"/>
-                </a:cubicBezTo>
-                <a:cubicBezTo>
-                  <a:pt x="-47770" y="2472217"/>
-                  <a:pt x="35644" y="2320880"/>
-                  <a:pt x="0" y="2047193"/>
-                </a:cubicBezTo>
-                <a:cubicBezTo>
-                  <a:pt x="-35644" y="1773506"/>
-                  <a:pt x="6032" y="1738380"/>
-                  <a:pt x="0" y="1465250"/>
-                </a:cubicBezTo>
-                <a:cubicBezTo>
-                  <a:pt x="-6032" y="1192120"/>
-                  <a:pt x="32356" y="1230486"/>
-                  <a:pt x="0" y="1039184"/>
-                </a:cubicBezTo>
-                <a:cubicBezTo>
-                  <a:pt x="-32356" y="847882"/>
-                  <a:pt x="22791" y="694375"/>
-                  <a:pt x="0" y="550768"/>
-                </a:cubicBezTo>
-                <a:cubicBezTo>
-                  <a:pt x="-22791" y="407161"/>
-                  <a:pt x="16446" y="220965"/>
+                  <a:pt x="148769" y="-33502"/>
+                  <a:pt x="252068" y="2747"/>
+                  <a:pt x="477774" y="0"/>
+                </a:cubicBezTo>
+                <a:cubicBezTo>
+                  <a:pt x="703480" y="-2747"/>
+                  <a:pt x="944152" y="19557"/>
+                  <a:pt x="1134714" y="0"/>
+                </a:cubicBezTo>
+                <a:cubicBezTo>
+                  <a:pt x="1325276" y="-19557"/>
+                  <a:pt x="1585254" y="81681"/>
+                  <a:pt x="1851376" y="0"/>
+                </a:cubicBezTo>
+                <a:cubicBezTo>
+                  <a:pt x="2117498" y="-81681"/>
+                  <a:pt x="2161086" y="45619"/>
+                  <a:pt x="2269428" y="0"/>
+                </a:cubicBezTo>
+                <a:cubicBezTo>
+                  <a:pt x="2377770" y="-45619"/>
+                  <a:pt x="2758531" y="49188"/>
+                  <a:pt x="2986090" y="0"/>
+                </a:cubicBezTo>
+                <a:cubicBezTo>
+                  <a:pt x="3213649" y="-49188"/>
+                  <a:pt x="3263635" y="2985"/>
+                  <a:pt x="3463864" y="0"/>
+                </a:cubicBezTo>
+                <a:cubicBezTo>
+                  <a:pt x="3664093" y="-2985"/>
+                  <a:pt x="3708421" y="21310"/>
+                  <a:pt x="3881917" y="0"/>
+                </a:cubicBezTo>
+                <a:cubicBezTo>
+                  <a:pt x="4055413" y="-21310"/>
+                  <a:pt x="4152906" y="27209"/>
+                  <a:pt x="4359691" y="0"/>
+                </a:cubicBezTo>
+                <a:cubicBezTo>
+                  <a:pt x="4566476" y="-27209"/>
+                  <a:pt x="4691557" y="37018"/>
+                  <a:pt x="5016631" y="0"/>
+                </a:cubicBezTo>
+                <a:cubicBezTo>
+                  <a:pt x="5341705" y="-37018"/>
+                  <a:pt x="5559991" y="83790"/>
+                  <a:pt x="5972180" y="0"/>
+                </a:cubicBezTo>
+                <a:cubicBezTo>
+                  <a:pt x="5989484" y="216672"/>
+                  <a:pt x="5954936" y="313062"/>
+                  <a:pt x="5972180" y="510236"/>
+                </a:cubicBezTo>
+                <a:cubicBezTo>
+                  <a:pt x="5989424" y="707410"/>
+                  <a:pt x="5938534" y="781692"/>
+                  <a:pt x="5972180" y="976103"/>
+                </a:cubicBezTo>
+                <a:cubicBezTo>
+                  <a:pt x="6005826" y="1170514"/>
+                  <a:pt x="5925587" y="1193369"/>
+                  <a:pt x="5972180" y="1397603"/>
+                </a:cubicBezTo>
+                <a:cubicBezTo>
+                  <a:pt x="6018773" y="1601837"/>
+                  <a:pt x="5957072" y="1747824"/>
+                  <a:pt x="5972180" y="1952207"/>
+                </a:cubicBezTo>
+                <a:cubicBezTo>
+                  <a:pt x="5987288" y="2156590"/>
+                  <a:pt x="5910896" y="2254867"/>
+                  <a:pt x="5972180" y="2551180"/>
+                </a:cubicBezTo>
+                <a:cubicBezTo>
+                  <a:pt x="6033464" y="2847493"/>
+                  <a:pt x="5959341" y="2954555"/>
+                  <a:pt x="5972180" y="3061415"/>
+                </a:cubicBezTo>
+                <a:cubicBezTo>
+                  <a:pt x="5985019" y="3168276"/>
+                  <a:pt x="5942370" y="3331336"/>
+                  <a:pt x="5972180" y="3482915"/>
+                </a:cubicBezTo>
+                <a:cubicBezTo>
+                  <a:pt x="6001990" y="3634494"/>
+                  <a:pt x="5907837" y="3967689"/>
+                  <a:pt x="5972180" y="4436834"/>
+                </a:cubicBezTo>
+                <a:cubicBezTo>
+                  <a:pt x="5858217" y="4485914"/>
+                  <a:pt x="5683495" y="4392991"/>
+                  <a:pt x="5554127" y="4436834"/>
+                </a:cubicBezTo>
+                <a:cubicBezTo>
+                  <a:pt x="5424759" y="4480677"/>
+                  <a:pt x="5188493" y="4428992"/>
+                  <a:pt x="4897188" y="4436834"/>
+                </a:cubicBezTo>
+                <a:cubicBezTo>
+                  <a:pt x="4605883" y="4444676"/>
+                  <a:pt x="4609384" y="4436004"/>
+                  <a:pt x="4479135" y="4436834"/>
+                </a:cubicBezTo>
+                <a:cubicBezTo>
+                  <a:pt x="4348886" y="4437664"/>
+                  <a:pt x="4166878" y="4409444"/>
+                  <a:pt x="4061082" y="4436834"/>
+                </a:cubicBezTo>
+                <a:cubicBezTo>
+                  <a:pt x="3955286" y="4464224"/>
+                  <a:pt x="3752635" y="4379375"/>
+                  <a:pt x="3523586" y="4436834"/>
+                </a:cubicBezTo>
+                <a:cubicBezTo>
+                  <a:pt x="3294537" y="4494293"/>
+                  <a:pt x="3247794" y="4415003"/>
+                  <a:pt x="2986090" y="4436834"/>
+                </a:cubicBezTo>
+                <a:cubicBezTo>
+                  <a:pt x="2724386" y="4458665"/>
+                  <a:pt x="2467006" y="4372242"/>
+                  <a:pt x="2269428" y="4436834"/>
+                </a:cubicBezTo>
+                <a:cubicBezTo>
+                  <a:pt x="2071850" y="4501426"/>
+                  <a:pt x="2028668" y="4392703"/>
+                  <a:pt x="1791654" y="4436834"/>
+                </a:cubicBezTo>
+                <a:cubicBezTo>
+                  <a:pt x="1554640" y="4480965"/>
+                  <a:pt x="1436367" y="4393578"/>
+                  <a:pt x="1254158" y="4436834"/>
+                </a:cubicBezTo>
+                <a:cubicBezTo>
+                  <a:pt x="1071949" y="4480090"/>
+                  <a:pt x="1034328" y="4395490"/>
+                  <a:pt x="836105" y="4436834"/>
+                </a:cubicBezTo>
+                <a:cubicBezTo>
+                  <a:pt x="637882" y="4478178"/>
+                  <a:pt x="292868" y="4377201"/>
+                  <a:pt x="0" y="4436834"/>
+                </a:cubicBezTo>
+                <a:cubicBezTo>
+                  <a:pt x="-18241" y="4163069"/>
+                  <a:pt x="71571" y="4066312"/>
+                  <a:pt x="0" y="3837861"/>
+                </a:cubicBezTo>
+                <a:cubicBezTo>
+                  <a:pt x="-71571" y="3609410"/>
+                  <a:pt x="56982" y="3442322"/>
+                  <a:pt x="0" y="3327626"/>
+                </a:cubicBezTo>
+                <a:cubicBezTo>
+                  <a:pt x="-56982" y="3212930"/>
+                  <a:pt x="30054" y="3033610"/>
+                  <a:pt x="0" y="2861758"/>
+                </a:cubicBezTo>
+                <a:cubicBezTo>
+                  <a:pt x="-30054" y="2689906"/>
+                  <a:pt x="44139" y="2557562"/>
+                  <a:pt x="0" y="2395890"/>
+                </a:cubicBezTo>
+                <a:cubicBezTo>
+                  <a:pt x="-44139" y="2234218"/>
+                  <a:pt x="7187" y="2154247"/>
+                  <a:pt x="0" y="1974391"/>
+                </a:cubicBezTo>
+                <a:cubicBezTo>
+                  <a:pt x="-7187" y="1794535"/>
+                  <a:pt x="23295" y="1473732"/>
+                  <a:pt x="0" y="1331050"/>
+                </a:cubicBezTo>
+                <a:cubicBezTo>
+                  <a:pt x="-23295" y="1188368"/>
+                  <a:pt x="4779" y="1069470"/>
+                  <a:pt x="0" y="865183"/>
+                </a:cubicBezTo>
+                <a:cubicBezTo>
+                  <a:pt x="-4779" y="660896"/>
+                  <a:pt x="52052" y="309741"/>
                   <a:pt x="0" y="0"/>
                 </a:cubicBezTo>
                 <a:close/>
@@ -16488,8 +17638,8 @@
         </p:nvSpPr>
         <p:spPr>
           <a:xfrm>
-            <a:off x="8655345" y="5167427"/>
-            <a:ext cx="1253898" cy="1064760"/>
+            <a:off x="8614726" y="4911636"/>
+            <a:ext cx="2096927" cy="1705565"/>
           </a:xfrm>
           <a:prstGeom prst="rect">
             <a:avLst/>
@@ -16524,216 +17674,82 @@
           </a:p>
         </p:txBody>
       </p:sp>
-    </p:spTree>
-    <p:extLst>
-      <p:ext uri="{BB962C8B-B14F-4D97-AF65-F5344CB8AC3E}">
-        <p14:creationId xmlns:p14="http://schemas.microsoft.com/office/powerpoint/2010/main" val="3669504821"/>
-      </p:ext>
-    </p:extLst>
-  </p:cSld>
-  <p:clrMapOvr>
-    <a:masterClrMapping/>
-  </p:clrMapOvr>
-</p:sld>
-</file>
-
-<file path=ppt/slides/slide8.xml><?xml version="1.0" encoding="utf-8"?>
-<p:sld xmlns:a="http://schemas.openxmlformats.org/drawingml/2006/main" xmlns:r="http://schemas.openxmlformats.org/officeDocument/2006/relationships" xmlns:p="http://schemas.openxmlformats.org/presentationml/2006/main">
-  <p:cSld>
-    <p:bg>
-      <p:bgPr>
-        <a:solidFill>
-          <a:srgbClr val="FFFFFF"/>
-        </a:solidFill>
-        <a:effectLst/>
-      </p:bgPr>
-    </p:bg>
-    <p:spTree>
-      <p:nvGrpSpPr>
-        <p:cNvPr id="1" name=""/>
-        <p:cNvGrpSpPr/>
-        <p:nvPr/>
-      </p:nvGrpSpPr>
-      <p:grpSpPr>
-        <a:xfrm>
-          <a:off x="0" y="0"/>
-          <a:ext cx="0" cy="0"/>
-          <a:chOff x="0" y="0"/>
-          <a:chExt cx="0" cy="0"/>
-        </a:xfrm>
-      </p:grpSpPr>
-      <p:sp>
-        <p:nvSpPr>
-          <p:cNvPr id="2" name="TextBox 1"/>
-          <p:cNvSpPr txBox="1"/>
+      <mc:AlternateContent xmlns:mc="http://schemas.openxmlformats.org/markup-compatibility/2006">
+        <mc:Choice xmlns:p14="http://schemas.microsoft.com/office/powerpoint/2010/main" Requires="p14">
+          <p:contentPart p14:bwMode="auto" r:id="rId6">
+            <p14:nvContentPartPr>
+              <p14:cNvPr id="10" name="Ink 9">
+                <a:extLst>
+                  <a:ext uri="{FF2B5EF4-FFF2-40B4-BE49-F238E27FC236}">
+                    <a16:creationId xmlns:a16="http://schemas.microsoft.com/office/drawing/2014/main" id="{8D63BBA6-A7A7-E86C-F0B0-AB80D78043FA}"/>
+                  </a:ext>
+                </a:extLst>
+              </p14:cNvPr>
+              <p14:cNvContentPartPr/>
+              <p14:nvPr/>
+            </p14:nvContentPartPr>
+            <p14:xfrm>
+              <a:off x="8108705" y="5459285"/>
+              <a:ext cx="591480" cy="315000"/>
+            </p14:xfrm>
+          </p:contentPart>
+        </mc:Choice>
+        <mc:Fallback>
+          <p:pic>
+            <p:nvPicPr>
+              <p:cNvPr id="10" name="Ink 9">
+                <a:extLst>
+                  <a:ext uri="{FF2B5EF4-FFF2-40B4-BE49-F238E27FC236}">
+                    <a16:creationId xmlns:a16="http://schemas.microsoft.com/office/drawing/2014/main" id="{8D63BBA6-A7A7-E86C-F0B0-AB80D78043FA}"/>
+                  </a:ext>
+                </a:extLst>
+              </p:cNvPr>
+              <p:cNvPicPr/>
+              <p:nvPr/>
+            </p:nvPicPr>
+            <p:blipFill>
+              <a:blip r:embed="rId7"/>
+              <a:stretch>
+                <a:fillRect/>
+              </a:stretch>
+            </p:blipFill>
+            <p:spPr>
+              <a:xfrm>
+                <a:off x="8102585" y="5453165"/>
+                <a:ext cx="603720" cy="327240"/>
+              </a:xfrm>
+              <a:prstGeom prst="rect">
+                <a:avLst/>
+              </a:prstGeom>
+            </p:spPr>
+          </p:pic>
+        </mc:Fallback>
+      </mc:AlternateContent>
+      <p:sp>
+        <p:nvSpPr>
+          <p:cNvPr id="14" name="Star: 8 Points 13">
+            <a:extLst>
+              <a:ext uri="{FF2B5EF4-FFF2-40B4-BE49-F238E27FC236}">
+                <a16:creationId xmlns:a16="http://schemas.microsoft.com/office/drawing/2014/main" id="{D6BA3195-72E0-0AEF-25D5-4C85A96BD572}"/>
+              </a:ext>
+            </a:extLst>
+          </p:cNvPr>
+          <p:cNvSpPr/>
           <p:nvPr/>
         </p:nvSpPr>
         <p:spPr>
           <a:xfrm>
-            <a:off x="548640" y="411480"/>
-            <a:ext cx="11064240" cy="1097280"/>
+            <a:off x="10428926" y="4450259"/>
+            <a:ext cx="382621" cy="311284"/>
           </a:xfrm>
-          <a:prstGeom prst="rect">
+          <a:prstGeom prst="star8">
             <a:avLst/>
           </a:prstGeom>
           <a:noFill/>
-        </p:spPr>
-        <p:txBody>
-          <a:bodyPr wrap="square">
-            <a:spAutoFit/>
-          </a:bodyPr>
-          <a:lstStyle/>
-          <a:p>
-            <a:pPr>
-              <a:defRPr sz="3200" b="1">
-                <a:solidFill>
-                  <a:srgbClr val="212529"/>
-                </a:solidFill>
-                <a:latin typeface="Segoe UI"/>
-              </a:defRPr>
-            </a:pPr>
-            <a:r>
-              <a:t>Where to start</a:t>
-            </a:r>
-          </a:p>
-          <a:p>
-            <a:pPr>
-              <a:spcBef>
-                <a:spcPts val="600"/>
-              </a:spcBef>
-              <a:defRPr sz="1800">
-                <a:solidFill>
-                  <a:srgbClr val="6C757D"/>
-                </a:solidFill>
-                <a:latin typeface="Segoe UI"/>
-              </a:defRPr>
-            </a:pPr>
-            <a:r>
-              <a:t>School dashboard</a:t>
-            </a:r>
-          </a:p>
-        </p:txBody>
-      </p:sp>
-      <p:sp>
-        <p:nvSpPr>
-          <p:cNvPr id="3" name="TextBox 2"/>
-          <p:cNvSpPr txBox="1"/>
-          <p:nvPr/>
-        </p:nvSpPr>
-        <p:spPr>
-          <a:xfrm>
-            <a:off x="594360" y="1417320"/>
-            <a:ext cx="5303520" cy="1143903"/>
-          </a:xfrm>
-          <a:prstGeom prst="rect">
-            <a:avLst/>
-          </a:prstGeom>
-          <a:noFill/>
-        </p:spPr>
-        <p:txBody>
-          <a:bodyPr wrap="square">
-            <a:spAutoFit/>
-          </a:bodyPr>
-          <a:lstStyle/>
-          <a:p>
-            <a:pPr>
-              <a:spcAft>
-                <a:spcPts val="1000"/>
-              </a:spcAft>
-              <a:defRPr sz="2000">
-                <a:solidFill>
-                  <a:srgbClr val="212529"/>
-                </a:solidFill>
-                <a:latin typeface="Segoe UI"/>
-              </a:defRPr>
-            </a:pPr>
-            <a:r>
-              <a:rPr dirty="0"/>
-              <a:t>Log in</a:t>
-            </a:r>
-            <a:r>
-              <a:rPr lang="en-US" dirty="0"/>
-              <a:t> into the app</a:t>
-            </a:r>
-            <a:r>
-              <a:rPr dirty="0"/>
-              <a:t> →</a:t>
-            </a:r>
-            <a:r>
-              <a:rPr lang="en-US" dirty="0"/>
-              <a:t> </a:t>
-            </a:r>
-            <a:r>
-              <a:rPr dirty="0"/>
-              <a:t>Find card </a:t>
-            </a:r>
-            <a:r>
-              <a:rPr b="1" dirty="0"/>
-              <a:t>My Schedule Overview</a:t>
-            </a:r>
-          </a:p>
-          <a:p>
-            <a:pPr>
-              <a:spcAft>
-                <a:spcPts val="1000"/>
-              </a:spcAft>
-              <a:defRPr sz="2000">
-                <a:solidFill>
-                  <a:srgbClr val="212529"/>
-                </a:solidFill>
-                <a:latin typeface="Segoe UI"/>
-              </a:defRPr>
-            </a:pPr>
-            <a:r>
-              <a:rPr dirty="0"/>
-              <a:t>Click Open My Schedule</a:t>
-            </a:r>
-          </a:p>
-        </p:txBody>
-      </p:sp>
-      <p:pic>
-        <p:nvPicPr>
-          <p:cNvPr id="4" name="Picture 3" descr="01-dashboard-open-my-schedule.png"/>
-          <p:cNvPicPr>
-            <a:picLocks noChangeAspect="1"/>
-          </p:cNvPicPr>
-          <p:nvPr/>
-        </p:nvPicPr>
-        <p:blipFill>
-          <a:blip r:embed="rId3"/>
-          <a:stretch>
-            <a:fillRect/>
-          </a:stretch>
-        </p:blipFill>
-        <p:spPr>
-          <a:xfrm>
-            <a:off x="5943600" y="1325880"/>
-            <a:ext cx="5669280" cy="4572000"/>
-          </a:xfrm>
-          <a:prstGeom prst="rect">
-            <a:avLst/>
-          </a:prstGeom>
-        </p:spPr>
-      </p:pic>
-      <p:sp>
-        <p:nvSpPr>
-          <p:cNvPr id="5" name="Rectangle 4"/>
-          <p:cNvSpPr/>
-          <p:nvPr/>
-        </p:nvSpPr>
-        <p:spPr>
-          <a:xfrm>
-            <a:off x="0" y="6537960"/>
-            <a:ext cx="12191695" cy="320040"/>
-          </a:xfrm>
-          <a:prstGeom prst="rect">
-            <a:avLst/>
-          </a:prstGeom>
-          <a:solidFill>
-            <a:srgbClr val="0D6EFD"/>
-          </a:solidFill>
-          <a:ln>
-            <a:noFill/>
+          <a:ln w="28575">
+            <a:solidFill>
+              <a:srgbClr val="FA1212"/>
+            </a:solidFill>
           </a:ln>
         </p:spPr>
         <p:style>
@@ -16754,21 +17770,1070 @@
           <a:bodyPr rtlCol="0" anchor="ctr"/>
           <a:lstStyle/>
           <a:p>
-            <a:pPr algn="ctr">
-              <a:defRPr sz="1100">
+            <a:pPr algn="ctr"/>
+            <a:r>
+              <a:rPr lang="en-US" dirty="0">
                 <a:solidFill>
-                  <a:srgbClr val="FFFFFF"/>
+                  <a:srgbClr val="FF0000"/>
+                </a:solidFill>
+              </a:rPr>
+              <a:t>2</a:t>
+            </a:r>
+          </a:p>
+        </p:txBody>
+      </p:sp>
+    </p:spTree>
+    <p:extLst>
+      <p:ext uri="{BB962C8B-B14F-4D97-AF65-F5344CB8AC3E}">
+        <p14:creationId xmlns:p14="http://schemas.microsoft.com/office/powerpoint/2010/main" val="3669504821"/>
+      </p:ext>
+    </p:extLst>
+  </p:cSld>
+  <p:clrMapOvr>
+    <a:masterClrMapping/>
+  </p:clrMapOvr>
+</p:sld>
+</file>
+
+<file path=ppt/slides/slide8.xml><?xml version="1.0" encoding="utf-8"?>
+<p:sld xmlns:a="http://schemas.openxmlformats.org/drawingml/2006/main" xmlns:r="http://schemas.openxmlformats.org/officeDocument/2006/relationships" xmlns:p="http://schemas.openxmlformats.org/presentationml/2006/main">
+  <p:cSld>
+    <p:spTree>
+      <p:nvGrpSpPr>
+        <p:cNvPr id="1" name="">
+          <a:extLst>
+            <a:ext uri="{FF2B5EF4-FFF2-40B4-BE49-F238E27FC236}">
+              <a16:creationId xmlns:a16="http://schemas.microsoft.com/office/drawing/2014/main" id="{31E6BD42-DE58-B97A-8BD8-F1B124CB0E54}"/>
+            </a:ext>
+          </a:extLst>
+        </p:cNvPr>
+        <p:cNvGrpSpPr/>
+        <p:nvPr/>
+      </p:nvGrpSpPr>
+      <p:grpSpPr>
+        <a:xfrm>
+          <a:off x="0" y="0"/>
+          <a:ext cx="0" cy="0"/>
+          <a:chOff x="0" y="0"/>
+          <a:chExt cx="0" cy="0"/>
+        </a:xfrm>
+      </p:grpSpPr>
+      <p:grpSp>
+        <p:nvGrpSpPr>
+          <p:cNvPr id="4" name="Group 3">
+            <a:extLst>
+              <a:ext uri="{FF2B5EF4-FFF2-40B4-BE49-F238E27FC236}">
+                <a16:creationId xmlns:a16="http://schemas.microsoft.com/office/drawing/2014/main" id="{2064F589-A203-25FA-98A8-ED2C8A1B95EF}"/>
+              </a:ext>
+            </a:extLst>
+          </p:cNvPr>
+          <p:cNvGrpSpPr/>
+          <p:nvPr/>
+        </p:nvGrpSpPr>
+        <p:grpSpPr>
+          <a:xfrm>
+            <a:off x="0" y="6537960"/>
+            <a:ext cx="12191695" cy="320040"/>
+            <a:chOff x="0" y="6537960"/>
+            <a:chExt cx="12191695" cy="320040"/>
+          </a:xfrm>
+        </p:grpSpPr>
+        <p:sp>
+          <p:nvSpPr>
+            <p:cNvPr id="7" name="Rectangle 6">
+              <a:extLst>
+                <a:ext uri="{FF2B5EF4-FFF2-40B4-BE49-F238E27FC236}">
+                  <a16:creationId xmlns:a16="http://schemas.microsoft.com/office/drawing/2014/main" id="{FA284EA8-530E-099C-F793-6D6DF96D41E6}"/>
+                </a:ext>
+              </a:extLst>
+            </p:cNvPr>
+            <p:cNvSpPr/>
+            <p:nvPr/>
+          </p:nvSpPr>
+          <p:spPr>
+            <a:xfrm>
+              <a:off x="0" y="6537960"/>
+              <a:ext cx="12191695" cy="320040"/>
+            </a:xfrm>
+            <a:prstGeom prst="rect">
+              <a:avLst/>
+            </a:prstGeom>
+            <a:solidFill>
+              <a:srgbClr val="0D6EFD"/>
+            </a:solidFill>
+            <a:ln>
+              <a:noFill/>
+            </a:ln>
+          </p:spPr>
+          <p:style>
+            <a:lnRef idx="1">
+              <a:schemeClr val="accent1"/>
+            </a:lnRef>
+            <a:fillRef idx="3">
+              <a:schemeClr val="accent1"/>
+            </a:fillRef>
+            <a:effectRef idx="2">
+              <a:schemeClr val="accent1"/>
+            </a:effectRef>
+            <a:fontRef idx="minor">
+              <a:schemeClr val="lt1"/>
+            </a:fontRef>
+          </p:style>
+          <p:txBody>
+            <a:bodyPr rtlCol="0" anchor="ctr"/>
+            <a:lstStyle/>
+            <a:p>
+              <a:pPr>
+                <a:defRPr sz="1100">
+                  <a:solidFill>
+                    <a:srgbClr val="FFFFFF"/>
+                  </a:solidFill>
+                  <a:latin typeface="Segoe UI"/>
+                </a:defRPr>
+              </a:pPr>
+              <a:endParaRPr dirty="0"/>
+            </a:p>
+          </p:txBody>
+        </p:sp>
+        <p:pic>
+          <p:nvPicPr>
+            <p:cNvPr id="8" name="Picture 7">
+              <a:extLst>
+                <a:ext uri="{FF2B5EF4-FFF2-40B4-BE49-F238E27FC236}">
+                  <a16:creationId xmlns:a16="http://schemas.microsoft.com/office/drawing/2014/main" id="{867A2AFC-FDF7-0B0A-A392-464B1E18C28F}"/>
+                </a:ext>
+              </a:extLst>
+            </p:cNvPr>
+            <p:cNvPicPr>
+              <a:picLocks noChangeAspect="1"/>
+            </p:cNvPicPr>
+            <p:nvPr/>
+          </p:nvPicPr>
+          <p:blipFill>
+            <a:blip r:embed="rId3"/>
+            <a:stretch>
+              <a:fillRect/>
+            </a:stretch>
+          </p:blipFill>
+          <p:spPr>
+            <a:xfrm>
+              <a:off x="108584" y="6553264"/>
+              <a:ext cx="1158241" cy="274191"/>
+            </a:xfrm>
+            <a:prstGeom prst="rect">
+              <a:avLst/>
+            </a:prstGeom>
+          </p:spPr>
+        </p:pic>
+      </p:grpSp>
+      <p:sp>
+        <p:nvSpPr>
+          <p:cNvPr id="2" name="TextBox 1">
+            <a:extLst>
+              <a:ext uri="{FF2B5EF4-FFF2-40B4-BE49-F238E27FC236}">
+                <a16:creationId xmlns:a16="http://schemas.microsoft.com/office/drawing/2014/main" id="{71F7ABD6-40B5-8D04-DCB1-4D84D555440E}"/>
+              </a:ext>
+            </a:extLst>
+          </p:cNvPr>
+          <p:cNvSpPr txBox="1"/>
+          <p:nvPr/>
+        </p:nvSpPr>
+        <p:spPr>
+          <a:xfrm>
+            <a:off x="322634" y="411480"/>
+            <a:ext cx="5009174" cy="938719"/>
+          </a:xfrm>
+          <a:prstGeom prst="rect">
+            <a:avLst/>
+          </a:prstGeom>
+          <a:noFill/>
+        </p:spPr>
+        <p:txBody>
+          <a:bodyPr wrap="square">
+            <a:spAutoFit/>
+          </a:bodyPr>
+          <a:lstStyle/>
+          <a:p>
+            <a:pPr>
+              <a:defRPr sz="3200" b="1">
+                <a:solidFill>
+                  <a:srgbClr val="212529"/>
                 </a:solidFill>
                 <a:latin typeface="Segoe UI"/>
               </a:defRPr>
             </a:pPr>
             <a:r>
-              <a:t>Teacher daily routine</a:t>
-            </a:r>
+              <a:rPr lang="en-US" dirty="0"/>
+              <a:t>Manage Session</a:t>
+            </a:r>
+          </a:p>
+          <a:p>
+            <a:pPr>
+              <a:spcBef>
+                <a:spcPts val="600"/>
+              </a:spcBef>
+              <a:defRPr sz="1800">
+                <a:solidFill>
+                  <a:srgbClr val="6C757D"/>
+                </a:solidFill>
+                <a:latin typeface="Segoe UI"/>
+              </a:defRPr>
+            </a:pPr>
+            <a:r>
+              <a:rPr lang="en-US" dirty="0"/>
+              <a:t>Everything of a Session</a:t>
+            </a:r>
+            <a:endParaRPr dirty="0"/>
           </a:p>
         </p:txBody>
       </p:sp>
+      <p:sp>
+        <p:nvSpPr>
+          <p:cNvPr id="3" name="TextBox 2">
+            <a:extLst>
+              <a:ext uri="{FF2B5EF4-FFF2-40B4-BE49-F238E27FC236}">
+                <a16:creationId xmlns:a16="http://schemas.microsoft.com/office/drawing/2014/main" id="{C4D13B89-D8D5-811A-CCA5-F232906858F2}"/>
+              </a:ext>
+            </a:extLst>
+          </p:cNvPr>
+          <p:cNvSpPr txBox="1"/>
+          <p:nvPr/>
+        </p:nvSpPr>
+        <p:spPr>
+          <a:xfrm>
+            <a:off x="322633" y="1371485"/>
+            <a:ext cx="4803291" cy="1451679"/>
+          </a:xfrm>
+          <a:prstGeom prst="rect">
+            <a:avLst/>
+          </a:prstGeom>
+          <a:noFill/>
+        </p:spPr>
+        <p:txBody>
+          <a:bodyPr wrap="square">
+            <a:spAutoFit/>
+          </a:bodyPr>
+          <a:lstStyle/>
+          <a:p>
+            <a:pPr>
+              <a:spcAft>
+                <a:spcPts val="1000"/>
+              </a:spcAft>
+              <a:defRPr sz="2000">
+                <a:solidFill>
+                  <a:srgbClr val="212529"/>
+                </a:solidFill>
+                <a:latin typeface="Segoe UI"/>
+              </a:defRPr>
+            </a:pPr>
+            <a:r>
+              <a:rPr lang="en-US" sz="2000" dirty="0"/>
+              <a:t>When you open the Manage Session page for any session, a page will open which has a view </a:t>
+            </a:r>
+            <a:r>
+              <a:rPr lang="en-US" sz="2000"/>
+              <a:t>like what you see here.</a:t>
+            </a:r>
+          </a:p>
+          <a:p>
+            <a:pPr>
+              <a:spcAft>
+                <a:spcPts val="1000"/>
+              </a:spcAft>
+              <a:defRPr sz="2000">
+                <a:solidFill>
+                  <a:srgbClr val="212529"/>
+                </a:solidFill>
+                <a:latin typeface="Segoe UI"/>
+              </a:defRPr>
+            </a:pPr>
+            <a:endParaRPr lang="en-US" sz="2000" dirty="0"/>
+          </a:p>
+        </p:txBody>
+      </p:sp>
+      <p:pic>
+        <p:nvPicPr>
+          <p:cNvPr id="15" name="Picture 14">
+            <a:extLst>
+              <a:ext uri="{FF2B5EF4-FFF2-40B4-BE49-F238E27FC236}">
+                <a16:creationId xmlns:a16="http://schemas.microsoft.com/office/drawing/2014/main" id="{C9F074B7-1D01-4E26-3B9D-702367B2C6AE}"/>
+              </a:ext>
+            </a:extLst>
+          </p:cNvPr>
+          <p:cNvPicPr>
+            <a:picLocks noChangeAspect="1"/>
+          </p:cNvPicPr>
+          <p:nvPr/>
+        </p:nvPicPr>
+        <p:blipFill>
+          <a:blip r:embed="rId4"/>
+          <a:stretch>
+            <a:fillRect/>
+          </a:stretch>
+        </p:blipFill>
+        <p:spPr>
+          <a:xfrm>
+            <a:off x="5331808" y="162325"/>
+            <a:ext cx="6654004" cy="6390939"/>
+          </a:xfrm>
+          <a:custGeom>
+            <a:avLst/>
+            <a:gdLst>
+              <a:gd name="csX0" fmla="*/ 0 w 6654004"/>
+              <a:gd name="csY0" fmla="*/ 0 h 6390939"/>
+              <a:gd name="csX1" fmla="*/ 554500 w 6654004"/>
+              <a:gd name="csY1" fmla="*/ 0 h 6390939"/>
+              <a:gd name="csX2" fmla="*/ 1042461 w 6654004"/>
+              <a:gd name="csY2" fmla="*/ 0 h 6390939"/>
+              <a:gd name="csX3" fmla="*/ 1530421 w 6654004"/>
+              <a:gd name="csY3" fmla="*/ 0 h 6390939"/>
+              <a:gd name="csX4" fmla="*/ 2151461 w 6654004"/>
+              <a:gd name="csY4" fmla="*/ 0 h 6390939"/>
+              <a:gd name="csX5" fmla="*/ 2639422 w 6654004"/>
+              <a:gd name="csY5" fmla="*/ 0 h 6390939"/>
+              <a:gd name="csX6" fmla="*/ 3127382 w 6654004"/>
+              <a:gd name="csY6" fmla="*/ 0 h 6390939"/>
+              <a:gd name="csX7" fmla="*/ 3615342 w 6654004"/>
+              <a:gd name="csY7" fmla="*/ 0 h 6390939"/>
+              <a:gd name="csX8" fmla="*/ 4236383 w 6654004"/>
+              <a:gd name="csY8" fmla="*/ 0 h 6390939"/>
+              <a:gd name="csX9" fmla="*/ 4724343 w 6654004"/>
+              <a:gd name="csY9" fmla="*/ 0 h 6390939"/>
+              <a:gd name="csX10" fmla="*/ 5345383 w 6654004"/>
+              <a:gd name="csY10" fmla="*/ 0 h 6390939"/>
+              <a:gd name="csX11" fmla="*/ 6032964 w 6654004"/>
+              <a:gd name="csY11" fmla="*/ 0 h 6390939"/>
+              <a:gd name="csX12" fmla="*/ 6654004 w 6654004"/>
+              <a:gd name="csY12" fmla="*/ 0 h 6390939"/>
+              <a:gd name="csX13" fmla="*/ 6654004 w 6654004"/>
+              <a:gd name="csY13" fmla="*/ 453176 h 6390939"/>
+              <a:gd name="csX14" fmla="*/ 6654004 w 6654004"/>
+              <a:gd name="csY14" fmla="*/ 842442 h 6390939"/>
+              <a:gd name="csX15" fmla="*/ 6654004 w 6654004"/>
+              <a:gd name="csY15" fmla="*/ 1551255 h 6390939"/>
+              <a:gd name="csX16" fmla="*/ 6654004 w 6654004"/>
+              <a:gd name="csY16" fmla="*/ 2068340 h 6390939"/>
+              <a:gd name="csX17" fmla="*/ 6654004 w 6654004"/>
+              <a:gd name="csY17" fmla="*/ 2777153 h 6390939"/>
+              <a:gd name="csX18" fmla="*/ 6654004 w 6654004"/>
+              <a:gd name="csY18" fmla="*/ 3294239 h 6390939"/>
+              <a:gd name="csX19" fmla="*/ 6654004 w 6654004"/>
+              <a:gd name="csY19" fmla="*/ 3939142 h 6390939"/>
+              <a:gd name="csX20" fmla="*/ 6654004 w 6654004"/>
+              <a:gd name="csY20" fmla="*/ 4520137 h 6390939"/>
+              <a:gd name="csX21" fmla="*/ 6654004 w 6654004"/>
+              <a:gd name="csY21" fmla="*/ 5228950 h 6390939"/>
+              <a:gd name="csX22" fmla="*/ 6654004 w 6654004"/>
+              <a:gd name="csY22" fmla="*/ 5746035 h 6390939"/>
+              <a:gd name="csX23" fmla="*/ 6654004 w 6654004"/>
+              <a:gd name="csY23" fmla="*/ 6390939 h 6390939"/>
+              <a:gd name="csX24" fmla="*/ 6232584 w 6654004"/>
+              <a:gd name="csY24" fmla="*/ 6390939 h 6390939"/>
+              <a:gd name="csX25" fmla="*/ 5811163 w 6654004"/>
+              <a:gd name="csY25" fmla="*/ 6390939 h 6390939"/>
+              <a:gd name="csX26" fmla="*/ 5256663 w 6654004"/>
+              <a:gd name="csY26" fmla="*/ 6390939 h 6390939"/>
+              <a:gd name="csX27" fmla="*/ 4702163 w 6654004"/>
+              <a:gd name="csY27" fmla="*/ 6390939 h 6390939"/>
+              <a:gd name="csX28" fmla="*/ 4280743 w 6654004"/>
+              <a:gd name="csY28" fmla="*/ 6390939 h 6390939"/>
+              <a:gd name="csX29" fmla="*/ 3659702 w 6654004"/>
+              <a:gd name="csY29" fmla="*/ 6390939 h 6390939"/>
+              <a:gd name="csX30" fmla="*/ 3038662 w 6654004"/>
+              <a:gd name="csY30" fmla="*/ 6390939 h 6390939"/>
+              <a:gd name="csX31" fmla="*/ 2683782 w 6654004"/>
+              <a:gd name="csY31" fmla="*/ 6390939 h 6390939"/>
+              <a:gd name="csX32" fmla="*/ 2328901 w 6654004"/>
+              <a:gd name="csY32" fmla="*/ 6390939 h 6390939"/>
+              <a:gd name="csX33" fmla="*/ 1774401 w 6654004"/>
+              <a:gd name="csY33" fmla="*/ 6390939 h 6390939"/>
+              <a:gd name="csX34" fmla="*/ 1153361 w 6654004"/>
+              <a:gd name="csY34" fmla="*/ 6390939 h 6390939"/>
+              <a:gd name="csX35" fmla="*/ 0 w 6654004"/>
+              <a:gd name="csY35" fmla="*/ 6390939 h 6390939"/>
+              <a:gd name="csX36" fmla="*/ 0 w 6654004"/>
+              <a:gd name="csY36" fmla="*/ 5682126 h 6390939"/>
+              <a:gd name="csX37" fmla="*/ 0 w 6654004"/>
+              <a:gd name="csY37" fmla="*/ 5228950 h 6390939"/>
+              <a:gd name="csX38" fmla="*/ 0 w 6654004"/>
+              <a:gd name="csY38" fmla="*/ 4839684 h 6390939"/>
+              <a:gd name="csX39" fmla="*/ 0 w 6654004"/>
+              <a:gd name="csY39" fmla="*/ 4450418 h 6390939"/>
+              <a:gd name="csX40" fmla="*/ 0 w 6654004"/>
+              <a:gd name="csY40" fmla="*/ 4061151 h 6390939"/>
+              <a:gd name="csX41" fmla="*/ 0 w 6654004"/>
+              <a:gd name="csY41" fmla="*/ 3416247 h 6390939"/>
+              <a:gd name="csX42" fmla="*/ 0 w 6654004"/>
+              <a:gd name="csY42" fmla="*/ 3026981 h 6390939"/>
+              <a:gd name="csX43" fmla="*/ 0 w 6654004"/>
+              <a:gd name="csY43" fmla="*/ 2509896 h 6390939"/>
+              <a:gd name="csX44" fmla="*/ 0 w 6654004"/>
+              <a:gd name="csY44" fmla="*/ 2120630 h 6390939"/>
+              <a:gd name="csX45" fmla="*/ 0 w 6654004"/>
+              <a:gd name="csY45" fmla="*/ 1539635 h 6390939"/>
+              <a:gd name="csX46" fmla="*/ 0 w 6654004"/>
+              <a:gd name="csY46" fmla="*/ 1150369 h 6390939"/>
+              <a:gd name="csX47" fmla="*/ 0 w 6654004"/>
+              <a:gd name="csY47" fmla="*/ 505465 h 6390939"/>
+              <a:gd name="csX48" fmla="*/ 0 w 6654004"/>
+              <a:gd name="csY48" fmla="*/ 0 h 6390939"/>
+            </a:gdLst>
+            <a:ahLst/>
+            <a:cxnLst>
+              <a:cxn ang="0">
+                <a:pos x="csX0" y="csY0"/>
+              </a:cxn>
+              <a:cxn ang="0">
+                <a:pos x="csX1" y="csY1"/>
+              </a:cxn>
+              <a:cxn ang="0">
+                <a:pos x="csX2" y="csY2"/>
+              </a:cxn>
+              <a:cxn ang="0">
+                <a:pos x="csX3" y="csY3"/>
+              </a:cxn>
+              <a:cxn ang="0">
+                <a:pos x="csX4" y="csY4"/>
+              </a:cxn>
+              <a:cxn ang="0">
+                <a:pos x="csX5" y="csY5"/>
+              </a:cxn>
+              <a:cxn ang="0">
+                <a:pos x="csX6" y="csY6"/>
+              </a:cxn>
+              <a:cxn ang="0">
+                <a:pos x="csX7" y="csY7"/>
+              </a:cxn>
+              <a:cxn ang="0">
+                <a:pos x="csX8" y="csY8"/>
+              </a:cxn>
+              <a:cxn ang="0">
+                <a:pos x="csX9" y="csY9"/>
+              </a:cxn>
+              <a:cxn ang="0">
+                <a:pos x="csX10" y="csY10"/>
+              </a:cxn>
+              <a:cxn ang="0">
+                <a:pos x="csX11" y="csY11"/>
+              </a:cxn>
+              <a:cxn ang="0">
+                <a:pos x="csX12" y="csY12"/>
+              </a:cxn>
+              <a:cxn ang="0">
+                <a:pos x="csX13" y="csY13"/>
+              </a:cxn>
+              <a:cxn ang="0">
+                <a:pos x="csX14" y="csY14"/>
+              </a:cxn>
+              <a:cxn ang="0">
+                <a:pos x="csX15" y="csY15"/>
+              </a:cxn>
+              <a:cxn ang="0">
+                <a:pos x="csX16" y="csY16"/>
+              </a:cxn>
+              <a:cxn ang="0">
+                <a:pos x="csX17" y="csY17"/>
+              </a:cxn>
+              <a:cxn ang="0">
+                <a:pos x="csX18" y="csY18"/>
+              </a:cxn>
+              <a:cxn ang="0">
+                <a:pos x="csX19" y="csY19"/>
+              </a:cxn>
+              <a:cxn ang="0">
+                <a:pos x="csX20" y="csY20"/>
+              </a:cxn>
+              <a:cxn ang="0">
+                <a:pos x="csX21" y="csY21"/>
+              </a:cxn>
+              <a:cxn ang="0">
+                <a:pos x="csX22" y="csY22"/>
+              </a:cxn>
+              <a:cxn ang="0">
+                <a:pos x="csX23" y="csY23"/>
+              </a:cxn>
+              <a:cxn ang="0">
+                <a:pos x="csX24" y="csY24"/>
+              </a:cxn>
+              <a:cxn ang="0">
+                <a:pos x="csX25" y="csY25"/>
+              </a:cxn>
+              <a:cxn ang="0">
+                <a:pos x="csX26" y="csY26"/>
+              </a:cxn>
+              <a:cxn ang="0">
+                <a:pos x="csX27" y="csY27"/>
+              </a:cxn>
+              <a:cxn ang="0">
+                <a:pos x="csX28" y="csY28"/>
+              </a:cxn>
+              <a:cxn ang="0">
+                <a:pos x="csX29" y="csY29"/>
+              </a:cxn>
+              <a:cxn ang="0">
+                <a:pos x="csX30" y="csY30"/>
+              </a:cxn>
+              <a:cxn ang="0">
+                <a:pos x="csX31" y="csY31"/>
+              </a:cxn>
+              <a:cxn ang="0">
+                <a:pos x="csX32" y="csY32"/>
+              </a:cxn>
+              <a:cxn ang="0">
+                <a:pos x="csX33" y="csY33"/>
+              </a:cxn>
+              <a:cxn ang="0">
+                <a:pos x="csX34" y="csY34"/>
+              </a:cxn>
+              <a:cxn ang="0">
+                <a:pos x="csX35" y="csY35"/>
+              </a:cxn>
+              <a:cxn ang="0">
+                <a:pos x="csX36" y="csY36"/>
+              </a:cxn>
+              <a:cxn ang="0">
+                <a:pos x="csX37" y="csY37"/>
+              </a:cxn>
+              <a:cxn ang="0">
+                <a:pos x="csX38" y="csY38"/>
+              </a:cxn>
+              <a:cxn ang="0">
+                <a:pos x="csX39" y="csY39"/>
+              </a:cxn>
+              <a:cxn ang="0">
+                <a:pos x="csX40" y="csY40"/>
+              </a:cxn>
+              <a:cxn ang="0">
+                <a:pos x="csX41" y="csY41"/>
+              </a:cxn>
+              <a:cxn ang="0">
+                <a:pos x="csX42" y="csY42"/>
+              </a:cxn>
+              <a:cxn ang="0">
+                <a:pos x="csX43" y="csY43"/>
+              </a:cxn>
+              <a:cxn ang="0">
+                <a:pos x="csX44" y="csY44"/>
+              </a:cxn>
+              <a:cxn ang="0">
+                <a:pos x="csX45" y="csY45"/>
+              </a:cxn>
+              <a:cxn ang="0">
+                <a:pos x="csX46" y="csY46"/>
+              </a:cxn>
+              <a:cxn ang="0">
+                <a:pos x="csX47" y="csY47"/>
+              </a:cxn>
+              <a:cxn ang="0">
+                <a:pos x="csX48" y="csY48"/>
+              </a:cxn>
+            </a:cxnLst>
+            <a:rect l="l" t="t" r="r" b="b"/>
+            <a:pathLst>
+              <a:path w="6654004" h="6390939" fill="none" extrusionOk="0">
+                <a:moveTo>
+                  <a:pt x="0" y="0"/>
+                </a:moveTo>
+                <a:cubicBezTo>
+                  <a:pt x="118617" y="-53310"/>
+                  <a:pt x="380964" y="58652"/>
+                  <a:pt x="554500" y="0"/>
+                </a:cubicBezTo>
+                <a:cubicBezTo>
+                  <a:pt x="728036" y="-58652"/>
+                  <a:pt x="884976" y="35543"/>
+                  <a:pt x="1042461" y="0"/>
+                </a:cubicBezTo>
+                <a:cubicBezTo>
+                  <a:pt x="1199946" y="-35543"/>
+                  <a:pt x="1331100" y="8275"/>
+                  <a:pt x="1530421" y="0"/>
+                </a:cubicBezTo>
+                <a:cubicBezTo>
+                  <a:pt x="1729742" y="-8275"/>
+                  <a:pt x="1885591" y="59277"/>
+                  <a:pt x="2151461" y="0"/>
+                </a:cubicBezTo>
+                <a:cubicBezTo>
+                  <a:pt x="2417331" y="-59277"/>
+                  <a:pt x="2486766" y="27876"/>
+                  <a:pt x="2639422" y="0"/>
+                </a:cubicBezTo>
+                <a:cubicBezTo>
+                  <a:pt x="2792078" y="-27876"/>
+                  <a:pt x="2961660" y="35223"/>
+                  <a:pt x="3127382" y="0"/>
+                </a:cubicBezTo>
+                <a:cubicBezTo>
+                  <a:pt x="3293104" y="-35223"/>
+                  <a:pt x="3432836" y="4745"/>
+                  <a:pt x="3615342" y="0"/>
+                </a:cubicBezTo>
+                <a:cubicBezTo>
+                  <a:pt x="3797848" y="-4745"/>
+                  <a:pt x="4014946" y="54853"/>
+                  <a:pt x="4236383" y="0"/>
+                </a:cubicBezTo>
+                <a:cubicBezTo>
+                  <a:pt x="4457820" y="-54853"/>
+                  <a:pt x="4597542" y="12133"/>
+                  <a:pt x="4724343" y="0"/>
+                </a:cubicBezTo>
+                <a:cubicBezTo>
+                  <a:pt x="4851144" y="-12133"/>
+                  <a:pt x="5084006" y="40526"/>
+                  <a:pt x="5345383" y="0"/>
+                </a:cubicBezTo>
+                <a:cubicBezTo>
+                  <a:pt x="5606760" y="-40526"/>
+                  <a:pt x="5885013" y="47383"/>
+                  <a:pt x="6032964" y="0"/>
+                </a:cubicBezTo>
+                <a:cubicBezTo>
+                  <a:pt x="6180915" y="-47383"/>
+                  <a:pt x="6470060" y="49581"/>
+                  <a:pt x="6654004" y="0"/>
+                </a:cubicBezTo>
+                <a:cubicBezTo>
+                  <a:pt x="6694239" y="172828"/>
+                  <a:pt x="6620006" y="253801"/>
+                  <a:pt x="6654004" y="453176"/>
+                </a:cubicBezTo>
+                <a:cubicBezTo>
+                  <a:pt x="6688002" y="652551"/>
+                  <a:pt x="6621785" y="668868"/>
+                  <a:pt x="6654004" y="842442"/>
+                </a:cubicBezTo>
+                <a:cubicBezTo>
+                  <a:pt x="6686223" y="1016016"/>
+                  <a:pt x="6622167" y="1229535"/>
+                  <a:pt x="6654004" y="1551255"/>
+                </a:cubicBezTo>
+                <a:cubicBezTo>
+                  <a:pt x="6685841" y="1872975"/>
+                  <a:pt x="6648355" y="1959916"/>
+                  <a:pt x="6654004" y="2068340"/>
+                </a:cubicBezTo>
+                <a:cubicBezTo>
+                  <a:pt x="6659653" y="2176764"/>
+                  <a:pt x="6615033" y="2603591"/>
+                  <a:pt x="6654004" y="2777153"/>
+                </a:cubicBezTo>
+                <a:cubicBezTo>
+                  <a:pt x="6692975" y="2950715"/>
+                  <a:pt x="6594411" y="3138345"/>
+                  <a:pt x="6654004" y="3294239"/>
+                </a:cubicBezTo>
+                <a:cubicBezTo>
+                  <a:pt x="6713597" y="3450133"/>
+                  <a:pt x="6600561" y="3679646"/>
+                  <a:pt x="6654004" y="3939142"/>
+                </a:cubicBezTo>
+                <a:cubicBezTo>
+                  <a:pt x="6707447" y="4198638"/>
+                  <a:pt x="6651971" y="4323722"/>
+                  <a:pt x="6654004" y="4520137"/>
+                </a:cubicBezTo>
+                <a:cubicBezTo>
+                  <a:pt x="6656037" y="4716553"/>
+                  <a:pt x="6643764" y="4934206"/>
+                  <a:pt x="6654004" y="5228950"/>
+                </a:cubicBezTo>
+                <a:cubicBezTo>
+                  <a:pt x="6664244" y="5523694"/>
+                  <a:pt x="6647316" y="5614283"/>
+                  <a:pt x="6654004" y="5746035"/>
+                </a:cubicBezTo>
+                <a:cubicBezTo>
+                  <a:pt x="6660692" y="5877788"/>
+                  <a:pt x="6612083" y="6257653"/>
+                  <a:pt x="6654004" y="6390939"/>
+                </a:cubicBezTo>
+                <a:cubicBezTo>
+                  <a:pt x="6541416" y="6422681"/>
+                  <a:pt x="6414806" y="6355070"/>
+                  <a:pt x="6232584" y="6390939"/>
+                </a:cubicBezTo>
+                <a:cubicBezTo>
+                  <a:pt x="6050362" y="6426808"/>
+                  <a:pt x="5907823" y="6343464"/>
+                  <a:pt x="5811163" y="6390939"/>
+                </a:cubicBezTo>
+                <a:cubicBezTo>
+                  <a:pt x="5714503" y="6438414"/>
+                  <a:pt x="5479655" y="6353448"/>
+                  <a:pt x="5256663" y="6390939"/>
+                </a:cubicBezTo>
+                <a:cubicBezTo>
+                  <a:pt x="5033671" y="6428430"/>
+                  <a:pt x="4892292" y="6356739"/>
+                  <a:pt x="4702163" y="6390939"/>
+                </a:cubicBezTo>
+                <a:cubicBezTo>
+                  <a:pt x="4512034" y="6425139"/>
+                  <a:pt x="4398873" y="6371833"/>
+                  <a:pt x="4280743" y="6390939"/>
+                </a:cubicBezTo>
+                <a:cubicBezTo>
+                  <a:pt x="4162613" y="6410045"/>
+                  <a:pt x="3892816" y="6373725"/>
+                  <a:pt x="3659702" y="6390939"/>
+                </a:cubicBezTo>
+                <a:cubicBezTo>
+                  <a:pt x="3426588" y="6408153"/>
+                  <a:pt x="3208527" y="6329119"/>
+                  <a:pt x="3038662" y="6390939"/>
+                </a:cubicBezTo>
+                <a:cubicBezTo>
+                  <a:pt x="2868797" y="6452759"/>
+                  <a:pt x="2845712" y="6352608"/>
+                  <a:pt x="2683782" y="6390939"/>
+                </a:cubicBezTo>
+                <a:cubicBezTo>
+                  <a:pt x="2521852" y="6429270"/>
+                  <a:pt x="2414121" y="6382738"/>
+                  <a:pt x="2328901" y="6390939"/>
+                </a:cubicBezTo>
+                <a:cubicBezTo>
+                  <a:pt x="2243681" y="6399140"/>
+                  <a:pt x="1907652" y="6324872"/>
+                  <a:pt x="1774401" y="6390939"/>
+                </a:cubicBezTo>
+                <a:cubicBezTo>
+                  <a:pt x="1641150" y="6457006"/>
+                  <a:pt x="1409970" y="6331405"/>
+                  <a:pt x="1153361" y="6390939"/>
+                </a:cubicBezTo>
+                <a:cubicBezTo>
+                  <a:pt x="896752" y="6450473"/>
+                  <a:pt x="232689" y="6297412"/>
+                  <a:pt x="0" y="6390939"/>
+                </a:cubicBezTo>
+                <a:cubicBezTo>
+                  <a:pt x="-8445" y="6126326"/>
+                  <a:pt x="5126" y="5867892"/>
+                  <a:pt x="0" y="5682126"/>
+                </a:cubicBezTo>
+                <a:cubicBezTo>
+                  <a:pt x="-5126" y="5496360"/>
+                  <a:pt x="40941" y="5419095"/>
+                  <a:pt x="0" y="5228950"/>
+                </a:cubicBezTo>
+                <a:cubicBezTo>
+                  <a:pt x="-40941" y="5038805"/>
+                  <a:pt x="41887" y="4953454"/>
+                  <a:pt x="0" y="4839684"/>
+                </a:cubicBezTo>
+                <a:cubicBezTo>
+                  <a:pt x="-41887" y="4725914"/>
+                  <a:pt x="37387" y="4559123"/>
+                  <a:pt x="0" y="4450418"/>
+                </a:cubicBezTo>
+                <a:cubicBezTo>
+                  <a:pt x="-37387" y="4341713"/>
+                  <a:pt x="5427" y="4227627"/>
+                  <a:pt x="0" y="4061151"/>
+                </a:cubicBezTo>
+                <a:cubicBezTo>
+                  <a:pt x="-5427" y="3894675"/>
+                  <a:pt x="73680" y="3729018"/>
+                  <a:pt x="0" y="3416247"/>
+                </a:cubicBezTo>
+                <a:cubicBezTo>
+                  <a:pt x="-73680" y="3103476"/>
+                  <a:pt x="7737" y="3140110"/>
+                  <a:pt x="0" y="3026981"/>
+                </a:cubicBezTo>
+                <a:cubicBezTo>
+                  <a:pt x="-7737" y="2913852"/>
+                  <a:pt x="33947" y="2748499"/>
+                  <a:pt x="0" y="2509896"/>
+                </a:cubicBezTo>
+                <a:cubicBezTo>
+                  <a:pt x="-33947" y="2271294"/>
+                  <a:pt x="38261" y="2227905"/>
+                  <a:pt x="0" y="2120630"/>
+                </a:cubicBezTo>
+                <a:cubicBezTo>
+                  <a:pt x="-38261" y="2013355"/>
+                  <a:pt x="8092" y="1709848"/>
+                  <a:pt x="0" y="1539635"/>
+                </a:cubicBezTo>
+                <a:cubicBezTo>
+                  <a:pt x="-8092" y="1369422"/>
+                  <a:pt x="30350" y="1279729"/>
+                  <a:pt x="0" y="1150369"/>
+                </a:cubicBezTo>
+                <a:cubicBezTo>
+                  <a:pt x="-30350" y="1021009"/>
+                  <a:pt x="49634" y="723412"/>
+                  <a:pt x="0" y="505465"/>
+                </a:cubicBezTo>
+                <a:cubicBezTo>
+                  <a:pt x="-49634" y="287518"/>
+                  <a:pt x="16239" y="209830"/>
+                  <a:pt x="0" y="0"/>
+                </a:cubicBezTo>
+                <a:close/>
+              </a:path>
+              <a:path w="6654004" h="6390939" stroke="0" extrusionOk="0">
+                <a:moveTo>
+                  <a:pt x="0" y="0"/>
+                </a:moveTo>
+                <a:cubicBezTo>
+                  <a:pt x="245796" y="-957"/>
+                  <a:pt x="377188" y="74704"/>
+                  <a:pt x="687580" y="0"/>
+                </a:cubicBezTo>
+                <a:cubicBezTo>
+                  <a:pt x="997972" y="-74704"/>
+                  <a:pt x="1108725" y="22708"/>
+                  <a:pt x="1308621" y="0"/>
+                </a:cubicBezTo>
+                <a:cubicBezTo>
+                  <a:pt x="1508517" y="-22708"/>
+                  <a:pt x="1612123" y="30490"/>
+                  <a:pt x="1730041" y="0"/>
+                </a:cubicBezTo>
+                <a:cubicBezTo>
+                  <a:pt x="1847959" y="-30490"/>
+                  <a:pt x="2056013" y="72743"/>
+                  <a:pt x="2351081" y="0"/>
+                </a:cubicBezTo>
+                <a:cubicBezTo>
+                  <a:pt x="2646149" y="-72743"/>
+                  <a:pt x="2854399" y="5762"/>
+                  <a:pt x="3038662" y="0"/>
+                </a:cubicBezTo>
+                <a:cubicBezTo>
+                  <a:pt x="3222925" y="-5762"/>
+                  <a:pt x="3448394" y="8036"/>
+                  <a:pt x="3726242" y="0"/>
+                </a:cubicBezTo>
+                <a:cubicBezTo>
+                  <a:pt x="4004090" y="-8036"/>
+                  <a:pt x="3949215" y="28753"/>
+                  <a:pt x="4147662" y="0"/>
+                </a:cubicBezTo>
+                <a:cubicBezTo>
+                  <a:pt x="4346109" y="-28753"/>
+                  <a:pt x="4586265" y="26320"/>
+                  <a:pt x="4835243" y="0"/>
+                </a:cubicBezTo>
+                <a:cubicBezTo>
+                  <a:pt x="5084221" y="-26320"/>
+                  <a:pt x="5338494" y="45030"/>
+                  <a:pt x="5522823" y="0"/>
+                </a:cubicBezTo>
+                <a:cubicBezTo>
+                  <a:pt x="5707152" y="-45030"/>
+                  <a:pt x="5730901" y="16720"/>
+                  <a:pt x="5877704" y="0"/>
+                </a:cubicBezTo>
+                <a:cubicBezTo>
+                  <a:pt x="6024507" y="-16720"/>
+                  <a:pt x="6481765" y="14002"/>
+                  <a:pt x="6654004" y="0"/>
+                </a:cubicBezTo>
+                <a:cubicBezTo>
+                  <a:pt x="6659547" y="148088"/>
+                  <a:pt x="6651889" y="344196"/>
+                  <a:pt x="6654004" y="453176"/>
+                </a:cubicBezTo>
+                <a:cubicBezTo>
+                  <a:pt x="6656119" y="562156"/>
+                  <a:pt x="6586449" y="884389"/>
+                  <a:pt x="6654004" y="1034170"/>
+                </a:cubicBezTo>
+                <a:cubicBezTo>
+                  <a:pt x="6721559" y="1183951"/>
+                  <a:pt x="6609026" y="1375647"/>
+                  <a:pt x="6654004" y="1679074"/>
+                </a:cubicBezTo>
+                <a:cubicBezTo>
+                  <a:pt x="6698982" y="1982501"/>
+                  <a:pt x="6628357" y="2053127"/>
+                  <a:pt x="6654004" y="2196159"/>
+                </a:cubicBezTo>
+                <a:cubicBezTo>
+                  <a:pt x="6679651" y="2339191"/>
+                  <a:pt x="6635561" y="2591252"/>
+                  <a:pt x="6654004" y="2904972"/>
+                </a:cubicBezTo>
+                <a:cubicBezTo>
+                  <a:pt x="6672447" y="3218692"/>
+                  <a:pt x="6640181" y="3300075"/>
+                  <a:pt x="6654004" y="3422057"/>
+                </a:cubicBezTo>
+                <a:cubicBezTo>
+                  <a:pt x="6667827" y="3544040"/>
+                  <a:pt x="6636912" y="3924748"/>
+                  <a:pt x="6654004" y="4066961"/>
+                </a:cubicBezTo>
+                <a:cubicBezTo>
+                  <a:pt x="6671096" y="4209174"/>
+                  <a:pt x="6637747" y="4353643"/>
+                  <a:pt x="6654004" y="4456227"/>
+                </a:cubicBezTo>
+                <a:cubicBezTo>
+                  <a:pt x="6670261" y="4558811"/>
+                  <a:pt x="6615170" y="4845495"/>
+                  <a:pt x="6654004" y="4973313"/>
+                </a:cubicBezTo>
+                <a:cubicBezTo>
+                  <a:pt x="6692838" y="5101131"/>
+                  <a:pt x="6638312" y="5375919"/>
+                  <a:pt x="6654004" y="5490398"/>
+                </a:cubicBezTo>
+                <a:cubicBezTo>
+                  <a:pt x="6669696" y="5604878"/>
+                  <a:pt x="6580745" y="6040911"/>
+                  <a:pt x="6654004" y="6390939"/>
+                </a:cubicBezTo>
+                <a:cubicBezTo>
+                  <a:pt x="6435375" y="6443547"/>
+                  <a:pt x="6328958" y="6385258"/>
+                  <a:pt x="6099504" y="6390939"/>
+                </a:cubicBezTo>
+                <a:cubicBezTo>
+                  <a:pt x="5870050" y="6396620"/>
+                  <a:pt x="5737914" y="6338882"/>
+                  <a:pt x="5411923" y="6390939"/>
+                </a:cubicBezTo>
+                <a:cubicBezTo>
+                  <a:pt x="5085932" y="6442996"/>
+                  <a:pt x="5078105" y="6360032"/>
+                  <a:pt x="4990503" y="6390939"/>
+                </a:cubicBezTo>
+                <a:cubicBezTo>
+                  <a:pt x="4902901" y="6421846"/>
+                  <a:pt x="4620119" y="6338878"/>
+                  <a:pt x="4436003" y="6390939"/>
+                </a:cubicBezTo>
+                <a:cubicBezTo>
+                  <a:pt x="4251887" y="6443000"/>
+                  <a:pt x="4107133" y="6359692"/>
+                  <a:pt x="4014582" y="6390939"/>
+                </a:cubicBezTo>
+                <a:cubicBezTo>
+                  <a:pt x="3922031" y="6422186"/>
+                  <a:pt x="3520394" y="6353188"/>
+                  <a:pt x="3327002" y="6390939"/>
+                </a:cubicBezTo>
+                <a:cubicBezTo>
+                  <a:pt x="3133610" y="6428690"/>
+                  <a:pt x="2853150" y="6343843"/>
+                  <a:pt x="2639422" y="6390939"/>
+                </a:cubicBezTo>
+                <a:cubicBezTo>
+                  <a:pt x="2425694" y="6438035"/>
+                  <a:pt x="2093684" y="6328257"/>
+                  <a:pt x="1951841" y="6390939"/>
+                </a:cubicBezTo>
+                <a:cubicBezTo>
+                  <a:pt x="1809998" y="6453621"/>
+                  <a:pt x="1533435" y="6343626"/>
+                  <a:pt x="1397341" y="6390939"/>
+                </a:cubicBezTo>
+                <a:cubicBezTo>
+                  <a:pt x="1261247" y="6438252"/>
+                  <a:pt x="1124975" y="6389933"/>
+                  <a:pt x="1042461" y="6390939"/>
+                </a:cubicBezTo>
+                <a:cubicBezTo>
+                  <a:pt x="959947" y="6391945"/>
+                  <a:pt x="856895" y="6387631"/>
+                  <a:pt x="687580" y="6390939"/>
+                </a:cubicBezTo>
+                <a:cubicBezTo>
+                  <a:pt x="518265" y="6394247"/>
+                  <a:pt x="305094" y="6347587"/>
+                  <a:pt x="0" y="6390939"/>
+                </a:cubicBezTo>
+                <a:cubicBezTo>
+                  <a:pt x="-26187" y="6264429"/>
+                  <a:pt x="25380" y="5944846"/>
+                  <a:pt x="0" y="5809945"/>
+                </a:cubicBezTo>
+                <a:cubicBezTo>
+                  <a:pt x="-25380" y="5675044"/>
+                  <a:pt x="23143" y="5506396"/>
+                  <a:pt x="0" y="5420678"/>
+                </a:cubicBezTo>
+                <a:cubicBezTo>
+                  <a:pt x="-23143" y="5334960"/>
+                  <a:pt x="51357" y="5006598"/>
+                  <a:pt x="0" y="4711865"/>
+                </a:cubicBezTo>
+                <a:cubicBezTo>
+                  <a:pt x="-51357" y="4417132"/>
+                  <a:pt x="65181" y="4260461"/>
+                  <a:pt x="0" y="4003052"/>
+                </a:cubicBezTo>
+                <a:cubicBezTo>
+                  <a:pt x="-65181" y="3745643"/>
+                  <a:pt x="25560" y="3631899"/>
+                  <a:pt x="0" y="3485967"/>
+                </a:cubicBezTo>
+                <a:cubicBezTo>
+                  <a:pt x="-25560" y="3340036"/>
+                  <a:pt x="44656" y="2999640"/>
+                  <a:pt x="0" y="2841063"/>
+                </a:cubicBezTo>
+                <a:cubicBezTo>
+                  <a:pt x="-44656" y="2682486"/>
+                  <a:pt x="33994" y="2329892"/>
+                  <a:pt x="0" y="2132250"/>
+                </a:cubicBezTo>
+                <a:cubicBezTo>
+                  <a:pt x="-33994" y="1934608"/>
+                  <a:pt x="1179" y="1894532"/>
+                  <a:pt x="0" y="1742983"/>
+                </a:cubicBezTo>
+                <a:cubicBezTo>
+                  <a:pt x="-1179" y="1591434"/>
+                  <a:pt x="23196" y="1434884"/>
+                  <a:pt x="0" y="1289808"/>
+                </a:cubicBezTo>
+                <a:cubicBezTo>
+                  <a:pt x="-23196" y="1144732"/>
+                  <a:pt x="72524" y="779209"/>
+                  <a:pt x="0" y="644904"/>
+                </a:cubicBezTo>
+                <a:cubicBezTo>
+                  <a:pt x="-72524" y="510599"/>
+                  <a:pt x="71735" y="277779"/>
+                  <a:pt x="0" y="0"/>
+                </a:cubicBezTo>
+                <a:close/>
+              </a:path>
+            </a:pathLst>
+          </a:custGeom>
+          <a:ln>
+            <a:solidFill>
+              <a:schemeClr val="tx1"/>
+            </a:solidFill>
+            <a:extLst>
+              <a:ext uri="{C807C97D-BFC1-408E-A445-0C87EB9F89A2}">
+                <ask:lineSketchStyleProps xmlns:ask="http://schemas.microsoft.com/office/drawing/2018/sketchyshapes" sd="4041603980">
+                  <a:prstGeom prst="rect">
+                    <a:avLst/>
+                  </a:prstGeom>
+                  <ask:type>
+                    <ask:lineSketchScribble/>
+                  </ask:type>
+                </ask:lineSketchStyleProps>
+              </a:ext>
+            </a:extLst>
+          </a:ln>
+        </p:spPr>
+      </p:pic>
     </p:spTree>
+    <p:extLst>
+      <p:ext uri="{BB962C8B-B14F-4D97-AF65-F5344CB8AC3E}">
+        <p14:creationId xmlns:p14="http://schemas.microsoft.com/office/powerpoint/2010/main" val="2388697992"/>
+      </p:ext>
+    </p:extLst>
   </p:cSld>
   <p:clrMapOvr>
     <a:masterClrMapping/>
@@ -16832,7 +18897,7 @@
               </a:defRPr>
             </a:pPr>
             <a:r>
-              <a:t>Schedule Overview at a glance</a:t>
+              <a:t>Where to start</a:t>
             </a:r>
           </a:p>
           <a:p>
@@ -16848,7 +18913,7 @@
               </a:defRPr>
             </a:pPr>
             <a:r>
-              <a:t>What am I teaching, when, and what's already done?</a:t>
+              <a:t>School dashboard</a:t>
             </a:r>
           </a:p>
         </p:txBody>
@@ -16862,7 +18927,7 @@
         <p:spPr>
           <a:xfrm>
             <a:off x="594360" y="1417320"/>
-            <a:ext cx="5029200" cy="4754880"/>
+            <a:ext cx="5303520" cy="1143903"/>
           </a:xfrm>
           <a:prstGeom prst="rect">
             <a:avLst/>
@@ -16887,7 +18952,28 @@
               </a:defRPr>
             </a:pPr>
             <a:r>
-              <a:t>Page heading: Schedule Overview</a:t>
+              <a:rPr dirty="0"/>
+              <a:t>Log in</a:t>
+            </a:r>
+            <a:r>
+              <a:rPr lang="en-US" dirty="0"/>
+              <a:t> into the app</a:t>
+            </a:r>
+            <a:r>
+              <a:rPr dirty="0"/>
+              <a:t> →</a:t>
+            </a:r>
+            <a:r>
+              <a:rPr lang="en-US" dirty="0"/>
+              <a:t> </a:t>
+            </a:r>
+            <a:r>
+              <a:rPr dirty="0"/>
+              <a:t>Find card </a:t>
+            </a:r>
+            <a:r>
+              <a:rPr b="1" dirty="0"/>
+              <a:t>My Schedule Overview</a:t>
             </a:r>
           </a:p>
           <a:p>
@@ -16903,46 +18989,15 @@
               </a:defRPr>
             </a:pPr>
             <a:r>
-              <a:t>My Profile / Self View (always you)</a:t>
-            </a:r>
-          </a:p>
-          <a:p>
-            <a:pPr>
-              <a:spcAft>
-                <a:spcPts val="1000"/>
-              </a:spcAft>
-              <a:defRPr sz="2000">
-                <a:solidFill>
-                  <a:srgbClr val="212529"/>
-                </a:solidFill>
-                <a:latin typeface="Segoe UI"/>
-              </a:defRPr>
-            </a:pPr>
-            <a:r>
-              <a:t>Summary: Active Range, hours, Items</a:t>
-            </a:r>
-          </a:p>
-          <a:p>
-            <a:pPr>
-              <a:spcAft>
-                <a:spcPts val="1000"/>
-              </a:spcAft>
-              <a:defRPr sz="2000">
-                <a:solidFill>
-                  <a:srgbClr val="212529"/>
-                </a:solidFill>
-                <a:latin typeface="Segoe UI"/>
-              </a:defRPr>
-            </a:pPr>
-            <a:r>
-              <a:t>Table: Session Details</a:t>
+              <a:rPr dirty="0"/>
+              <a:t>Click Open My Schedule</a:t>
             </a:r>
           </a:p>
         </p:txBody>
       </p:sp>
       <p:pic>
         <p:nvPicPr>
-          <p:cNvPr id="4" name="Picture 3" descr="02-schedule-overview-full.png"/>
+          <p:cNvPr id="4" name="Picture 3" descr="01-dashboard-open-my-schedule.png"/>
           <p:cNvPicPr>
             <a:picLocks noChangeAspect="1"/>
           </p:cNvPicPr>
@@ -16956,67 +19011,122 @@
         </p:blipFill>
         <p:spPr>
           <a:xfrm>
-            <a:off x="5760720" y="1234440"/>
-            <a:ext cx="5852160" cy="4709160"/>
+            <a:off x="5943600" y="1325880"/>
+            <a:ext cx="5669280" cy="4572000"/>
           </a:xfrm>
           <a:prstGeom prst="rect">
             <a:avLst/>
           </a:prstGeom>
         </p:spPr>
       </p:pic>
-      <p:sp>
-        <p:nvSpPr>
-          <p:cNvPr id="5" name="Rectangle 4"/>
-          <p:cNvSpPr/>
+      <p:grpSp>
+        <p:nvGrpSpPr>
+          <p:cNvPr id="6" name="Group 5">
+            <a:extLst>
+              <a:ext uri="{FF2B5EF4-FFF2-40B4-BE49-F238E27FC236}">
+                <a16:creationId xmlns:a16="http://schemas.microsoft.com/office/drawing/2014/main" id="{28750312-4C4A-4160-B34D-1AE19E10DC29}"/>
+              </a:ext>
+            </a:extLst>
+          </p:cNvPr>
+          <p:cNvGrpSpPr/>
           <p:nvPr/>
-        </p:nvSpPr>
-        <p:spPr>
+        </p:nvGrpSpPr>
+        <p:grpSpPr>
           <a:xfrm>
             <a:off x="0" y="6537960"/>
             <a:ext cx="12191695" cy="320040"/>
+            <a:chOff x="0" y="6537960"/>
+            <a:chExt cx="12191695" cy="320040"/>
           </a:xfrm>
-          <a:prstGeom prst="rect">
-            <a:avLst/>
-          </a:prstGeom>
-          <a:solidFill>
-            <a:srgbClr val="0D6EFD"/>
-          </a:solidFill>
-          <a:ln>
-            <a:noFill/>
-          </a:ln>
-        </p:spPr>
-        <p:style>
-          <a:lnRef idx="1">
-            <a:schemeClr val="accent1"/>
-          </a:lnRef>
-          <a:fillRef idx="3">
-            <a:schemeClr val="accent1"/>
-          </a:fillRef>
-          <a:effectRef idx="2">
-            <a:schemeClr val="accent1"/>
-          </a:effectRef>
-          <a:fontRef idx="minor">
-            <a:schemeClr val="lt1"/>
-          </a:fontRef>
-        </p:style>
-        <p:txBody>
-          <a:bodyPr rtlCol="0" anchor="ctr"/>
-          <a:lstStyle/>
-          <a:p>
-            <a:pPr algn="ctr">
-              <a:defRPr sz="1100">
-                <a:solidFill>
-                  <a:srgbClr val="FFFFFF"/>
-                </a:solidFill>
-                <a:latin typeface="Segoe UI"/>
-              </a:defRPr>
-            </a:pPr>
-            <a:r>
-              <a:t>Teacher daily routine</a:t>
-            </a:r>
-          </a:p>
-        </p:txBody>
-      </p:sp>
+        </p:grpSpPr>
+        <p:sp>
+          <p:nvSpPr>
+            <p:cNvPr id="7" name="Rectangle 6">
+              <a:extLst>
+                <a:ext uri="{FF2B5EF4-FFF2-40B4-BE49-F238E27FC236}">
+                  <a16:creationId xmlns:a16="http://schemas.microsoft.com/office/drawing/2014/main" id="{83A74445-6501-D4F2-376B-20DDDEC67C81}"/>
+                </a:ext>
+              </a:extLst>
+            </p:cNvPr>
+            <p:cNvSpPr/>
+            <p:nvPr/>
+          </p:nvSpPr>
+          <p:spPr>
+            <a:xfrm>
+              <a:off x="0" y="6537960"/>
+              <a:ext cx="12191695" cy="320040"/>
+            </a:xfrm>
+            <a:prstGeom prst="rect">
+              <a:avLst/>
+            </a:prstGeom>
+            <a:solidFill>
+              <a:srgbClr val="0D6EFD"/>
+            </a:solidFill>
+            <a:ln>
+              <a:noFill/>
+            </a:ln>
+          </p:spPr>
+          <p:style>
+            <a:lnRef idx="1">
+              <a:schemeClr val="accent1"/>
+            </a:lnRef>
+            <a:fillRef idx="3">
+              <a:schemeClr val="accent1"/>
+            </a:fillRef>
+            <a:effectRef idx="2">
+              <a:schemeClr val="accent1"/>
+            </a:effectRef>
+            <a:fontRef idx="minor">
+              <a:schemeClr val="lt1"/>
+            </a:fontRef>
+          </p:style>
+          <p:txBody>
+            <a:bodyPr rtlCol="0" anchor="ctr"/>
+            <a:lstStyle/>
+            <a:p>
+              <a:pPr>
+                <a:defRPr sz="1100">
+                  <a:solidFill>
+                    <a:srgbClr val="FFFFFF"/>
+                  </a:solidFill>
+                  <a:latin typeface="Segoe UI"/>
+                </a:defRPr>
+              </a:pPr>
+              <a:endParaRPr dirty="0"/>
+            </a:p>
+          </p:txBody>
+        </p:sp>
+        <p:pic>
+          <p:nvPicPr>
+            <p:cNvPr id="8" name="Picture 7">
+              <a:extLst>
+                <a:ext uri="{FF2B5EF4-FFF2-40B4-BE49-F238E27FC236}">
+                  <a16:creationId xmlns:a16="http://schemas.microsoft.com/office/drawing/2014/main" id="{04FC76B5-0735-7901-7383-22FEA81095EF}"/>
+                </a:ext>
+              </a:extLst>
+            </p:cNvPr>
+            <p:cNvPicPr>
+              <a:picLocks noChangeAspect="1"/>
+            </p:cNvPicPr>
+            <p:nvPr/>
+          </p:nvPicPr>
+          <p:blipFill>
+            <a:blip r:embed="rId4"/>
+            <a:stretch>
+              <a:fillRect/>
+            </a:stretch>
+          </p:blipFill>
+          <p:spPr>
+            <a:xfrm>
+              <a:off x="108584" y="6553264"/>
+              <a:ext cx="1158241" cy="274191"/>
+            </a:xfrm>
+            <a:prstGeom prst="rect">
+              <a:avLst/>
+            </a:prstGeom>
+          </p:spPr>
+        </p:pic>
+      </p:grpSp>
     </p:spTree>
   </p:cSld>
   <p:clrMapOvr>
